--- a/docs/submission/ZeroDrift_SIH26169.pptx
+++ b/docs/submission/ZeroDrift_SIH26169.pptx
@@ -6648,7 +6648,7 @@
                 </a:solidFill>
                 <a:latin typeface="Arial"/>
               </a:rPr>
-              <a:t>GUI console, standalone app, hosted replay console, 73 automated tests — every number here is measured, not projected.</a:t>
+              <a:t>GUI console, standalone app, 73 automated tests, and a zero-install browser demo judges run on their own camera — every number measured, not projected.</a:t>
             </a:r>
           </a:p>
         </p:txBody>
@@ -6712,7 +6712,7 @@
                 </a:solidFill>
                 <a:latin typeface="Arial"/>
               </a:rPr>
-              <a:t>Our console locked on the beacon — the same view the live demo link opens</a:t>
+              <a:t>Our console locked — judges can run this tracker on their own camera</a:t>
             </a:r>
           </a:p>
         </p:txBody>
@@ -7950,7 +7950,7 @@
                 </a:solidFill>
                 <a:latin typeface="Arial"/>
               </a:rPr>
-              <a:t>Standalone Windows/Linux app builds in one click</a:t>
+              <a:t>Standalone Windows/Linux app builds in one click; the browser demo needs no install at all</a:t>
             </a:r>
           </a:p>
           <a:p>
@@ -10104,7 +10104,7 @@
                 </a:solidFill>
                 <a:latin typeface="Arial"/>
               </a:rPr>
-              <a:t>Live demo (replay console):  </a:t>
+              <a:t>Live demo:  </a:t>
             </a:r>
             <a:r>
               <a:rPr sz="1100" u="sng">
@@ -10139,7 +10139,7 @@
                 </a:solidFill>
                 <a:latin typeface="Arial"/>
               </a:rPr>
-              <a:t>full source (5,000+ lines, documented) · 73 automated tests · 6 validated scenarios · Monte-Carlo campaign logs · technical report · user manual · demo video.</a:t>
+              <a:t>full source (5,000+ lines, documented) · 73 automated tests · 6 validated scenarios · Monte-Carlo logs · technical report · user manual · and /live.html, an in-browser tracker that runs on any laptop or phone camera with nothing installed.</a:t>
             </a:r>
           </a:p>
           <a:p>

--- a/docs/submission/ZeroDrift_SIH26169.pptx
+++ b/docs/submission/ZeroDrift_SIH26169.pptx
@@ -12856,7 +12856,7 @@
             </a:avLst>
           </a:prstGeom>
           <a:solidFill>
-            <a:srgbClr val="FDF8E8"/>
+            <a:srgbClr val="FCF0EE"/>
           </a:solidFill>
           <a:ln>
             <a:noFill/>
@@ -12910,11 +12910,11 @@
             <a:r>
               <a:rPr sz="950" b="0" i="0">
                 <a:solidFill>
-                  <a:srgbClr val="0B2545"/>
-                </a:solidFill>
-                <a:latin typeface="Arial"/>
-              </a:rPr>
-              <a:t>Tracking error</a:t>
+                  <a:srgbClr val="9C2E23"/>
+                </a:solidFill>
+                <a:latin typeface="Arial"/>
+              </a:rPr>
+              <a:t>Acquisition time</a:t>
             </a:r>
           </a:p>
         </p:txBody>
@@ -12944,11 +12944,11 @@
             <a:r>
               <a:rPr sz="950" b="0" i="0">
                 <a:solidFill>
-                  <a:srgbClr val="0B2545"/>
-                </a:solidFill>
-                <a:latin typeface="Arial"/>
-              </a:rPr>
-              <a:t>≤ 10 px</a:t>
+                  <a:srgbClr val="9C2E23"/>
+                </a:solidFill>
+                <a:latin typeface="Arial"/>
+              </a:rPr>
+              <a:t>≤ 2 s</a:t>
             </a:r>
           </a:p>
         </p:txBody>
@@ -12978,11 +12978,11 @@
             <a:r>
               <a:rPr sz="950" b="1" i="0">
                 <a:solidFill>
-                  <a:srgbClr val="0B2545"/>
-                </a:solidFill>
-                <a:latin typeface="Arial"/>
-              </a:rPr>
-              <a:t>9.4 px  (drift nulled)</a:t>
+                  <a:srgbClr val="9C2E23"/>
+                </a:solidFill>
+                <a:latin typeface="Arial"/>
+              </a:rPr>
+              <a:t>25.3 s → 3.53 s  — open</a:t>
             </a:r>
           </a:p>
         </p:txBody>
@@ -13013,11 +13013,11 @@
             <a:r>
               <a:rPr sz="1100" b="1" i="0">
                 <a:solidFill>
-                  <a:srgbClr val="5A6472"/>
-                </a:solidFill>
-                <a:latin typeface="Arial"/>
-              </a:rPr>
-              <a:t>~</a:t>
+                  <a:srgbClr val="9C2E23"/>
+                </a:solidFill>
+                <a:latin typeface="Arial"/>
+              </a:rPr>
+              <a:t>✗</a:t>
             </a:r>
           </a:p>
         </p:txBody>
@@ -13039,7 +13039,7 @@
             </a:avLst>
           </a:prstGeom>
           <a:solidFill>
-            <a:srgbClr val="FDF8E8"/>
+            <a:srgbClr val="FCF0EE"/>
           </a:solidFill>
           <a:ln>
             <a:noFill/>
@@ -13093,11 +13093,11 @@
             <a:r>
               <a:rPr sz="950" b="0" i="0">
                 <a:solidFill>
-                  <a:srgbClr val="0B2545"/>
-                </a:solidFill>
-                <a:latin typeface="Arial"/>
-              </a:rPr>
-              <a:t>Acquisition time</a:t>
+                  <a:srgbClr val="9C2E23"/>
+                </a:solidFill>
+                <a:latin typeface="Arial"/>
+              </a:rPr>
+              <a:t>Tracking error (median)</a:t>
             </a:r>
           </a:p>
         </p:txBody>
@@ -13127,11 +13127,11 @@
             <a:r>
               <a:rPr sz="950" b="0" i="0">
                 <a:solidFill>
-                  <a:srgbClr val="0B2545"/>
-                </a:solidFill>
-                <a:latin typeface="Arial"/>
-              </a:rPr>
-              <a:t>≤ 2 s</a:t>
+                  <a:srgbClr val="9C2E23"/>
+                </a:solidFill>
+                <a:latin typeface="Arial"/>
+              </a:rPr>
+              <a:t>≤ 10 px</a:t>
             </a:r>
           </a:p>
         </p:txBody>
@@ -13161,11 +13161,11 @@
             <a:r>
               <a:rPr sz="950" b="1" i="0">
                 <a:solidFill>
-                  <a:srgbClr val="0B2545"/>
-                </a:solidFill>
-                <a:latin typeface="Arial"/>
-              </a:rPr>
-              <a:t>1.77 s  (drift nulled)</a:t>
+                  <a:srgbClr val="9C2E23"/>
+                </a:solidFill>
+                <a:latin typeface="Arial"/>
+              </a:rPr>
+              <a:t>2,367 → 170 px  — open</a:t>
             </a:r>
           </a:p>
         </p:txBody>
@@ -13196,11 +13196,11 @@
             <a:r>
               <a:rPr sz="1100" b="1" i="0">
                 <a:solidFill>
-                  <a:srgbClr val="5A6472"/>
-                </a:solidFill>
-                <a:latin typeface="Arial"/>
-              </a:rPr>
-              <a:t>~</a:t>
+                  <a:srgbClr val="9C2E23"/>
+                </a:solidFill>
+                <a:latin typeface="Arial"/>
+              </a:rPr>
+              <a:t>✗</a:t>
             </a:r>
           </a:p>
         </p:txBody>
@@ -13468,7 +13468,7 @@
                 </a:solidFill>
                 <a:latin typeface="Arial"/>
               </a:rPr>
-              <a:t>~ measured with platform drift removed.  </a:t>
+              <a:t>The three open rows are open, not footnoted.  </a:t>
             </a:r>
             <a:r>
               <a:rPr sz="900" b="0" i="0">
@@ -13477,7 +13477,7 @@
                 </a:solidFill>
                 <a:latin typeface="Arial"/>
               </a:rPr>
-              <a:t>Ablation isolates the whole remaining failure to one cause: a constant-velocity disturbance is a ramp, and a PD loop has finite steady-state error to a ramp. Integral action is the fix — not tuning.</a:t>
+              <a:t>Arrows are before → after our own fix, both measured with the full specified disturbance present. A constant-velocity platform drift is a ramp, and a PD loop has finite steady-state error to a ramp — wrong loop order, not bad tuning. Adding a second integrator (type 2, leaky) cut acquisition 7x and median error 14x. It is implemented and shipped; it is not yet enough.</a:t>
             </a:r>
           </a:p>
           <a:p>

--- a/docs/submission/ZeroDrift_SIH26169.pptx
+++ b/docs/submission/ZeroDrift_SIH26169.pptx
@@ -160,6 +160,1695 @@
     </p:ext>
   </p:extLst>
 </p:presentation>
+</file>
+
+<file path=ppt/charts/chart1.xml><?xml version="1.0" encoding="utf-8"?>
+<c:chartSpace xmlns:c="http://schemas.openxmlformats.org/drawingml/2006/chart" xmlns:a="http://schemas.openxmlformats.org/drawingml/2006/main" xmlns:r="http://schemas.openxmlformats.org/officeDocument/2006/relationships">
+  <c:chart>
+    <c:title>
+      <c:tx>
+        <c:rich>
+          <a:bodyPr/>
+          <a:lstStyle/>
+          <a:p>
+            <a:r>
+              <a:rPr sz="1050" b="1" i="0">
+                <a:solidFill>
+                  <a:srgbClr val="0B2545"/>
+                </a:solidFill>
+                <a:latin typeface="Arial"/>
+              </a:rPr>
+              <a:t>ISS pass: </a:t>
+            </a:r>
+            <a:r>
+              <a:rPr sz="1000" b="0" i="0">
+                <a:solidFill>
+                  <a:srgbClr val="0B2545"/>
+                </a:solidFill>
+                <a:latin typeface="Arial"/>
+              </a:rPr>
+              <a:t>lock in 1.27 s, median 198 µrad</a:t>
+            </a:r>
+          </a:p>
+        </c:rich>
+      </c:tx>
+      <c:layout/>
+      <c:overlay val="0"/>
+    </c:title>
+    <c:plotArea>
+      <c:scatterChart>
+        <c:scatterStyle val="lineMarker"/>
+        <c:varyColors val="0"/>
+        <c:ser>
+          <c:idx val="0"/>
+          <c:order val="0"/>
+          <c:tx>
+            <c:strRef>
+              <c:f>Sheet1!$B$1</c:f>
+              <c:strCache>
+                <c:ptCount val="1"/>
+                <c:pt idx="0">
+                  <c:v>Pointing error</c:v>
+                </c:pt>
+              </c:strCache>
+            </c:strRef>
+          </c:tx>
+          <c:spPr>
+            <a:ln w="15875">
+              <a:solidFill>
+                <a:srgbClr val="0E7C99"/>
+              </a:solidFill>
+            </a:ln>
+          </c:spPr>
+          <c:marker>
+            <c:symbol val="none"/>
+          </c:marker>
+          <c:xVal>
+            <c:numRef>
+              <c:f>Sheet1!$A$2:$A$194</c:f>
+              <c:numCache>
+                <c:formatCode>General</c:formatCode>
+                <c:ptCount val="193"/>
+                <c:pt idx="0">
+                  <c:v>0.0</c:v>
+                </c:pt>
+                <c:pt idx="1">
+                  <c:v>0.233</c:v>
+                </c:pt>
+                <c:pt idx="2">
+                  <c:v>0.467</c:v>
+                </c:pt>
+                <c:pt idx="3">
+                  <c:v>0.7</c:v>
+                </c:pt>
+                <c:pt idx="4">
+                  <c:v>0.933</c:v>
+                </c:pt>
+                <c:pt idx="5">
+                  <c:v>1.167</c:v>
+                </c:pt>
+                <c:pt idx="6">
+                  <c:v>1.4</c:v>
+                </c:pt>
+                <c:pt idx="7">
+                  <c:v>1.633</c:v>
+                </c:pt>
+                <c:pt idx="8">
+                  <c:v>1.867</c:v>
+                </c:pt>
+                <c:pt idx="9">
+                  <c:v>2.1</c:v>
+                </c:pt>
+                <c:pt idx="10">
+                  <c:v>2.333</c:v>
+                </c:pt>
+                <c:pt idx="11">
+                  <c:v>2.567</c:v>
+                </c:pt>
+                <c:pt idx="12">
+                  <c:v>2.8</c:v>
+                </c:pt>
+                <c:pt idx="13">
+                  <c:v>3.033</c:v>
+                </c:pt>
+                <c:pt idx="14">
+                  <c:v>3.267</c:v>
+                </c:pt>
+                <c:pt idx="15">
+                  <c:v>3.5</c:v>
+                </c:pt>
+                <c:pt idx="16">
+                  <c:v>3.733</c:v>
+                </c:pt>
+                <c:pt idx="17">
+                  <c:v>3.967</c:v>
+                </c:pt>
+                <c:pt idx="18">
+                  <c:v>4.2</c:v>
+                </c:pt>
+                <c:pt idx="19">
+                  <c:v>4.433</c:v>
+                </c:pt>
+                <c:pt idx="20">
+                  <c:v>4.667</c:v>
+                </c:pt>
+                <c:pt idx="21">
+                  <c:v>4.9</c:v>
+                </c:pt>
+                <c:pt idx="22">
+                  <c:v>5.133</c:v>
+                </c:pt>
+                <c:pt idx="23">
+                  <c:v>5.367</c:v>
+                </c:pt>
+                <c:pt idx="24">
+                  <c:v>5.6</c:v>
+                </c:pt>
+                <c:pt idx="25">
+                  <c:v>5.833</c:v>
+                </c:pt>
+                <c:pt idx="26">
+                  <c:v>6.067</c:v>
+                </c:pt>
+                <c:pt idx="27">
+                  <c:v>6.3</c:v>
+                </c:pt>
+                <c:pt idx="28">
+                  <c:v>6.533</c:v>
+                </c:pt>
+                <c:pt idx="29">
+                  <c:v>6.767</c:v>
+                </c:pt>
+                <c:pt idx="30">
+                  <c:v>7.0</c:v>
+                </c:pt>
+                <c:pt idx="31">
+                  <c:v>7.233</c:v>
+                </c:pt>
+                <c:pt idx="32">
+                  <c:v>7.467</c:v>
+                </c:pt>
+                <c:pt idx="33">
+                  <c:v>7.7</c:v>
+                </c:pt>
+                <c:pt idx="34">
+                  <c:v>7.933</c:v>
+                </c:pt>
+                <c:pt idx="35">
+                  <c:v>8.167</c:v>
+                </c:pt>
+                <c:pt idx="36">
+                  <c:v>8.4</c:v>
+                </c:pt>
+                <c:pt idx="37">
+                  <c:v>8.633</c:v>
+                </c:pt>
+                <c:pt idx="38">
+                  <c:v>8.867</c:v>
+                </c:pt>
+                <c:pt idx="39">
+                  <c:v>9.1</c:v>
+                </c:pt>
+                <c:pt idx="40">
+                  <c:v>9.333</c:v>
+                </c:pt>
+                <c:pt idx="41">
+                  <c:v>9.567</c:v>
+                </c:pt>
+                <c:pt idx="42">
+                  <c:v>9.8</c:v>
+                </c:pt>
+                <c:pt idx="43">
+                  <c:v>10.033</c:v>
+                </c:pt>
+                <c:pt idx="44">
+                  <c:v>10.267</c:v>
+                </c:pt>
+                <c:pt idx="45">
+                  <c:v>10.5</c:v>
+                </c:pt>
+                <c:pt idx="46">
+                  <c:v>10.733</c:v>
+                </c:pt>
+                <c:pt idx="47">
+                  <c:v>10.967</c:v>
+                </c:pt>
+                <c:pt idx="48">
+                  <c:v>11.2</c:v>
+                </c:pt>
+                <c:pt idx="49">
+                  <c:v>11.433</c:v>
+                </c:pt>
+                <c:pt idx="50">
+                  <c:v>11.667</c:v>
+                </c:pt>
+                <c:pt idx="51">
+                  <c:v>11.9</c:v>
+                </c:pt>
+                <c:pt idx="52">
+                  <c:v>12.133</c:v>
+                </c:pt>
+                <c:pt idx="53">
+                  <c:v>12.367</c:v>
+                </c:pt>
+                <c:pt idx="54">
+                  <c:v>12.6</c:v>
+                </c:pt>
+                <c:pt idx="55">
+                  <c:v>12.833</c:v>
+                </c:pt>
+                <c:pt idx="56">
+                  <c:v>13.067</c:v>
+                </c:pt>
+                <c:pt idx="57">
+                  <c:v>13.3</c:v>
+                </c:pt>
+                <c:pt idx="58">
+                  <c:v>13.533</c:v>
+                </c:pt>
+                <c:pt idx="59">
+                  <c:v>13.767</c:v>
+                </c:pt>
+                <c:pt idx="60">
+                  <c:v>14.0</c:v>
+                </c:pt>
+                <c:pt idx="61">
+                  <c:v>14.233</c:v>
+                </c:pt>
+                <c:pt idx="62">
+                  <c:v>14.467</c:v>
+                </c:pt>
+                <c:pt idx="63">
+                  <c:v>14.7</c:v>
+                </c:pt>
+                <c:pt idx="64">
+                  <c:v>14.933</c:v>
+                </c:pt>
+                <c:pt idx="65">
+                  <c:v>15.167</c:v>
+                </c:pt>
+                <c:pt idx="66">
+                  <c:v>15.4</c:v>
+                </c:pt>
+                <c:pt idx="67">
+                  <c:v>15.633</c:v>
+                </c:pt>
+                <c:pt idx="68">
+                  <c:v>15.867</c:v>
+                </c:pt>
+                <c:pt idx="69">
+                  <c:v>16.1</c:v>
+                </c:pt>
+                <c:pt idx="70">
+                  <c:v>16.333</c:v>
+                </c:pt>
+                <c:pt idx="71">
+                  <c:v>16.567</c:v>
+                </c:pt>
+                <c:pt idx="72">
+                  <c:v>16.8</c:v>
+                </c:pt>
+                <c:pt idx="73">
+                  <c:v>17.033</c:v>
+                </c:pt>
+                <c:pt idx="74">
+                  <c:v>17.267</c:v>
+                </c:pt>
+                <c:pt idx="75">
+                  <c:v>17.5</c:v>
+                </c:pt>
+                <c:pt idx="76">
+                  <c:v>17.733</c:v>
+                </c:pt>
+                <c:pt idx="77">
+                  <c:v>17.967</c:v>
+                </c:pt>
+                <c:pt idx="78">
+                  <c:v>18.2</c:v>
+                </c:pt>
+                <c:pt idx="79">
+                  <c:v>18.433</c:v>
+                </c:pt>
+                <c:pt idx="80">
+                  <c:v>18.667</c:v>
+                </c:pt>
+                <c:pt idx="81">
+                  <c:v>18.9</c:v>
+                </c:pt>
+                <c:pt idx="82">
+                  <c:v>19.133</c:v>
+                </c:pt>
+                <c:pt idx="83">
+                  <c:v>19.367</c:v>
+                </c:pt>
+                <c:pt idx="84">
+                  <c:v>19.6</c:v>
+                </c:pt>
+                <c:pt idx="85">
+                  <c:v>19.833</c:v>
+                </c:pt>
+                <c:pt idx="86">
+                  <c:v>20.067</c:v>
+                </c:pt>
+                <c:pt idx="87">
+                  <c:v>20.3</c:v>
+                </c:pt>
+                <c:pt idx="88">
+                  <c:v>20.533</c:v>
+                </c:pt>
+                <c:pt idx="89">
+                  <c:v>20.767</c:v>
+                </c:pt>
+                <c:pt idx="90">
+                  <c:v>21.0</c:v>
+                </c:pt>
+                <c:pt idx="91">
+                  <c:v>21.233</c:v>
+                </c:pt>
+                <c:pt idx="92">
+                  <c:v>21.467</c:v>
+                </c:pt>
+                <c:pt idx="93">
+                  <c:v>21.7</c:v>
+                </c:pt>
+                <c:pt idx="94">
+                  <c:v>21.933</c:v>
+                </c:pt>
+                <c:pt idx="95">
+                  <c:v>22.167</c:v>
+                </c:pt>
+                <c:pt idx="96">
+                  <c:v>22.4</c:v>
+                </c:pt>
+                <c:pt idx="97">
+                  <c:v>22.633</c:v>
+                </c:pt>
+                <c:pt idx="98">
+                  <c:v>22.867</c:v>
+                </c:pt>
+                <c:pt idx="99">
+                  <c:v>23.1</c:v>
+                </c:pt>
+                <c:pt idx="100">
+                  <c:v>23.333</c:v>
+                </c:pt>
+                <c:pt idx="101">
+                  <c:v>23.567</c:v>
+                </c:pt>
+                <c:pt idx="102">
+                  <c:v>23.8</c:v>
+                </c:pt>
+                <c:pt idx="103">
+                  <c:v>24.033</c:v>
+                </c:pt>
+                <c:pt idx="104">
+                  <c:v>24.267</c:v>
+                </c:pt>
+                <c:pt idx="105">
+                  <c:v>24.5</c:v>
+                </c:pt>
+                <c:pt idx="106">
+                  <c:v>24.733</c:v>
+                </c:pt>
+                <c:pt idx="107">
+                  <c:v>24.967</c:v>
+                </c:pt>
+                <c:pt idx="108">
+                  <c:v>25.2</c:v>
+                </c:pt>
+                <c:pt idx="109">
+                  <c:v>25.433</c:v>
+                </c:pt>
+                <c:pt idx="110">
+                  <c:v>25.667</c:v>
+                </c:pt>
+                <c:pt idx="111">
+                  <c:v>25.9</c:v>
+                </c:pt>
+                <c:pt idx="112">
+                  <c:v>26.133</c:v>
+                </c:pt>
+                <c:pt idx="113">
+                  <c:v>26.367</c:v>
+                </c:pt>
+                <c:pt idx="114">
+                  <c:v>26.6</c:v>
+                </c:pt>
+                <c:pt idx="115">
+                  <c:v>26.833</c:v>
+                </c:pt>
+                <c:pt idx="116">
+                  <c:v>27.067</c:v>
+                </c:pt>
+                <c:pt idx="117">
+                  <c:v>27.3</c:v>
+                </c:pt>
+                <c:pt idx="118">
+                  <c:v>27.533</c:v>
+                </c:pt>
+                <c:pt idx="119">
+                  <c:v>27.767</c:v>
+                </c:pt>
+                <c:pt idx="120">
+                  <c:v>28.0</c:v>
+                </c:pt>
+                <c:pt idx="121">
+                  <c:v>28.233</c:v>
+                </c:pt>
+                <c:pt idx="122">
+                  <c:v>28.467</c:v>
+                </c:pt>
+                <c:pt idx="123">
+                  <c:v>28.7</c:v>
+                </c:pt>
+                <c:pt idx="124">
+                  <c:v>28.933</c:v>
+                </c:pt>
+                <c:pt idx="125">
+                  <c:v>29.167</c:v>
+                </c:pt>
+                <c:pt idx="126">
+                  <c:v>29.4</c:v>
+                </c:pt>
+                <c:pt idx="127">
+                  <c:v>29.633</c:v>
+                </c:pt>
+                <c:pt idx="128">
+                  <c:v>29.867</c:v>
+                </c:pt>
+                <c:pt idx="129">
+                  <c:v>30.1</c:v>
+                </c:pt>
+                <c:pt idx="130">
+                  <c:v>30.333</c:v>
+                </c:pt>
+                <c:pt idx="131">
+                  <c:v>30.567</c:v>
+                </c:pt>
+                <c:pt idx="132">
+                  <c:v>30.8</c:v>
+                </c:pt>
+                <c:pt idx="133">
+                  <c:v>31.033</c:v>
+                </c:pt>
+                <c:pt idx="134">
+                  <c:v>31.267</c:v>
+                </c:pt>
+                <c:pt idx="135">
+                  <c:v>31.5</c:v>
+                </c:pt>
+                <c:pt idx="136">
+                  <c:v>31.733</c:v>
+                </c:pt>
+                <c:pt idx="137">
+                  <c:v>31.967</c:v>
+                </c:pt>
+                <c:pt idx="138">
+                  <c:v>32.2</c:v>
+                </c:pt>
+                <c:pt idx="139">
+                  <c:v>32.433</c:v>
+                </c:pt>
+                <c:pt idx="140">
+                  <c:v>32.667</c:v>
+                </c:pt>
+                <c:pt idx="141">
+                  <c:v>32.9</c:v>
+                </c:pt>
+                <c:pt idx="142">
+                  <c:v>33.133</c:v>
+                </c:pt>
+                <c:pt idx="143">
+                  <c:v>33.367</c:v>
+                </c:pt>
+                <c:pt idx="144">
+                  <c:v>33.6</c:v>
+                </c:pt>
+                <c:pt idx="145">
+                  <c:v>33.833</c:v>
+                </c:pt>
+                <c:pt idx="146">
+                  <c:v>34.067</c:v>
+                </c:pt>
+                <c:pt idx="147">
+                  <c:v>34.3</c:v>
+                </c:pt>
+                <c:pt idx="148">
+                  <c:v>34.533</c:v>
+                </c:pt>
+                <c:pt idx="149">
+                  <c:v>34.767</c:v>
+                </c:pt>
+                <c:pt idx="150">
+                  <c:v>35.0</c:v>
+                </c:pt>
+                <c:pt idx="151">
+                  <c:v>35.233</c:v>
+                </c:pt>
+                <c:pt idx="152">
+                  <c:v>35.467</c:v>
+                </c:pt>
+                <c:pt idx="153">
+                  <c:v>35.7</c:v>
+                </c:pt>
+                <c:pt idx="154">
+                  <c:v>35.933</c:v>
+                </c:pt>
+                <c:pt idx="155">
+                  <c:v>36.167</c:v>
+                </c:pt>
+                <c:pt idx="156">
+                  <c:v>36.4</c:v>
+                </c:pt>
+                <c:pt idx="157">
+                  <c:v>36.633</c:v>
+                </c:pt>
+                <c:pt idx="158">
+                  <c:v>36.867</c:v>
+                </c:pt>
+                <c:pt idx="159">
+                  <c:v>37.1</c:v>
+                </c:pt>
+                <c:pt idx="160">
+                  <c:v>37.333</c:v>
+                </c:pt>
+                <c:pt idx="161">
+                  <c:v>37.567</c:v>
+                </c:pt>
+                <c:pt idx="162">
+                  <c:v>37.8</c:v>
+                </c:pt>
+                <c:pt idx="163">
+                  <c:v>38.033</c:v>
+                </c:pt>
+                <c:pt idx="164">
+                  <c:v>38.267</c:v>
+                </c:pt>
+                <c:pt idx="165">
+                  <c:v>38.5</c:v>
+                </c:pt>
+                <c:pt idx="166">
+                  <c:v>38.733</c:v>
+                </c:pt>
+                <c:pt idx="167">
+                  <c:v>38.967</c:v>
+                </c:pt>
+                <c:pt idx="168">
+                  <c:v>39.2</c:v>
+                </c:pt>
+                <c:pt idx="169">
+                  <c:v>39.433</c:v>
+                </c:pt>
+                <c:pt idx="170">
+                  <c:v>39.667</c:v>
+                </c:pt>
+                <c:pt idx="171">
+                  <c:v>39.9</c:v>
+                </c:pt>
+                <c:pt idx="172">
+                  <c:v>40.133</c:v>
+                </c:pt>
+                <c:pt idx="173">
+                  <c:v>40.367</c:v>
+                </c:pt>
+                <c:pt idx="174">
+                  <c:v>40.6</c:v>
+                </c:pt>
+                <c:pt idx="175">
+                  <c:v>40.833</c:v>
+                </c:pt>
+                <c:pt idx="176">
+                  <c:v>41.067</c:v>
+                </c:pt>
+                <c:pt idx="177">
+                  <c:v>41.3</c:v>
+                </c:pt>
+                <c:pt idx="178">
+                  <c:v>41.533</c:v>
+                </c:pt>
+                <c:pt idx="179">
+                  <c:v>41.767</c:v>
+                </c:pt>
+                <c:pt idx="180">
+                  <c:v>42.0</c:v>
+                </c:pt>
+                <c:pt idx="181">
+                  <c:v>42.233</c:v>
+                </c:pt>
+                <c:pt idx="182">
+                  <c:v>42.467</c:v>
+                </c:pt>
+                <c:pt idx="183">
+                  <c:v>42.7</c:v>
+                </c:pt>
+                <c:pt idx="184">
+                  <c:v>42.933</c:v>
+                </c:pt>
+                <c:pt idx="185">
+                  <c:v>43.167</c:v>
+                </c:pt>
+                <c:pt idx="186">
+                  <c:v>43.4</c:v>
+                </c:pt>
+                <c:pt idx="187">
+                  <c:v>43.633</c:v>
+                </c:pt>
+                <c:pt idx="188">
+                  <c:v>43.867</c:v>
+                </c:pt>
+                <c:pt idx="189">
+                  <c:v>44.1</c:v>
+                </c:pt>
+                <c:pt idx="190">
+                  <c:v>44.333</c:v>
+                </c:pt>
+                <c:pt idx="191">
+                  <c:v>44.567</c:v>
+                </c:pt>
+                <c:pt idx="192">
+                  <c:v>44.8</c:v>
+                </c:pt>
+              </c:numCache>
+            </c:numRef>
+          </c:xVal>
+          <c:yVal>
+            <c:numRef>
+              <c:f>Sheet1!$B$2:$B$194</c:f>
+              <c:numCache>
+                <c:formatCode>General</c:formatCode>
+                <c:ptCount val="193"/>
+                <c:pt idx="0">
+                  <c:v>15151.1</c:v>
+                </c:pt>
+                <c:pt idx="1">
+                  <c:v>28286.0</c:v>
+                </c:pt>
+                <c:pt idx="2">
+                  <c:v>31986.1</c:v>
+                </c:pt>
+                <c:pt idx="3">
+                  <c:v>1530.2</c:v>
+                </c:pt>
+                <c:pt idx="4">
+                  <c:v>714.7</c:v>
+                </c:pt>
+                <c:pt idx="5">
+                  <c:v>967.8</c:v>
+                </c:pt>
+                <c:pt idx="6">
+                  <c:v>724.5</c:v>
+                </c:pt>
+                <c:pt idx="7">
+                  <c:v>945.1</c:v>
+                </c:pt>
+                <c:pt idx="8">
+                  <c:v>734.0</c:v>
+                </c:pt>
+                <c:pt idx="9">
+                  <c:v>524.9</c:v>
+                </c:pt>
+                <c:pt idx="10">
+                  <c:v>763.6</c:v>
+                </c:pt>
+                <c:pt idx="11">
+                  <c:v>774.4</c:v>
+                </c:pt>
+                <c:pt idx="12">
+                  <c:v>524.6</c:v>
+                </c:pt>
+                <c:pt idx="13">
+                  <c:v>419.0</c:v>
+                </c:pt>
+                <c:pt idx="14">
+                  <c:v>475.4</c:v>
+                </c:pt>
+                <c:pt idx="15">
+                  <c:v>482.7</c:v>
+                </c:pt>
+                <c:pt idx="16">
+                  <c:v>638.6</c:v>
+                </c:pt>
+                <c:pt idx="17">
+                  <c:v>637.0</c:v>
+                </c:pt>
+                <c:pt idx="18">
+                  <c:v>508.2</c:v>
+                </c:pt>
+                <c:pt idx="19">
+                  <c:v>487.5</c:v>
+                </c:pt>
+                <c:pt idx="20">
+                  <c:v>290.3</c:v>
+                </c:pt>
+                <c:pt idx="21">
+                  <c:v>431.6</c:v>
+                </c:pt>
+                <c:pt idx="22">
+                  <c:v>43.9</c:v>
+                </c:pt>
+                <c:pt idx="23">
+                  <c:v>397.8</c:v>
+                </c:pt>
+                <c:pt idx="24">
+                  <c:v>210.4</c:v>
+                </c:pt>
+                <c:pt idx="25">
+                  <c:v>168.9</c:v>
+                </c:pt>
+                <c:pt idx="26">
+                  <c:v>355.5</c:v>
+                </c:pt>
+                <c:pt idx="27">
+                  <c:v>252.1</c:v>
+                </c:pt>
+                <c:pt idx="28">
+                  <c:v>374.0</c:v>
+                </c:pt>
+                <c:pt idx="29">
+                  <c:v>256.2</c:v>
+                </c:pt>
+                <c:pt idx="30">
+                  <c:v>325.4</c:v>
+                </c:pt>
+                <c:pt idx="31">
+                  <c:v>170.1</c:v>
+                </c:pt>
+                <c:pt idx="32">
+                  <c:v>625.0</c:v>
+                </c:pt>
+                <c:pt idx="33">
+                  <c:v>533.5</c:v>
+                </c:pt>
+                <c:pt idx="34">
+                  <c:v>112.5</c:v>
+                </c:pt>
+                <c:pt idx="35">
+                  <c:v>250.1</c:v>
+                </c:pt>
+                <c:pt idx="36">
+                  <c:v>446.4</c:v>
+                </c:pt>
+                <c:pt idx="37">
+                  <c:v>381.5</c:v>
+                </c:pt>
+                <c:pt idx="38">
+                  <c:v>447.2</c:v>
+                </c:pt>
+                <c:pt idx="39">
+                  <c:v>270.9</c:v>
+                </c:pt>
+                <c:pt idx="40">
+                  <c:v>53.4</c:v>
+                </c:pt>
+                <c:pt idx="41">
+                  <c:v>36.7</c:v>
+                </c:pt>
+                <c:pt idx="42">
+                  <c:v>152.8</c:v>
+                </c:pt>
+                <c:pt idx="43">
+                  <c:v>123.8</c:v>
+                </c:pt>
+                <c:pt idx="44">
+                  <c:v>275.1</c:v>
+                </c:pt>
+                <c:pt idx="45">
+                  <c:v>156.9</c:v>
+                </c:pt>
+                <c:pt idx="46">
+                  <c:v>513.8</c:v>
+                </c:pt>
+                <c:pt idx="47">
+                  <c:v>90.6</c:v>
+                </c:pt>
+                <c:pt idx="48">
+                  <c:v>135.6</c:v>
+                </c:pt>
+                <c:pt idx="49">
+                  <c:v>152.5</c:v>
+                </c:pt>
+                <c:pt idx="50">
+                  <c:v>62.3</c:v>
+                </c:pt>
+                <c:pt idx="51">
+                  <c:v>81.2</c:v>
+                </c:pt>
+                <c:pt idx="52">
+                  <c:v>154.4</c:v>
+                </c:pt>
+                <c:pt idx="53">
+                  <c:v>84.1</c:v>
+                </c:pt>
+                <c:pt idx="54">
+                  <c:v>243.6</c:v>
+                </c:pt>
+                <c:pt idx="55">
+                  <c:v>126.8</c:v>
+                </c:pt>
+                <c:pt idx="56">
+                  <c:v>84.4</c:v>
+                </c:pt>
+                <c:pt idx="57">
+                  <c:v>198.1</c:v>
+                </c:pt>
+                <c:pt idx="58">
+                  <c:v>183.1</c:v>
+                </c:pt>
+                <c:pt idx="59">
+                  <c:v>166.8</c:v>
+                </c:pt>
+                <c:pt idx="60">
+                  <c:v>114.8</c:v>
+                </c:pt>
+                <c:pt idx="61">
+                  <c:v>366.4</c:v>
+                </c:pt>
+                <c:pt idx="62">
+                  <c:v>466.9</c:v>
+                </c:pt>
+                <c:pt idx="63">
+                  <c:v>67.1</c:v>
+                </c:pt>
+                <c:pt idx="64">
+                  <c:v>114.2</c:v>
+                </c:pt>
+                <c:pt idx="65">
+                  <c:v>55.9</c:v>
+                </c:pt>
+                <c:pt idx="66">
+                  <c:v>105.0</c:v>
+                </c:pt>
+                <c:pt idx="67">
+                  <c:v>243.1</c:v>
+                </c:pt>
+                <c:pt idx="68">
+                  <c:v>316.1</c:v>
+                </c:pt>
+                <c:pt idx="69">
+                  <c:v>243.8</c:v>
+                </c:pt>
+                <c:pt idx="70">
+                  <c:v>344.3</c:v>
+                </c:pt>
+                <c:pt idx="71">
+                  <c:v>174.2</c:v>
+                </c:pt>
+                <c:pt idx="72">
+                  <c:v>191.9</c:v>
+                </c:pt>
+                <c:pt idx="73">
+                  <c:v>180.1</c:v>
+                </c:pt>
+                <c:pt idx="74">
+                  <c:v>259.4</c:v>
+                </c:pt>
+                <c:pt idx="75">
+                  <c:v>85.7</c:v>
+                </c:pt>
+                <c:pt idx="76">
+                  <c:v>60.8</c:v>
+                </c:pt>
+                <c:pt idx="77">
+                  <c:v>235.1</c:v>
+                </c:pt>
+                <c:pt idx="78">
+                  <c:v>71.9</c:v>
+                </c:pt>
+                <c:pt idx="79">
+                  <c:v>152.3</c:v>
+                </c:pt>
+                <c:pt idx="80">
+                  <c:v>115.8</c:v>
+                </c:pt>
+                <c:pt idx="81">
+                  <c:v>182.3</c:v>
+                </c:pt>
+                <c:pt idx="82">
+                  <c:v>286.6</c:v>
+                </c:pt>
+                <c:pt idx="83">
+                  <c:v>353.5</c:v>
+                </c:pt>
+                <c:pt idx="84">
+                  <c:v>384.8</c:v>
+                </c:pt>
+                <c:pt idx="85">
+                  <c:v>186.3</c:v>
+                </c:pt>
+                <c:pt idx="86">
+                  <c:v>236.3</c:v>
+                </c:pt>
+                <c:pt idx="87">
+                  <c:v>171.9</c:v>
+                </c:pt>
+                <c:pt idx="88">
+                  <c:v>115.5</c:v>
+                </c:pt>
+                <c:pt idx="89">
+                  <c:v>206.4</c:v>
+                </c:pt>
+                <c:pt idx="90">
+                  <c:v>155.5</c:v>
+                </c:pt>
+                <c:pt idx="91">
+                  <c:v>245.7</c:v>
+                </c:pt>
+                <c:pt idx="92">
+                  <c:v>117.4</c:v>
+                </c:pt>
+                <c:pt idx="93">
+                  <c:v>164.6</c:v>
+                </c:pt>
+                <c:pt idx="94">
+                  <c:v>171.2</c:v>
+                </c:pt>
+                <c:pt idx="95">
+                  <c:v>338.8</c:v>
+                </c:pt>
+                <c:pt idx="96">
+                  <c:v>360.0</c:v>
+                </c:pt>
+                <c:pt idx="97">
+                  <c:v>152.9</c:v>
+                </c:pt>
+                <c:pt idx="98">
+                  <c:v>85.0</c:v>
+                </c:pt>
+                <c:pt idx="99">
+                  <c:v>170.7</c:v>
+                </c:pt>
+                <c:pt idx="100">
+                  <c:v>344.3</c:v>
+                </c:pt>
+                <c:pt idx="101">
+                  <c:v>340.4</c:v>
+                </c:pt>
+                <c:pt idx="102">
+                  <c:v>163.3</c:v>
+                </c:pt>
+                <c:pt idx="103">
+                  <c:v>235.1</c:v>
+                </c:pt>
+                <c:pt idx="104">
+                  <c:v>55.6</c:v>
+                </c:pt>
+                <c:pt idx="105">
+                  <c:v>183.2</c:v>
+                </c:pt>
+                <c:pt idx="106">
+                  <c:v>171.0</c:v>
+                </c:pt>
+                <c:pt idx="107">
+                  <c:v>34.7</c:v>
+                </c:pt>
+                <c:pt idx="108">
+                  <c:v>165.4</c:v>
+                </c:pt>
+                <c:pt idx="109">
+                  <c:v>356.9</c:v>
+                </c:pt>
+                <c:pt idx="110">
+                  <c:v>16.7</c:v>
+                </c:pt>
+                <c:pt idx="111">
+                  <c:v>128.5</c:v>
+                </c:pt>
+                <c:pt idx="112">
+                  <c:v>185.4</c:v>
+                </c:pt>
+                <c:pt idx="113">
+                  <c:v>360.7</c:v>
+                </c:pt>
+                <c:pt idx="114">
+                  <c:v>166.6</c:v>
+                </c:pt>
+                <c:pt idx="115">
+                  <c:v>389.2</c:v>
+                </c:pt>
+                <c:pt idx="116">
+                  <c:v>197.0</c:v>
+                </c:pt>
+                <c:pt idx="117">
+                  <c:v>306.1</c:v>
+                </c:pt>
+                <c:pt idx="118">
+                  <c:v>170.7</c:v>
+                </c:pt>
+                <c:pt idx="119">
+                  <c:v>116.7</c:v>
+                </c:pt>
+                <c:pt idx="120">
+                  <c:v>137.3</c:v>
+                </c:pt>
+                <c:pt idx="121">
+                  <c:v>206.0</c:v>
+                </c:pt>
+                <c:pt idx="122">
+                  <c:v>92.0</c:v>
+                </c:pt>
+                <c:pt idx="123">
+                  <c:v>77.7</c:v>
+                </c:pt>
+                <c:pt idx="124">
+                  <c:v>225.4</c:v>
+                </c:pt>
+                <c:pt idx="125">
+                  <c:v>262.8</c:v>
+                </c:pt>
+                <c:pt idx="126">
+                  <c:v>265.7</c:v>
+                </c:pt>
+                <c:pt idx="127">
+                  <c:v>219.7</c:v>
+                </c:pt>
+                <c:pt idx="128">
+                  <c:v>496.6</c:v>
+                </c:pt>
+                <c:pt idx="129">
+                  <c:v>299.5</c:v>
+                </c:pt>
+                <c:pt idx="130">
+                  <c:v>241.0</c:v>
+                </c:pt>
+                <c:pt idx="131">
+                  <c:v>175.3</c:v>
+                </c:pt>
+                <c:pt idx="132">
+                  <c:v>188.8</c:v>
+                </c:pt>
+                <c:pt idx="133">
+                  <c:v>174.5</c:v>
+                </c:pt>
+                <c:pt idx="134">
+                  <c:v>252.8</c:v>
+                </c:pt>
+                <c:pt idx="135">
+                  <c:v>76.1</c:v>
+                </c:pt>
+                <c:pt idx="136">
+                  <c:v>85.9</c:v>
+                </c:pt>
+                <c:pt idx="137">
+                  <c:v>178.6</c:v>
+                </c:pt>
+                <c:pt idx="138">
+                  <c:v>288.0</c:v>
+                </c:pt>
+                <c:pt idx="139">
+                  <c:v>421.7</c:v>
+                </c:pt>
+                <c:pt idx="140">
+                  <c:v>741.0</c:v>
+                </c:pt>
+                <c:pt idx="141">
+                  <c:v>307.0</c:v>
+                </c:pt>
+                <c:pt idx="142">
+                  <c:v>251.1</c:v>
+                </c:pt>
+                <c:pt idx="143">
+                  <c:v>498.7</c:v>
+                </c:pt>
+                <c:pt idx="144">
+                  <c:v>304.1</c:v>
+                </c:pt>
+                <c:pt idx="145">
+                  <c:v>196.6</c:v>
+                </c:pt>
+                <c:pt idx="146">
+                  <c:v>74.9</c:v>
+                </c:pt>
+                <c:pt idx="147">
+                  <c:v>81.1</c:v>
+                </c:pt>
+                <c:pt idx="148">
+                  <c:v>193.8</c:v>
+                </c:pt>
+                <c:pt idx="149">
+                  <c:v>102.5</c:v>
+                </c:pt>
+                <c:pt idx="150">
+                  <c:v>77.9</c:v>
+                </c:pt>
+                <c:pt idx="151">
+                  <c:v>89.6</c:v>
+                </c:pt>
+                <c:pt idx="152">
+                  <c:v>105.3</c:v>
+                </c:pt>
+                <c:pt idx="153">
+                  <c:v>141.0</c:v>
+                </c:pt>
+                <c:pt idx="154">
+                  <c:v>161.4</c:v>
+                </c:pt>
+                <c:pt idx="155">
+                  <c:v>198.1</c:v>
+                </c:pt>
+                <c:pt idx="156">
+                  <c:v>275.7</c:v>
+                </c:pt>
+                <c:pt idx="157">
+                  <c:v>538.3</c:v>
+                </c:pt>
+                <c:pt idx="158">
+                  <c:v>162.4</c:v>
+                </c:pt>
+                <c:pt idx="159">
+                  <c:v>303.4</c:v>
+                </c:pt>
+                <c:pt idx="160">
+                  <c:v>204.6</c:v>
+                </c:pt>
+                <c:pt idx="161">
+                  <c:v>179.2</c:v>
+                </c:pt>
+                <c:pt idx="162">
+                  <c:v>526.3</c:v>
+                </c:pt>
+                <c:pt idx="163">
+                  <c:v>147.8</c:v>
+                </c:pt>
+                <c:pt idx="164">
+                  <c:v>10</c:v>
+                </c:pt>
+                <c:pt idx="165">
+                  <c:v>86.4</c:v>
+                </c:pt>
+                <c:pt idx="166">
+                  <c:v>138.8</c:v>
+                </c:pt>
+                <c:pt idx="167">
+                  <c:v>300.5</c:v>
+                </c:pt>
+                <c:pt idx="168">
+                  <c:v>196.2</c:v>
+                </c:pt>
+                <c:pt idx="169">
+                  <c:v>326.3</c:v>
+                </c:pt>
+                <c:pt idx="170">
+                  <c:v>331.7</c:v>
+                </c:pt>
+                <c:pt idx="171">
+                  <c:v>120.7</c:v>
+                </c:pt>
+                <c:pt idx="172">
+                  <c:v>140.6</c:v>
+                </c:pt>
+                <c:pt idx="173">
+                  <c:v>290.6</c:v>
+                </c:pt>
+                <c:pt idx="174">
+                  <c:v>70.8</c:v>
+                </c:pt>
+                <c:pt idx="175">
+                  <c:v>110.1</c:v>
+                </c:pt>
+                <c:pt idx="176">
+                  <c:v>225.9</c:v>
+                </c:pt>
+                <c:pt idx="177">
+                  <c:v>283.1</c:v>
+                </c:pt>
+                <c:pt idx="178">
+                  <c:v>70.1</c:v>
+                </c:pt>
+                <c:pt idx="179">
+                  <c:v>45.6</c:v>
+                </c:pt>
+                <c:pt idx="180">
+                  <c:v>203.5</c:v>
+                </c:pt>
+                <c:pt idx="181">
+                  <c:v>126.3</c:v>
+                </c:pt>
+                <c:pt idx="182">
+                  <c:v>307.2</c:v>
+                </c:pt>
+                <c:pt idx="183">
+                  <c:v>233.6</c:v>
+                </c:pt>
+                <c:pt idx="184">
+                  <c:v>133.0</c:v>
+                </c:pt>
+                <c:pt idx="185">
+                  <c:v>141.2</c:v>
+                </c:pt>
+                <c:pt idx="186">
+                  <c:v>217.5</c:v>
+                </c:pt>
+                <c:pt idx="187">
+                  <c:v>394.1</c:v>
+                </c:pt>
+                <c:pt idx="188">
+                  <c:v>154.1</c:v>
+                </c:pt>
+                <c:pt idx="189">
+                  <c:v>376.2</c:v>
+                </c:pt>
+                <c:pt idx="190">
+                  <c:v>110.1</c:v>
+                </c:pt>
+                <c:pt idx="191">
+                  <c:v>225.7</c:v>
+                </c:pt>
+                <c:pt idx="192">
+                  <c:v>32.2</c:v>
+                </c:pt>
+              </c:numCache>
+            </c:numRef>
+          </c:yVal>
+          <c:smooth val="0"/>
+        </c:ser>
+        <c:ser>
+          <c:idx val="1"/>
+          <c:order val="1"/>
+          <c:tx>
+            <c:strRef>
+              <c:f>Sheet1!$B$196</c:f>
+              <c:strCache>
+                <c:ptCount val="1"/>
+                <c:pt idx="0">
+                  <c:v>Field-of-view edge</c:v>
+                </c:pt>
+              </c:strCache>
+            </c:strRef>
+          </c:tx>
+          <c:spPr>
+            <a:ln w="15875">
+              <a:solidFill>
+                <a:srgbClr val="9C2E23"/>
+              </a:solidFill>
+              <a:prstDash val="dash"/>
+            </a:ln>
+          </c:spPr>
+          <c:marker>
+            <c:symbol val="none"/>
+          </c:marker>
+          <c:xVal>
+            <c:numRef>
+              <c:f>Sheet1!$A$197:$A$198</c:f>
+              <c:numCache>
+                <c:formatCode>General</c:formatCode>
+                <c:ptCount val="2"/>
+                <c:pt idx="0">
+                  <c:v>0</c:v>
+                </c:pt>
+                <c:pt idx="1">
+                  <c:v>44.8</c:v>
+                </c:pt>
+              </c:numCache>
+            </c:numRef>
+          </c:xVal>
+          <c:yVal>
+            <c:numRef>
+              <c:f>Sheet1!$B$197:$B$198</c:f>
+              <c:numCache>
+                <c:formatCode>General</c:formatCode>
+                <c:ptCount val="2"/>
+                <c:pt idx="0">
+                  <c:v>52359.9</c:v>
+                </c:pt>
+                <c:pt idx="1">
+                  <c:v>52359.9</c:v>
+                </c:pt>
+              </c:numCache>
+            </c:numRef>
+          </c:yVal>
+          <c:smooth val="0"/>
+        </c:ser>
+        <c:axId val="-2128940872"/>
+        <c:axId val="-2129643912"/>
+      </c:scatterChart>
+      <c:valAx>
+        <c:axId val="-2128940872"/>
+        <c:scaling>
+          <c:orientation val="minMax"/>
+          <c:max val="45.0"/>
+          <c:min val="0.0"/>
+        </c:scaling>
+        <c:delete val="0"/>
+        <c:axPos val="b"/>
+        <c:title>
+          <c:tx>
+            <c:rich>
+              <a:bodyPr/>
+              <a:lstStyle/>
+              <a:p>
+                <a:r>
+                  <a:rPr sz="800" b="0" i="0">
+                    <a:solidFill>
+                      <a:srgbClr val="5A6472"/>
+                    </a:solidFill>
+                    <a:latin typeface="Arial"/>
+                  </a:rPr>
+                  <a:t>time (s)</a:t>
+                </a:r>
+              </a:p>
+            </c:rich>
+          </c:tx>
+          <c:layout/>
+          <c:overlay val="0"/>
+        </c:title>
+        <c:numFmt formatCode="General" sourceLinked="1"/>
+        <c:majorTickMark val="out"/>
+        <c:minorTickMark val="none"/>
+        <c:tickLblPos val="nextTo"/>
+        <c:spPr>
+          <a:ln>
+            <a:solidFill>
+              <a:srgbClr val="C8D2DC"/>
+            </a:solidFill>
+          </a:ln>
+        </c:spPr>
+        <c:txPr>
+          <a:bodyPr/>
+          <a:lstStyle/>
+          <a:p>
+            <a:pPr>
+              <a:defRPr sz="800">
+                <a:solidFill>
+                  <a:srgbClr val="5A6472"/>
+                </a:solidFill>
+              </a:defRPr>
+            </a:pPr>
+          </a:p>
+        </c:txPr>
+        <c:crossAx val="-2129643912"/>
+        <c:crosses val="autoZero"/>
+        <c:crossBetween val="midCat"/>
+      </c:valAx>
+      <c:valAx>
+        <c:axId val="-2129643912"/>
+        <c:scaling>
+          <c:logBase val="10"/>
+          <c:orientation val="minMax"/>
+          <c:max val="100000.0"/>
+          <c:min val="10.0"/>
+        </c:scaling>
+        <c:delete val="0"/>
+        <c:axPos val="l"/>
+        <c:majorGridlines>
+          <c:spPr>
+            <a:ln>
+              <a:solidFill>
+                <a:srgbClr val="E4EAF0"/>
+              </a:solidFill>
+            </a:ln>
+          </c:spPr>
+        </c:majorGridlines>
+        <c:numFmt formatCode="#,##0" sourceLinked="0"/>
+        <c:majorTickMark val="out"/>
+        <c:minorTickMark val="none"/>
+        <c:tickLblPos val="nextTo"/>
+        <c:spPr>
+          <a:ln>
+            <a:solidFill>
+              <a:srgbClr val="C8D2DC"/>
+            </a:solidFill>
+          </a:ln>
+        </c:spPr>
+        <c:txPr>
+          <a:bodyPr/>
+          <a:lstStyle/>
+          <a:p>
+            <a:pPr>
+              <a:defRPr sz="800">
+                <a:solidFill>
+                  <a:srgbClr val="5A6472"/>
+                </a:solidFill>
+              </a:defRPr>
+            </a:pPr>
+          </a:p>
+        </c:txPr>
+        <c:crossAx val="-2128940872"/>
+        <c:crosses val="autoZero"/>
+        <c:crossBetween val="midCat"/>
+      </c:valAx>
+    </c:plotArea>
+    <c:legend>
+      <c:legendPos val="b"/>
+      <c:layout/>
+      <c:overlay val="0"/>
+      <c:txPr>
+        <a:bodyPr/>
+        <a:lstStyle/>
+        <a:p>
+          <a:pPr>
+            <a:defRPr sz="800">
+              <a:solidFill>
+                <a:srgbClr val="5A6472"/>
+              </a:solidFill>
+            </a:defRPr>
+          </a:pPr>
+        </a:p>
+      </c:txPr>
+    </c:legend>
+    <c:plotVisOnly val="1"/>
+    <c:dispBlanksAs val="gap"/>
+    <c:showDLblsOverMax val="0"/>
+  </c:chart>
+  <c:txPr>
+    <a:bodyPr/>
+    <a:lstStyle/>
+    <a:p>
+      <a:pPr>
+        <a:defRPr sz="1800"/>
+      </a:pPr>
+      <a:endParaRPr lang="en-US"/>
+    </a:p>
+  </c:txPr>
+  <c:externalData r:id="rId1">
+    <c:autoUpdate val="0"/>
+  </c:externalData>
+</c:chartSpace>
+</file>
+
+<file path=ppt/charts/chart2.xml><?xml version="1.0" encoding="utf-8"?>
+<c:chartSpace xmlns:c="http://schemas.openxmlformats.org/drawingml/2006/chart" xmlns:a="http://schemas.openxmlformats.org/drawingml/2006/main" xmlns:r="http://schemas.openxmlformats.org/officeDocument/2006/relationships">
+  <c:date1904 val="0"/>
+  <c:chart>
+    <c:title>
+      <c:tx>
+        <c:rich>
+          <a:bodyPr/>
+          <a:lstStyle/>
+          <a:p>
+            <a:r>
+              <a:rPr sz="1050" b="1" i="0">
+                <a:solidFill>
+                  <a:srgbClr val="0B2545"/>
+                </a:solidFill>
+                <a:latin typeface="Arial"/>
+              </a:rPr>
+              <a:t>Live demo: </a:t>
+            </a:r>
+            <a:r>
+              <a:rPr sz="1000" b="0" i="0">
+                <a:solidFill>
+                  <a:srgbClr val="0B2545"/>
+                </a:solidFill>
+                <a:latin typeface="Arial"/>
+              </a:rPr>
+              <a:t>% of time locked, 12 scenes</a:t>
+            </a:r>
+          </a:p>
+        </c:rich>
+      </c:tx>
+      <c:layout/>
+      <c:overlay val="0"/>
+    </c:title>
+    <c:autoTitleDeleted val="0"/>
+    <c:plotArea>
+      <c:barChart>
+        <c:barDir val="bar"/>
+        <c:grouping val="clustered"/>
+        <c:ser>
+          <c:idx val="0"/>
+          <c:order val="0"/>
+          <c:tx>
+            <c:strRef>
+              <c:f>Sheet1!$B$1</c:f>
+              <c:strCache>
+                <c:ptCount val="1"/>
+                <c:pt idx="0">
+                  <c:v>Lock held (%)</c:v>
+                </c:pt>
+              </c:strCache>
+            </c:strRef>
+          </c:tx>
+          <c:spPr>
+            <a:solidFill>
+              <a:srgbClr val="1F8A5B"/>
+            </a:solidFill>
+          </c:spPr>
+          <c:cat>
+            <c:strRef>
+              <c:f>Sheet1!$A$2:$A$13</c:f>
+              <c:strCache>
+                <c:ptCount val="12"/>
+                <c:pt idx="0">
+                  <c:v>Wrong-rate strobes</c:v>
+                </c:pt>
+                <c:pt idx="1">
+                  <c:v>Torch turning</c:v>
+                </c:pt>
+                <c:pt idx="2">
+                  <c:v>4.6 Hz beacon</c:v>
+                </c:pt>
+                <c:pt idx="3">
+                  <c:v>Phone screen</c:v>
+                </c:pt>
+                <c:pt idx="4">
+                  <c:v>Past a lamp</c:v>
+                </c:pt>
+                <c:pt idx="5">
+                  <c:v>Hand, run 3</c:v>
+                </c:pt>
+                <c:pt idx="6">
+                  <c:v>Hand, run 2</c:v>
+                </c:pt>
+                <c:pt idx="7">
+                  <c:v>Hand, run 1</c:v>
+                </c:pt>
+                <c:pt idx="8">
+                  <c:v>Fast figure-8</c:v>
+                </c:pt>
+                <c:pt idx="9">
+                  <c:v>Figure-8</c:v>
+                </c:pt>
+                <c:pt idx="10">
+                  <c:v>Slow circle</c:v>
+                </c:pt>
+                <c:pt idx="11">
+                  <c:v>Still</c:v>
+                </c:pt>
+              </c:strCache>
+            </c:strRef>
+          </c:cat>
+          <c:val>
+            <c:numRef>
+              <c:f>Sheet1!$B$2:$B$13</c:f>
+              <c:numCache>
+                <c:formatCode>General</c:formatCode>
+                <c:ptCount val="12"/>
+                <c:pt idx="0">
+                  <c:v>99.7</c:v>
+                </c:pt>
+                <c:pt idx="1">
+                  <c:v>100.0</c:v>
+                </c:pt>
+                <c:pt idx="2">
+                  <c:v>99.6</c:v>
+                </c:pt>
+                <c:pt idx="3">
+                  <c:v>100.0</c:v>
+                </c:pt>
+                <c:pt idx="4">
+                  <c:v>100.0</c:v>
+                </c:pt>
+                <c:pt idx="5">
+                  <c:v>97.9</c:v>
+                </c:pt>
+                <c:pt idx="6">
+                  <c:v>99.5</c:v>
+                </c:pt>
+                <c:pt idx="7">
+                  <c:v>95.4</c:v>
+                </c:pt>
+                <c:pt idx="8">
+                  <c:v>93.7</c:v>
+                </c:pt>
+                <c:pt idx="9">
+                  <c:v>100.0</c:v>
+                </c:pt>
+                <c:pt idx="10">
+                  <c:v>100.0</c:v>
+                </c:pt>
+                <c:pt idx="11">
+                  <c:v>100.0</c:v>
+                </c:pt>
+              </c:numCache>
+            </c:numRef>
+          </c:val>
+        </c:ser>
+        <c:dLbls>
+          <c:numFmt formatCode="0.0" sourceLinked="0"/>
+          <c:txPr>
+            <a:bodyPr/>
+            <a:lstStyle/>
+            <a:p>
+              <a:pPr>
+                <a:defRPr sz="750" b="1">
+                  <a:solidFill>
+                    <a:srgbClr val="FFFFFF"/>
+                  </a:solidFill>
+                </a:defRPr>
+              </a:pPr>
+            </a:p>
+          </c:txPr>
+          <c:dLblPos val="inEnd"/>
+          <c:showLegendKey val="0"/>
+          <c:showVal val="1"/>
+          <c:showCatName val="0"/>
+          <c:showSerName val="0"/>
+          <c:showPercent val="0"/>
+          <c:showBubbleSize val="0"/>
+          <c:showLeaderLines val="1"/>
+        </c:dLbls>
+        <c:gapWidth val="45"/>
+        <c:axId val="-2068027336"/>
+        <c:axId val="-2113994440"/>
+      </c:barChart>
+      <c:catAx>
+        <c:axId val="-2068027336"/>
+        <c:scaling>
+          <c:orientation val="minMax"/>
+        </c:scaling>
+        <c:delete val="0"/>
+        <c:axPos val="l"/>
+        <c:majorTickMark val="out"/>
+        <c:minorTickMark val="none"/>
+        <c:tickLblPos val="nextTo"/>
+        <c:spPr>
+          <a:ln>
+            <a:solidFill>
+              <a:srgbClr val="C8D2DC"/>
+            </a:solidFill>
+          </a:ln>
+        </c:spPr>
+        <c:txPr>
+          <a:bodyPr/>
+          <a:lstStyle/>
+          <a:p>
+            <a:pPr>
+              <a:defRPr sz="800">
+                <a:solidFill>
+                  <a:srgbClr val="0B2545"/>
+                </a:solidFill>
+              </a:defRPr>
+            </a:pPr>
+          </a:p>
+        </c:txPr>
+        <c:crossAx val="-2113994440"/>
+        <c:crosses val="autoZero"/>
+        <c:auto val="1"/>
+        <c:lblAlgn val="ctr"/>
+        <c:lblOffset val="100"/>
+        <c:noMultiLvlLbl val="0"/>
+      </c:catAx>
+      <c:valAx>
+        <c:axId val="-2113994440"/>
+        <c:scaling>
+          <c:max val="100.0"/>
+          <c:min val="0.0"/>
+        </c:scaling>
+        <c:delete/>
+        <c:axPos val="b"/>
+        <c:majorTickMark val="out"/>
+        <c:minorTickMark val="none"/>
+        <c:tickLblPos val="nextTo"/>
+        <c:crossAx val="-2068027336"/>
+        <c:crosses val="autoZero"/>
+      </c:valAx>
+    </c:plotArea>
+    <c:dispBlanksAs val="gap"/>
+  </c:chart>
+  <c:txPr>
+    <a:bodyPr/>
+    <a:lstStyle/>
+    <a:p>
+      <a:pPr>
+        <a:defRPr sz="1800"/>
+      </a:pPr>
+      <a:endParaRPr lang="en-US"/>
+    </a:p>
+  </c:txPr>
+  <c:externalData r:id="rId1">
+    <c:autoUpdate val="0"/>
+  </c:externalData>
+</c:chartSpace>
 </file>
 
 <file path=ppt/notesMasters/notesMaster1.xml><?xml version="1.0" encoding="utf-8"?>
@@ -6568,8 +8257,8 @@
         </p:nvSpPr>
         <p:spPr>
           <a:xfrm>
-            <a:off x="274320" y="1773936"/>
-            <a:ext cx="6172200" cy="402336"/>
+            <a:off x="292608" y="1810512"/>
+            <a:ext cx="4526280" cy="292608"/>
           </a:xfrm>
           <a:prstGeom prst="rect">
             <a:avLst/>
@@ -6583,36 +8272,116 @@
           <a:lstStyle/>
           <a:p>
             <a:r>
-              <a:rPr sz="1100" b="1" i="0">
+              <a:rPr sz="1400" b="1" i="0">
                 <a:solidFill>
                   <a:srgbClr val="9C2E23"/>
                 </a:solidFill>
                 <a:latin typeface="Arial"/>
               </a:rPr>
-              <a:t>Problem in one line:  </a:t>
-            </a:r>
-            <a:r>
-              <a:rPr sz="1100" b="0" i="0">
-                <a:solidFill>
-                  <a:srgbClr val="0B2545"/>
-                </a:solidFill>
-                <a:latin typeface="Arial"/>
-              </a:rPr>
-              <a:t>find the partner's blinking beacon among stars and glints, verify it, and hold it centred to micro-radian accuracy — automatically, in software.</a:t>
-            </a:r>
-          </a:p>
-        </p:txBody>
-      </p:sp>
-      <p:sp>
-        <p:nvSpPr>
-          <p:cNvPr id="15364" name="TextBox 15363"/>
+              <a:t>THE PROBLEM</a:t>
+            </a:r>
+            <a:r>
+              <a:rPr sz="1000" b="0" i="0">
+                <a:solidFill>
+                  <a:srgbClr val="5A6472"/>
+                </a:solidFill>
+                <a:latin typeface="Arial"/>
+              </a:rPr>
+              <a:t>   why pointing is the hard part</a:t>
+            </a:r>
+          </a:p>
+        </p:txBody>
+      </p:sp>
+      <p:sp>
+        <p:nvSpPr>
+          <p:cNvPr id="15364" name="Rounded Rectangle 15363"/>
+          <p:cNvSpPr/>
+          <p:nvPr/>
+        </p:nvSpPr>
+        <p:spPr>
+          <a:xfrm>
+            <a:off x="292608" y="2176272"/>
+            <a:ext cx="4526280" cy="841248"/>
+          </a:xfrm>
+          <a:prstGeom prst="roundRect">
+            <a:avLst>
+              <a:gd name="adj" fmla="val 6000"/>
+            </a:avLst>
+          </a:prstGeom>
+          <a:solidFill>
+            <a:srgbClr val="EFF3F7"/>
+          </a:solidFill>
+          <a:ln>
+            <a:noFill/>
+          </a:ln>
+          <a:effectLst/>
+        </p:spPr>
+        <p:style>
+          <a:lnRef idx="1">
+            <a:schemeClr val="accent1"/>
+          </a:lnRef>
+          <a:fillRef idx="3">
+            <a:schemeClr val="accent1"/>
+          </a:fillRef>
+          <a:effectRef idx="2">
+            <a:schemeClr val="accent1"/>
+          </a:effectRef>
+          <a:fontRef idx="minor">
+            <a:schemeClr val="lt1"/>
+          </a:fontRef>
+        </p:style>
+        <p:txBody>
+          <a:bodyPr rtlCol="0" anchor="t" wrap="square" lIns="109728" rIns="109728" tIns="73152" bIns="73152"/>
+          <a:lstStyle/>
+          <a:p>
+            <a:pPr algn="ctr"/>
+          </a:p>
+        </p:txBody>
+      </p:sp>
+      <p:sp>
+        <p:nvSpPr>
+          <p:cNvPr id="15365" name="TextBox 15364"/>
           <p:cNvSpPr txBox="1"/>
           <p:nvPr/>
         </p:nvSpPr>
         <p:spPr>
           <a:xfrm>
-            <a:off x="274320" y="2231136"/>
-            <a:ext cx="6172200" cy="402336"/>
+            <a:off x="402336" y="2231136"/>
+            <a:ext cx="1188720" cy="731520"/>
+          </a:xfrm>
+          <a:prstGeom prst="rect">
+            <a:avLst/>
+          </a:prstGeom>
+          <a:noFill/>
+        </p:spPr>
+        <p:txBody>
+          <a:bodyPr wrap="square" anchor="ctr" lIns="0" rIns="0" tIns="0" bIns="0">
+            <a:spAutoFit/>
+          </a:bodyPr>
+          <a:lstStyle/>
+          <a:p>
+            <a:r>
+              <a:rPr sz="1900" b="1" i="0">
+                <a:solidFill>
+                  <a:srgbClr val="9C2E23"/>
+                </a:solidFill>
+                <a:latin typeface="Arial"/>
+              </a:rPr>
+              <a:t>µrad</a:t>
+            </a:r>
+          </a:p>
+        </p:txBody>
+      </p:sp>
+      <p:sp>
+        <p:nvSpPr>
+          <p:cNvPr id="15366" name="TextBox 15365"/>
+          <p:cNvSpPr txBox="1"/>
+          <p:nvPr/>
+        </p:nvSpPr>
+        <p:spPr>
+          <a:xfrm>
+            <a:off x="1645920" y="2249424"/>
+            <a:ext cx="3090672" cy="548640"/>
           </a:xfrm>
           <a:prstGeom prst="rect">
             <a:avLst/>
@@ -6626,29 +8395,706 @@
           <a:lstStyle/>
           <a:p>
             <a:r>
+              <a:rPr sz="950" b="0" i="0">
+                <a:solidFill>
+                  <a:srgbClr val="0B2545"/>
+                </a:solidFill>
+                <a:latin typeface="Arial"/>
+              </a:rPr>
+              <a:t>Laser beams are hair-thin. Both terminals must stay pointed at each other to micro-radians, on platforms that move and shake.</a:t>
+            </a:r>
+          </a:p>
+        </p:txBody>
+      </p:sp>
+      <p:sp>
+        <p:nvSpPr>
+          <p:cNvPr id="15367" name="TextBox 15366"/>
+          <p:cNvSpPr txBox="1"/>
+          <p:nvPr/>
+        </p:nvSpPr>
+        <p:spPr>
+          <a:xfrm>
+            <a:off x="1645920" y="2798064"/>
+            <a:ext cx="3090672" cy="164592"/>
+          </a:xfrm>
+          <a:prstGeom prst="rect">
+            <a:avLst/>
+          </a:prstGeom>
+          <a:noFill/>
+        </p:spPr>
+        <p:txBody>
+          <a:bodyPr wrap="square" anchor="t" lIns="0" rIns="0" tIns="0" bIns="0">
+            <a:spAutoFit/>
+          </a:bodyPr>
+          <a:lstStyle/>
+          <a:p>
+            <a:r>
+              <a:rPr sz="750" b="0" i="1">
+                <a:solidFill>
+                  <a:srgbClr val="5A6472"/>
+                </a:solidFill>
+                <a:latin typeface="Arial"/>
+              </a:rPr>
+              <a:t>Kaymak et al., IEEE Commun. Surveys &amp; Tutorials 20(2), 2018</a:t>
+            </a:r>
+          </a:p>
+        </p:txBody>
+      </p:sp>
+      <p:sp>
+        <p:nvSpPr>
+          <p:cNvPr id="15368" name="Rounded Rectangle 15367"/>
+          <p:cNvSpPr/>
+          <p:nvPr/>
+        </p:nvSpPr>
+        <p:spPr>
+          <a:xfrm>
+            <a:off x="292608" y="3108960"/>
+            <a:ext cx="4526280" cy="841248"/>
+          </a:xfrm>
+          <a:prstGeom prst="roundRect">
+            <a:avLst>
+              <a:gd name="adj" fmla="val 6000"/>
+            </a:avLst>
+          </a:prstGeom>
+          <a:solidFill>
+            <a:srgbClr val="EFF3F7"/>
+          </a:solidFill>
+          <a:ln>
+            <a:noFill/>
+          </a:ln>
+          <a:effectLst/>
+        </p:spPr>
+        <p:style>
+          <a:lnRef idx="1">
+            <a:schemeClr val="accent1"/>
+          </a:lnRef>
+          <a:fillRef idx="3">
+            <a:schemeClr val="accent1"/>
+          </a:fillRef>
+          <a:effectRef idx="2">
+            <a:schemeClr val="accent1"/>
+          </a:effectRef>
+          <a:fontRef idx="minor">
+            <a:schemeClr val="lt1"/>
+          </a:fontRef>
+        </p:style>
+        <p:txBody>
+          <a:bodyPr rtlCol="0" anchor="t" wrap="square" lIns="109728" rIns="109728" tIns="73152" bIns="73152"/>
+          <a:lstStyle/>
+          <a:p>
+            <a:pPr algn="ctr"/>
+          </a:p>
+        </p:txBody>
+      </p:sp>
+      <p:sp>
+        <p:nvSpPr>
+          <p:cNvPr id="15369" name="TextBox 15368"/>
+          <p:cNvSpPr txBox="1"/>
+          <p:nvPr/>
+        </p:nvSpPr>
+        <p:spPr>
+          <a:xfrm>
+            <a:off x="402336" y="3163824"/>
+            <a:ext cx="1188720" cy="731520"/>
+          </a:xfrm>
+          <a:prstGeom prst="rect">
+            <a:avLst/>
+          </a:prstGeom>
+          <a:noFill/>
+        </p:spPr>
+        <p:txBody>
+          <a:bodyPr wrap="square" anchor="ctr" lIns="0" rIns="0" tIns="0" bIns="0">
+            <a:spAutoFit/>
+          </a:bodyPr>
+          <a:lstStyle/>
+          <a:p>
+            <a:r>
+              <a:rPr sz="1600" b="1" i="0">
+                <a:solidFill>
+                  <a:srgbClr val="9C2E23"/>
+                </a:solidFill>
+                <a:latin typeface="Arial"/>
+              </a:rPr>
+              <a:t>100 Gbps</a:t>
+            </a:r>
+          </a:p>
+        </p:txBody>
+      </p:sp>
+      <p:sp>
+        <p:nvSpPr>
+          <p:cNvPr id="15370" name="TextBox 15369"/>
+          <p:cNvSpPr txBox="1"/>
+          <p:nvPr/>
+        </p:nvSpPr>
+        <p:spPr>
+          <a:xfrm>
+            <a:off x="1645920" y="3182112"/>
+            <a:ext cx="3090672" cy="548640"/>
+          </a:xfrm>
+          <a:prstGeom prst="rect">
+            <a:avLst/>
+          </a:prstGeom>
+          <a:noFill/>
+        </p:spPr>
+        <p:txBody>
+          <a:bodyPr wrap="square" anchor="t" lIns="0" rIns="0" tIns="0" bIns="0">
+            <a:spAutoFit/>
+          </a:bodyPr>
+          <a:lstStyle/>
+          <a:p>
+            <a:r>
+              <a:rPr sz="950" b="0" i="0">
+                <a:solidFill>
+                  <a:srgbClr val="0B2545"/>
+                </a:solidFill>
+                <a:latin typeface="Arial"/>
+              </a:rPr>
+              <a:t>The record 100 Gbps link to a moving drone stayed up only because a camera tracked the target (10 Hz vision + 200 Hz tip/tilt).</a:t>
+            </a:r>
+          </a:p>
+        </p:txBody>
+      </p:sp>
+      <p:sp>
+        <p:nvSpPr>
+          <p:cNvPr id="15371" name="TextBox 15370"/>
+          <p:cNvSpPr txBox="1"/>
+          <p:nvPr/>
+        </p:nvSpPr>
+        <p:spPr>
+          <a:xfrm>
+            <a:off x="1645920" y="3730752"/>
+            <a:ext cx="3090672" cy="164592"/>
+          </a:xfrm>
+          <a:prstGeom prst="rect">
+            <a:avLst/>
+          </a:prstGeom>
+          <a:noFill/>
+        </p:spPr>
+        <p:txBody>
+          <a:bodyPr wrap="square" anchor="t" lIns="0" rIns="0" tIns="0" bIns="0">
+            <a:spAutoFit/>
+          </a:bodyPr>
+          <a:lstStyle/>
+          <a:p>
+            <a:r>
+              <a:rPr sz="750" b="0" i="1">
+                <a:solidFill>
+                  <a:srgbClr val="5A6472"/>
+                </a:solidFill>
+                <a:latin typeface="Arial"/>
+              </a:rPr>
+              <a:t>Walsh et al., Scientific Reports 12, 2022</a:t>
+            </a:r>
+          </a:p>
+        </p:txBody>
+      </p:sp>
+      <p:sp>
+        <p:nvSpPr>
+          <p:cNvPr id="15372" name="Rounded Rectangle 15371"/>
+          <p:cNvSpPr/>
+          <p:nvPr/>
+        </p:nvSpPr>
+        <p:spPr>
+          <a:xfrm>
+            <a:off x="292608" y="4041648"/>
+            <a:ext cx="4526280" cy="841248"/>
+          </a:xfrm>
+          <a:prstGeom prst="roundRect">
+            <a:avLst>
+              <a:gd name="adj" fmla="val 6000"/>
+            </a:avLst>
+          </a:prstGeom>
+          <a:solidFill>
+            <a:srgbClr val="EFF3F7"/>
+          </a:solidFill>
+          <a:ln>
+            <a:noFill/>
+          </a:ln>
+          <a:effectLst/>
+        </p:spPr>
+        <p:style>
+          <a:lnRef idx="1">
+            <a:schemeClr val="accent1"/>
+          </a:lnRef>
+          <a:fillRef idx="3">
+            <a:schemeClr val="accent1"/>
+          </a:fillRef>
+          <a:effectRef idx="2">
+            <a:schemeClr val="accent1"/>
+          </a:effectRef>
+          <a:fontRef idx="minor">
+            <a:schemeClr val="lt1"/>
+          </a:fontRef>
+        </p:style>
+        <p:txBody>
+          <a:bodyPr rtlCol="0" anchor="t" wrap="square" lIns="109728" rIns="109728" tIns="73152" bIns="73152"/>
+          <a:lstStyle/>
+          <a:p>
+            <a:pPr algn="ctr"/>
+          </a:p>
+        </p:txBody>
+      </p:sp>
+      <p:sp>
+        <p:nvSpPr>
+          <p:cNvPr id="15373" name="TextBox 15372"/>
+          <p:cNvSpPr txBox="1"/>
+          <p:nvPr/>
+        </p:nvSpPr>
+        <p:spPr>
+          <a:xfrm>
+            <a:off x="402336" y="4096511"/>
+            <a:ext cx="1188720" cy="731520"/>
+          </a:xfrm>
+          <a:prstGeom prst="rect">
+            <a:avLst/>
+          </a:prstGeom>
+          <a:noFill/>
+        </p:spPr>
+        <p:txBody>
+          <a:bodyPr wrap="square" anchor="ctr" lIns="0" rIns="0" tIns="0" bIns="0">
+            <a:spAutoFit/>
+          </a:bodyPr>
+          <a:lstStyle/>
+          <a:p>
+            <a:r>
+              <a:rPr sz="1600" b="1" i="0">
+                <a:solidFill>
+                  <a:srgbClr val="9C2E23"/>
+                </a:solidFill>
+                <a:latin typeface="Arial"/>
+              </a:rPr>
+              <a:t>1/5 cost</a:t>
+            </a:r>
+          </a:p>
+        </p:txBody>
+      </p:sp>
+      <p:sp>
+        <p:nvSpPr>
+          <p:cNvPr id="15374" name="TextBox 15373"/>
+          <p:cNvSpPr txBox="1"/>
+          <p:nvPr/>
+        </p:nvSpPr>
+        <p:spPr>
+          <a:xfrm>
+            <a:off x="1645920" y="4114800"/>
+            <a:ext cx="3090672" cy="548640"/>
+          </a:xfrm>
+          <a:prstGeom prst="rect">
+            <a:avLst/>
+          </a:prstGeom>
+          <a:noFill/>
+        </p:spPr>
+        <p:txBody>
+          <a:bodyPr wrap="square" anchor="t" lIns="0" rIns="0" tIns="0" bIns="0">
+            <a:spAutoFit/>
+          </a:bodyPr>
+          <a:lstStyle/>
+          <a:p>
+            <a:r>
+              <a:rPr sz="950" b="0" i="0">
+                <a:solidFill>
+                  <a:srgbClr val="0B2545"/>
+                </a:solidFill>
+                <a:latin typeface="Arial"/>
+              </a:rPr>
+              <a:t>Free-space optics costs about one-fifth of laying fibre and deploys in hours — India's last-mile and disaster links need it mobile.</a:t>
+            </a:r>
+          </a:p>
+        </p:txBody>
+      </p:sp>
+      <p:sp>
+        <p:nvSpPr>
+          <p:cNvPr id="15375" name="TextBox 15374"/>
+          <p:cNvSpPr txBox="1"/>
+          <p:nvPr/>
+        </p:nvSpPr>
+        <p:spPr>
+          <a:xfrm>
+            <a:off x="1645920" y="4663440"/>
+            <a:ext cx="3090672" cy="164592"/>
+          </a:xfrm>
+          <a:prstGeom prst="rect">
+            <a:avLst/>
+          </a:prstGeom>
+          <a:noFill/>
+        </p:spPr>
+        <p:txBody>
+          <a:bodyPr wrap="square" anchor="t" lIns="0" rIns="0" tIns="0" bIns="0">
+            <a:spAutoFit/>
+          </a:bodyPr>
+          <a:lstStyle/>
+          <a:p>
+            <a:r>
+              <a:rPr sz="750" b="0" i="1">
+                <a:solidFill>
+                  <a:srgbClr val="5A6472"/>
+                </a:solidFill>
+                <a:latin typeface="Arial"/>
+              </a:rPr>
+              <a:t>TEC / DoT, White Paper on Free Space Optics</a:t>
+            </a:r>
+          </a:p>
+        </p:txBody>
+      </p:sp>
+      <p:sp>
+        <p:nvSpPr>
+          <p:cNvPr id="15376" name="Rounded Rectangle 15375"/>
+          <p:cNvSpPr/>
+          <p:nvPr/>
+        </p:nvSpPr>
+        <p:spPr>
+          <a:xfrm>
+            <a:off x="292608" y="4992624"/>
+            <a:ext cx="4526280" cy="1243584"/>
+          </a:xfrm>
+          <a:prstGeom prst="roundRect">
+            <a:avLst>
+              <a:gd name="adj" fmla="val 6000"/>
+            </a:avLst>
+          </a:prstGeom>
+          <a:solidFill>
+            <a:srgbClr val="FBEEEC"/>
+          </a:solidFill>
+          <a:ln>
+            <a:noFill/>
+          </a:ln>
+          <a:effectLst/>
+        </p:spPr>
+        <p:style>
+          <a:lnRef idx="1">
+            <a:schemeClr val="accent1"/>
+          </a:lnRef>
+          <a:fillRef idx="3">
+            <a:schemeClr val="accent1"/>
+          </a:fillRef>
+          <a:effectRef idx="2">
+            <a:schemeClr val="accent1"/>
+          </a:effectRef>
+          <a:fontRef idx="minor">
+            <a:schemeClr val="lt1"/>
+          </a:fontRef>
+        </p:style>
+        <p:txBody>
+          <a:bodyPr rtlCol="0" anchor="t" wrap="square" lIns="109728" rIns="109728" tIns="73152" bIns="73152"/>
+          <a:lstStyle/>
+          <a:p>
+            <a:pPr algn="l"/>
+            <a:r>
+              <a:rPr sz="1050" b="1" i="0">
+                <a:solidFill>
+                  <a:srgbClr val="9C2E23"/>
+                </a:solidFill>
+                <a:latin typeface="Arial"/>
+              </a:rPr>
+              <a:t>ISRO PS26169 asks for the coarse-alignment brain:</a:t>
+            </a:r>
+          </a:p>
+          <a:p>
+            <a:pPr algn="l">
+              <a:spcBef>
+                <a:spcPts val="300"/>
+              </a:spcBef>
+            </a:pPr>
+            <a:r>
+              <a:rPr sz="950" b="0" i="0">
+                <a:solidFill>
+                  <a:srgbClr val="0B2545"/>
+                </a:solidFill>
+                <a:latin typeface="Arial"/>
+              </a:rPr>
+              <a:t>find the partner's beacon among stars, glints and decoys, prove it is the right one, and hold it centred — in software.</a:t>
+            </a:r>
+          </a:p>
+        </p:txBody>
+      </p:sp>
+      <p:sp>
+        <p:nvSpPr>
+          <p:cNvPr id="15377" name="Rounded Rectangle 15376"/>
+          <p:cNvSpPr/>
+          <p:nvPr/>
+        </p:nvSpPr>
+        <p:spPr>
+          <a:xfrm>
+            <a:off x="420624" y="5687568"/>
+            <a:ext cx="1353312" cy="457200"/>
+          </a:xfrm>
+          <a:prstGeom prst="roundRect">
+            <a:avLst>
+              <a:gd name="adj" fmla="val 6000"/>
+            </a:avLst>
+          </a:prstGeom>
+          <a:solidFill>
+            <a:srgbClr val="FFFFFF"/>
+          </a:solidFill>
+          <a:ln w="12700">
+            <a:solidFill>
+              <a:srgbClr val="E3B9B3"/>
+            </a:solidFill>
+          </a:ln>
+          <a:effectLst/>
+        </p:spPr>
+        <p:style>
+          <a:lnRef idx="1">
+            <a:schemeClr val="accent1"/>
+          </a:lnRef>
+          <a:fillRef idx="3">
+            <a:schemeClr val="accent1"/>
+          </a:fillRef>
+          <a:effectRef idx="2">
+            <a:schemeClr val="accent1"/>
+          </a:effectRef>
+          <a:fontRef idx="minor">
+            <a:schemeClr val="lt1"/>
+          </a:fontRef>
+        </p:style>
+        <p:txBody>
+          <a:bodyPr rtlCol="0" anchor="ctr" wrap="square" lIns="109728" rIns="109728" tIns="73152" bIns="73152"/>
+          <a:lstStyle/>
+          <a:p>
+            <a:pPr algn="ctr"/>
+            <a:r>
               <a:rPr sz="1200" b="1" i="0">
                 <a:solidFill>
+                  <a:srgbClr val="9C2E23"/>
+                </a:solidFill>
+                <a:latin typeface="Arial"/>
+              </a:rPr>
+              <a:t>≤ 2 s  </a:t>
+            </a:r>
+            <a:r>
+              <a:rPr sz="850" b="0" i="0">
+                <a:solidFill>
+                  <a:srgbClr val="5A6472"/>
+                </a:solidFill>
+                <a:latin typeface="Arial"/>
+              </a:rPr>
+              <a:t>acquire</a:t>
+            </a:r>
+          </a:p>
+        </p:txBody>
+      </p:sp>
+      <p:sp>
+        <p:nvSpPr>
+          <p:cNvPr id="15378" name="Rounded Rectangle 15377"/>
+          <p:cNvSpPr/>
+          <p:nvPr/>
+        </p:nvSpPr>
+        <p:spPr>
+          <a:xfrm>
+            <a:off x="1883664" y="5687568"/>
+            <a:ext cx="1353312" cy="457200"/>
+          </a:xfrm>
+          <a:prstGeom prst="roundRect">
+            <a:avLst>
+              <a:gd name="adj" fmla="val 6000"/>
+            </a:avLst>
+          </a:prstGeom>
+          <a:solidFill>
+            <a:srgbClr val="FFFFFF"/>
+          </a:solidFill>
+          <a:ln w="12700">
+            <a:solidFill>
+              <a:srgbClr val="E3B9B3"/>
+            </a:solidFill>
+          </a:ln>
+          <a:effectLst/>
+        </p:spPr>
+        <p:style>
+          <a:lnRef idx="1">
+            <a:schemeClr val="accent1"/>
+          </a:lnRef>
+          <a:fillRef idx="3">
+            <a:schemeClr val="accent1"/>
+          </a:fillRef>
+          <a:effectRef idx="2">
+            <a:schemeClr val="accent1"/>
+          </a:effectRef>
+          <a:fontRef idx="minor">
+            <a:schemeClr val="lt1"/>
+          </a:fontRef>
+        </p:style>
+        <p:txBody>
+          <a:bodyPr rtlCol="0" anchor="ctr" wrap="square" lIns="109728" rIns="109728" tIns="73152" bIns="73152"/>
+          <a:lstStyle/>
+          <a:p>
+            <a:pPr algn="ctr"/>
+            <a:r>
+              <a:rPr sz="1200" b="1" i="0">
+                <a:solidFill>
+                  <a:srgbClr val="9C2E23"/>
+                </a:solidFill>
+                <a:latin typeface="Arial"/>
+              </a:rPr>
+              <a:t>≤ 10 px  </a:t>
+            </a:r>
+            <a:r>
+              <a:rPr sz="850" b="0" i="0">
+                <a:solidFill>
+                  <a:srgbClr val="5A6472"/>
+                </a:solidFill>
+                <a:latin typeface="Arial"/>
+              </a:rPr>
+              <a:t>error</a:t>
+            </a:r>
+          </a:p>
+        </p:txBody>
+      </p:sp>
+      <p:sp>
+        <p:nvSpPr>
+          <p:cNvPr id="15379" name="Rounded Rectangle 15378"/>
+          <p:cNvSpPr/>
+          <p:nvPr/>
+        </p:nvSpPr>
+        <p:spPr>
+          <a:xfrm>
+            <a:off x="3346704" y="5687568"/>
+            <a:ext cx="1353312" cy="457200"/>
+          </a:xfrm>
+          <a:prstGeom prst="roundRect">
+            <a:avLst>
+              <a:gd name="adj" fmla="val 6000"/>
+            </a:avLst>
+          </a:prstGeom>
+          <a:solidFill>
+            <a:srgbClr val="FFFFFF"/>
+          </a:solidFill>
+          <a:ln w="12700">
+            <a:solidFill>
+              <a:srgbClr val="E3B9B3"/>
+            </a:solidFill>
+          </a:ln>
+          <a:effectLst/>
+        </p:spPr>
+        <p:style>
+          <a:lnRef idx="1">
+            <a:schemeClr val="accent1"/>
+          </a:lnRef>
+          <a:fillRef idx="3">
+            <a:schemeClr val="accent1"/>
+          </a:fillRef>
+          <a:effectRef idx="2">
+            <a:schemeClr val="accent1"/>
+          </a:effectRef>
+          <a:fontRef idx="minor">
+            <a:schemeClr val="lt1"/>
+          </a:fontRef>
+        </p:style>
+        <p:txBody>
+          <a:bodyPr rtlCol="0" anchor="ctr" wrap="square" lIns="109728" rIns="109728" tIns="73152" bIns="73152"/>
+          <a:lstStyle/>
+          <a:p>
+            <a:pPr algn="ctr"/>
+            <a:r>
+              <a:rPr sz="1200" b="1" i="0">
+                <a:solidFill>
+                  <a:srgbClr val="9C2E23"/>
+                </a:solidFill>
+                <a:latin typeface="Arial"/>
+              </a:rPr>
+              <a:t>≥ 20  </a:t>
+            </a:r>
+            <a:r>
+              <a:rPr sz="850" b="0" i="0">
+                <a:solidFill>
+                  <a:srgbClr val="5A6472"/>
+                </a:solidFill>
+                <a:latin typeface="Arial"/>
+              </a:rPr>
+              <a:t>FPS</a:t>
+            </a:r>
+          </a:p>
+        </p:txBody>
+      </p:sp>
+      <p:sp>
+        <p:nvSpPr>
+          <p:cNvPr id="15380" name="Chevron 15379"/>
+          <p:cNvSpPr/>
+          <p:nvPr/>
+        </p:nvSpPr>
+        <p:spPr>
+          <a:xfrm>
+            <a:off x="4937760" y="3383280"/>
+            <a:ext cx="329184" cy="640080"/>
+          </a:xfrm>
+          <a:prstGeom prst="chevron">
+            <a:avLst/>
+          </a:prstGeom>
+          <a:solidFill>
+            <a:srgbClr val="0E7C99"/>
+          </a:solidFill>
+          <a:ln>
+            <a:noFill/>
+          </a:ln>
+          <a:effectLst/>
+        </p:spPr>
+        <p:style>
+          <a:lnRef idx="1">
+            <a:schemeClr val="accent1"/>
+          </a:lnRef>
+          <a:fillRef idx="3">
+            <a:schemeClr val="accent1"/>
+          </a:fillRef>
+          <a:effectRef idx="2">
+            <a:schemeClr val="accent1"/>
+          </a:effectRef>
+          <a:fontRef idx="minor">
+            <a:schemeClr val="lt1"/>
+          </a:fontRef>
+        </p:style>
+        <p:txBody>
+          <a:bodyPr rtlCol="0" anchor="ctr"/>
+          <a:lstStyle/>
+          <a:p>
+            <a:pPr algn="ctr"/>
+          </a:p>
+        </p:txBody>
+      </p:sp>
+      <p:sp>
+        <p:nvSpPr>
+          <p:cNvPr id="15381" name="TextBox 15380"/>
+          <p:cNvSpPr txBox="1"/>
+          <p:nvPr/>
+        </p:nvSpPr>
+        <p:spPr>
+          <a:xfrm>
+            <a:off x="5413248" y="1810512"/>
+            <a:ext cx="6492240" cy="292608"/>
+          </a:xfrm>
+          <a:prstGeom prst="rect">
+            <a:avLst/>
+          </a:prstGeom>
+          <a:noFill/>
+        </p:spPr>
+        <p:txBody>
+          <a:bodyPr wrap="square" anchor="t" lIns="0" rIns="0" tIns="0" bIns="0">
+            <a:spAutoFit/>
+          </a:bodyPr>
+          <a:lstStyle/>
+          <a:p>
+            <a:r>
+              <a:rPr sz="1400" b="1" i="0">
+                <a:solidFill>
                   <a:srgbClr val="0E7C99"/>
                 </a:solidFill>
                 <a:latin typeface="Arial"/>
               </a:rPr>
-              <a:t>Our answer — the eyes &amp; neck of a laser terminal:  </a:t>
-            </a:r>
-            <a:r>
-              <a:rPr sz="1150" b="0" i="0">
-                <a:solidFill>
-                  <a:srgbClr val="0B2545"/>
-                </a:solidFill>
-                <a:latin typeface="Arial"/>
-              </a:rPr>
-              <a:t>simulate the sky · verify the beacon · track &amp; predict.  Built, measured, live.</a:t>
+              <a:t>OUR SOLUTION — ZERODRIFT</a:t>
+            </a:r>
+            <a:r>
+              <a:rPr sz="1000" b="0" i="0">
+                <a:solidFill>
+                  <a:srgbClr val="5A6472"/>
+                </a:solidFill>
+                <a:latin typeface="Arial"/>
+              </a:rPr>
+              <a:t>   the eyes and neck of a laser terminal</a:t>
             </a:r>
           </a:p>
         </p:txBody>
       </p:sp>
       <p:pic>
         <p:nvPicPr>
-          <p:cNvPr id="15365" name="Picture 15364" descr="c2_cards.jpg"/>
+          <p:cNvPr id="15382" name="Picture 15381" descr="c2_cards.jpg"/>
           <p:cNvPicPr>
             <a:picLocks noChangeAspect="1"/>
           </p:cNvPicPr>
@@ -6662,8 +9108,8 @@
         </p:blipFill>
         <p:spPr>
           <a:xfrm>
-            <a:off x="292608" y="2688336"/>
-            <a:ext cx="5760720" cy="2887437"/>
+            <a:off x="5413248" y="2176272"/>
+            <a:ext cx="4297680" cy="2154120"/>
           </a:xfrm>
           <a:prstGeom prst="rect">
             <a:avLst/>
@@ -6672,7 +9118,7 @@
       </p:pic>
       <p:pic>
         <p:nvPicPr>
-          <p:cNvPr id="15366" name="Picture 15365" descr="c2_chip1p.jpg"/>
+          <p:cNvPr id="15383" name="Picture 15382" descr="c2_chip1p.jpg"/>
           <p:cNvPicPr>
             <a:picLocks noChangeAspect="1"/>
           </p:cNvPicPr>
@@ -6686,8 +9132,8 @@
         </p:blipFill>
         <p:spPr>
           <a:xfrm>
-            <a:off x="292608" y="5632704"/>
-            <a:ext cx="1874519" cy="736990"/>
+            <a:off x="9857232" y="2176272"/>
+            <a:ext cx="1721060" cy="676656"/>
           </a:xfrm>
           <a:prstGeom prst="rect">
             <a:avLst/>
@@ -6696,7 +9142,7 @@
       </p:pic>
       <p:pic>
         <p:nvPicPr>
-          <p:cNvPr id="15367" name="Picture 15366" descr="c2_chip2p.jpg"/>
+          <p:cNvPr id="15384" name="Picture 15383" descr="c2_chip2p.jpg"/>
           <p:cNvPicPr>
             <a:picLocks noChangeAspect="1"/>
           </p:cNvPicPr>
@@ -6710,8 +9156,8 @@
         </p:blipFill>
         <p:spPr>
           <a:xfrm>
-            <a:off x="2295144" y="5632704"/>
-            <a:ext cx="1874519" cy="756385"/>
+            <a:off x="9857232" y="2916936"/>
+            <a:ext cx="1676930" cy="676656"/>
           </a:xfrm>
           <a:prstGeom prst="rect">
             <a:avLst/>
@@ -6720,7 +9166,7 @@
       </p:pic>
       <p:pic>
         <p:nvPicPr>
-          <p:cNvPr id="15368" name="Picture 15367" descr="c2_chip3.jpg"/>
+          <p:cNvPr id="15385" name="Picture 15384" descr="c2_chip3.jpg"/>
           <p:cNvPicPr>
             <a:picLocks noChangeAspect="1"/>
           </p:cNvPicPr>
@@ -6734,53 +9180,24 @@
         </p:blipFill>
         <p:spPr>
           <a:xfrm>
-            <a:off x="4297680" y="5632704"/>
-            <a:ext cx="1874519" cy="763079"/>
+            <a:off x="9857232" y="3657600"/>
+            <a:ext cx="1662220" cy="676656"/>
           </a:xfrm>
           <a:prstGeom prst="rect">
             <a:avLst/>
           </a:prstGeom>
         </p:spPr>
       </p:pic>
-      <p:pic>
-        <p:nvPicPr>
-          <p:cNvPr id="15369" name="Picture 15368" descr="c2_shot.jpg"/>
-          <p:cNvPicPr>
-            <a:picLocks noChangeAspect="1"/>
-          </p:cNvPicPr>
-          <p:nvPr/>
-        </p:nvPicPr>
-        <p:blipFill>
-          <a:blip r:embed="rId8"/>
-          <a:stretch>
-            <a:fillRect/>
-          </a:stretch>
-        </p:blipFill>
-        <p:spPr>
-          <a:xfrm>
-            <a:off x="6784848" y="1847088"/>
-            <a:ext cx="4475747" cy="2743200"/>
-          </a:xfrm>
-          <a:prstGeom prst="rect">
-            <a:avLst/>
-          </a:prstGeom>
-          <a:ln w="9525">
-            <a:solidFill>
-              <a:srgbClr val="5A6472"/>
-            </a:solidFill>
-          </a:ln>
-        </p:spPr>
-      </p:pic>
-      <p:sp>
-        <p:nvSpPr>
-          <p:cNvPr id="15370" name="TextBox 15369"/>
+      <p:sp>
+        <p:nvSpPr>
+          <p:cNvPr id="15386" name="TextBox 15385"/>
           <p:cNvSpPr txBox="1"/>
           <p:nvPr/>
         </p:nvSpPr>
         <p:spPr>
           <a:xfrm>
-            <a:off x="6446520" y="4645152"/>
-            <a:ext cx="5394960" cy="237744"/>
+            <a:off x="9857232" y="4389120"/>
+            <a:ext cx="2057400" cy="164592"/>
           </a:xfrm>
           <a:prstGeom prst="rect">
             <a:avLst/>
@@ -6795,117 +9212,284 @@
           <a:p>
             <a:pPr algn="ctr"/>
             <a:r>
-              <a:rPr sz="1000" b="0" i="1">
+              <a:rPr sz="750" b="0" i="1">
                 <a:solidFill>
                   <a:srgbClr val="5A6472"/>
                 </a:solidFill>
                 <a:latin typeface="Arial"/>
               </a:rPr>
-              <a:t>Our console locked on the beacon — the exact view the live demo link opens</a:t>
-            </a:r>
-          </a:p>
-        </p:txBody>
-      </p:sp>
-      <p:sp>
-        <p:nvSpPr>
-          <p:cNvPr id="15371" name="TextBox 15370"/>
-          <p:cNvSpPr txBox="1"/>
+              <a:t>64 simulated LEO passes</a:t>
+            </a:r>
+          </a:p>
+        </p:txBody>
+      </p:sp>
+      <p:sp>
+        <p:nvSpPr>
+          <p:cNvPr id="15387" name="Rounded Rectangle 15386"/>
+          <p:cNvSpPr/>
           <p:nvPr/>
         </p:nvSpPr>
         <p:spPr>
           <a:xfrm>
-            <a:off x="6446520" y="4901184"/>
-            <a:ext cx="5394960" cy="219456"/>
-          </a:xfrm>
-          <a:prstGeom prst="rect">
-            <a:avLst/>
-          </a:prstGeom>
-          <a:noFill/>
-        </p:spPr>
-        <p:txBody>
-          <a:bodyPr wrap="square" anchor="t" lIns="0" rIns="0" tIns="0" bIns="0">
-            <a:spAutoFit/>
-          </a:bodyPr>
-          <a:lstStyle/>
-          <a:p>
-            <a:pPr algn="ctr"/>
-            <a:r>
-              <a:rPr sz="1100" b="1" i="0">
-                <a:solidFill>
-                  <a:srgbClr val="0B2545"/>
-                </a:solidFill>
-                <a:latin typeface="Arial"/>
-              </a:rPr>
-              <a:t>Measured: </a:t>
-            </a:r>
-            <a:r>
-              <a:rPr sz="1100" b="1" i="0">
-                <a:solidFill>
-                  <a:srgbClr val="0E7C99"/>
-                </a:solidFill>
-                <a:latin typeface="Arial"/>
-              </a:rPr>
-              <a:t>median 198 µrad</a:t>
-            </a:r>
-            <a:r>
-              <a:rPr sz="1100" b="0" i="0">
-                <a:solidFill>
-                  <a:srgbClr val="0B2545"/>
-                </a:solidFill>
-                <a:latin typeface="Arial"/>
-              </a:rPr>
-              <a:t> in lock · in-FOV </a:t>
-            </a:r>
-            <a:r>
-              <a:rPr sz="1100" b="1" i="0">
-                <a:solidFill>
-                  <a:srgbClr val="1F8A5B"/>
-                </a:solidFill>
-                <a:latin typeface="Arial"/>
-              </a:rPr>
-              <a:t>100%</a:t>
-            </a:r>
-            <a:r>
-              <a:rPr sz="1100" b="0" i="0">
-                <a:solidFill>
-                  <a:srgbClr val="0B2545"/>
-                </a:solidFill>
-                <a:latin typeface="Arial"/>
-              </a:rPr>
-              <a:t> · the live-demo run</a:t>
-            </a:r>
-          </a:p>
-        </p:txBody>
-      </p:sp>
-      <p:pic>
-        <p:nvPicPr>
-          <p:cNvPr id="15372" name="Picture 15371" descr="chart_convergence.png"/>
-          <p:cNvPicPr>
-            <a:picLocks noChangeAspect="1"/>
-          </p:cNvPicPr>
-          <p:nvPr/>
-        </p:nvPicPr>
-        <p:blipFill>
-          <a:blip r:embed="rId9"/>
-          <a:stretch>
-            <a:fillRect/>
-          </a:stretch>
-        </p:blipFill>
-        <p:spPr>
-          <a:xfrm>
-            <a:off x="6446520" y="5157216"/>
-            <a:ext cx="5394960" cy="1186891"/>
-          </a:xfrm>
-          <a:prstGeom prst="rect">
-            <a:avLst/>
-          </a:prstGeom>
-          <a:ln w="9525">
+            <a:off x="5413248" y="4645152"/>
+            <a:ext cx="2084831" cy="1591056"/>
+          </a:xfrm>
+          <a:prstGeom prst="roundRect">
+            <a:avLst>
+              <a:gd name="adj" fmla="val 6000"/>
+            </a:avLst>
+          </a:prstGeom>
+          <a:solidFill>
+            <a:srgbClr val="EFF3F7"/>
+          </a:solidFill>
+          <a:ln w="12700">
             <a:solidFill>
               <a:srgbClr val="D5DDE5"/>
             </a:solidFill>
           </a:ln>
-        </p:spPr>
-      </p:pic>
+          <a:effectLst/>
+        </p:spPr>
+        <p:style>
+          <a:lnRef idx="1">
+            <a:schemeClr val="accent1"/>
+          </a:lnRef>
+          <a:fillRef idx="3">
+            <a:schemeClr val="accent1"/>
+          </a:fillRef>
+          <a:effectRef idx="2">
+            <a:schemeClr val="accent1"/>
+          </a:effectRef>
+          <a:fontRef idx="minor">
+            <a:schemeClr val="lt1"/>
+          </a:fontRef>
+        </p:style>
+        <p:txBody>
+          <a:bodyPr rtlCol="0" anchor="t" wrap="square" lIns="109728" rIns="109728" tIns="109728" bIns="73152"/>
+          <a:lstStyle/>
+          <a:p>
+            <a:pPr algn="l"/>
+            <a:r>
+              <a:rPr sz="1800" b="1" i="0">
+                <a:solidFill>
+                  <a:srgbClr val="0E7C99"/>
+                </a:solidFill>
+                <a:latin typeface="Arial"/>
+              </a:rPr>
+              <a:t>01</a:t>
+            </a:r>
+          </a:p>
+          <a:p>
+            <a:pPr algn="l">
+              <a:spcBef>
+                <a:spcPts val="200"/>
+              </a:spcBef>
+            </a:pPr>
+            <a:r>
+              <a:rPr sz="1100" b="1" i="0">
+                <a:solidFill>
+                  <a:srgbClr val="0B2545"/>
+                </a:solidFill>
+                <a:latin typeface="Arial"/>
+              </a:rPr>
+              <a:t>Identity, not brightness</a:t>
+            </a:r>
+          </a:p>
+          <a:p>
+            <a:pPr algn="l">
+              <a:spcBef>
+                <a:spcPts val="300"/>
+              </a:spcBef>
+            </a:pPr>
+            <a:r>
+              <a:rPr sz="950" b="0" i="0">
+                <a:solidFill>
+                  <a:srgbClr val="0B2545"/>
+                </a:solidFill>
+                <a:latin typeface="Arial"/>
+              </a:rPr>
+              <a:t>Locks only on the 4 Hz blink. Lamps, stars, glints and wrong-rate strobes are rejected.</a:t>
+            </a:r>
+          </a:p>
+        </p:txBody>
+      </p:sp>
+      <p:sp>
+        <p:nvSpPr>
+          <p:cNvPr id="15388" name="Rounded Rectangle 15387"/>
+          <p:cNvSpPr/>
+          <p:nvPr/>
+        </p:nvSpPr>
+        <p:spPr>
+          <a:xfrm>
+            <a:off x="7598664" y="4645152"/>
+            <a:ext cx="2084831" cy="1591056"/>
+          </a:xfrm>
+          <a:prstGeom prst="roundRect">
+            <a:avLst>
+              <a:gd name="adj" fmla="val 6000"/>
+            </a:avLst>
+          </a:prstGeom>
+          <a:solidFill>
+            <a:srgbClr val="EFF3F7"/>
+          </a:solidFill>
+          <a:ln w="12700">
+            <a:solidFill>
+              <a:srgbClr val="D5DDE5"/>
+            </a:solidFill>
+          </a:ln>
+          <a:effectLst/>
+        </p:spPr>
+        <p:style>
+          <a:lnRef idx="1">
+            <a:schemeClr val="accent1"/>
+          </a:lnRef>
+          <a:fillRef idx="3">
+            <a:schemeClr val="accent1"/>
+          </a:fillRef>
+          <a:effectRef idx="2">
+            <a:schemeClr val="accent1"/>
+          </a:effectRef>
+          <a:fontRef idx="minor">
+            <a:schemeClr val="lt1"/>
+          </a:fontRef>
+        </p:style>
+        <p:txBody>
+          <a:bodyPr rtlCol="0" anchor="t" wrap="square" lIns="109728" rIns="109728" tIns="109728" bIns="73152"/>
+          <a:lstStyle/>
+          <a:p>
+            <a:pPr algn="l"/>
+            <a:r>
+              <a:rPr sz="1800" b="1" i="0">
+                <a:solidFill>
+                  <a:srgbClr val="0E7C99"/>
+                </a:solidFill>
+                <a:latin typeface="Arial"/>
+              </a:rPr>
+              <a:t>02</a:t>
+            </a:r>
+          </a:p>
+          <a:p>
+            <a:pPr algn="l">
+              <a:spcBef>
+                <a:spcPts val="200"/>
+              </a:spcBef>
+            </a:pPr>
+            <a:r>
+              <a:rPr sz="1100" b="1" i="0">
+                <a:solidFill>
+                  <a:srgbClr val="0B2545"/>
+                </a:solidFill>
+                <a:latin typeface="Arial"/>
+              </a:rPr>
+              <a:t>Built and running</a:t>
+            </a:r>
+          </a:p>
+          <a:p>
+            <a:pPr algn="l">
+              <a:spcBef>
+                <a:spcPts val="300"/>
+              </a:spcBef>
+            </a:pPr>
+            <a:r>
+              <a:rPr sz="950" b="0" i="0">
+                <a:solidFill>
+                  <a:srgbClr val="0B2545"/>
+                </a:solidFill>
+                <a:latin typeface="Arial"/>
+              </a:rPr>
+              <a:t>Live webcam demo, MK1 servo rig, MK2 stepper terminal — ₹6,709 bill of materials.</a:t>
+            </a:r>
+          </a:p>
+        </p:txBody>
+      </p:sp>
+      <p:sp>
+        <p:nvSpPr>
+          <p:cNvPr id="15389" name="Rounded Rectangle 15388"/>
+          <p:cNvSpPr/>
+          <p:nvPr/>
+        </p:nvSpPr>
+        <p:spPr>
+          <a:xfrm>
+            <a:off x="9784080" y="4645152"/>
+            <a:ext cx="2084831" cy="1591056"/>
+          </a:xfrm>
+          <a:prstGeom prst="roundRect">
+            <a:avLst>
+              <a:gd name="adj" fmla="val 6000"/>
+            </a:avLst>
+          </a:prstGeom>
+          <a:solidFill>
+            <a:srgbClr val="EFF3F7"/>
+          </a:solidFill>
+          <a:ln w="12700">
+            <a:solidFill>
+              <a:srgbClr val="D5DDE5"/>
+            </a:solidFill>
+          </a:ln>
+          <a:effectLst/>
+        </p:spPr>
+        <p:style>
+          <a:lnRef idx="1">
+            <a:schemeClr val="accent1"/>
+          </a:lnRef>
+          <a:fillRef idx="3">
+            <a:schemeClr val="accent1"/>
+          </a:fillRef>
+          <a:effectRef idx="2">
+            <a:schemeClr val="accent1"/>
+          </a:effectRef>
+          <a:fontRef idx="minor">
+            <a:schemeClr val="lt1"/>
+          </a:fontRef>
+        </p:style>
+        <p:txBody>
+          <a:bodyPr rtlCol="0" anchor="t" wrap="square" lIns="109728" rIns="109728" tIns="109728" bIns="73152"/>
+          <a:lstStyle/>
+          <a:p>
+            <a:pPr algn="l"/>
+            <a:r>
+              <a:rPr sz="1800" b="1" i="0">
+                <a:solidFill>
+                  <a:srgbClr val="0E7C99"/>
+                </a:solidFill>
+                <a:latin typeface="Arial"/>
+              </a:rPr>
+              <a:t>03</a:t>
+            </a:r>
+          </a:p>
+          <a:p>
+            <a:pPr algn="l">
+              <a:spcBef>
+                <a:spcPts val="200"/>
+              </a:spcBef>
+            </a:pPr>
+            <a:r>
+              <a:rPr sz="1100" b="1" i="0">
+                <a:solidFill>
+                  <a:srgbClr val="0B2545"/>
+                </a:solidFill>
+                <a:latin typeface="Arial"/>
+              </a:rPr>
+              <a:t>Measured, not claimed</a:t>
+            </a:r>
+          </a:p>
+          <a:p>
+            <a:pPr algn="l">
+              <a:spcBef>
+                <a:spcPts val="300"/>
+              </a:spcBef>
+            </a:pPr>
+            <a:r>
+              <a:rPr sz="950" b="0" i="0">
+                <a:solidFill>
+                  <a:srgbClr val="0B2545"/>
+                </a:solidFill>
+                <a:latin typeface="Arial"/>
+              </a:rPr>
+              <a:t>250 passing tests. Every number on these slides regenerates from one command.</a:t>
+            </a:r>
+          </a:p>
+        </p:txBody>
+      </p:sp>
     </p:spTree>
   </p:cSld>
   <p:clrMapOvr>
@@ -7254,30 +9838,1637 @@
           </a:prstGeom>
         </p:spPr>
       </p:pic>
-      <p:pic>
-        <p:nvPicPr>
-          <p:cNvPr id="17411" name="Picture 17410" descr="c3_all.jpg"/>
-          <p:cNvPicPr>
-            <a:picLocks noChangeAspect="1"/>
-          </p:cNvPicPr>
+      <p:sp>
+        <p:nvSpPr>
+          <p:cNvPr id="17411" name="Rounded Rectangle 17410"/>
+          <p:cNvSpPr/>
           <p:nvPr/>
-        </p:nvPicPr>
-        <p:blipFill>
-          <a:blip r:embed="rId4"/>
-          <a:stretch>
-            <a:fillRect/>
-          </a:stretch>
-        </p:blipFill>
-        <p:spPr>
-          <a:xfrm>
-            <a:off x="1097280" y="1572768"/>
-            <a:ext cx="10003536" cy="4725835"/>
+        </p:nvSpPr>
+        <p:spPr>
+          <a:xfrm>
+            <a:off x="384048" y="1609344"/>
+            <a:ext cx="1700784" cy="932688"/>
+          </a:xfrm>
+          <a:prstGeom prst="roundRect">
+            <a:avLst>
+              <a:gd name="adj" fmla="val 6000"/>
+            </a:avLst>
+          </a:prstGeom>
+          <a:solidFill>
+            <a:srgbClr val="EFF3F7"/>
+          </a:solidFill>
+          <a:ln w="12700">
+            <a:solidFill>
+              <a:srgbClr val="B9D3DE"/>
+            </a:solidFill>
+          </a:ln>
+          <a:effectLst/>
+        </p:spPr>
+        <p:style>
+          <a:lnRef idx="1">
+            <a:schemeClr val="accent1"/>
+          </a:lnRef>
+          <a:fillRef idx="3">
+            <a:schemeClr val="accent1"/>
+          </a:fillRef>
+          <a:effectRef idx="2">
+            <a:schemeClr val="accent1"/>
+          </a:effectRef>
+          <a:fontRef idx="minor">
+            <a:schemeClr val="lt1"/>
+          </a:fontRef>
+        </p:style>
+        <p:txBody>
+          <a:bodyPr rtlCol="0" anchor="ctr" wrap="square" rIns="109728" tIns="36576" bIns="73152"/>
+          <a:lstStyle/>
+          <a:p>
+            <a:pPr algn="ctr"/>
+            <a:r>
+              <a:rPr sz="1200" b="1" i="0">
+                <a:solidFill>
+                  <a:srgbClr val="0E7C99"/>
+                </a:solidFill>
+                <a:latin typeface="Arial"/>
+              </a:rPr>
+              <a:t>1  </a:t>
+            </a:r>
+            <a:r>
+              <a:rPr sz="1400" b="1" i="0">
+                <a:solidFill>
+                  <a:srgbClr val="0B2545"/>
+                </a:solidFill>
+                <a:latin typeface="Arial"/>
+              </a:rPr>
+              <a:t>Camera</a:t>
+            </a:r>
+          </a:p>
+          <a:p>
+            <a:pPr>
+              <a:spcBef>
+                <a:spcPts val="400"/>
+              </a:spcBef>
+            </a:pPr>
+            <a:r>
+              <a:rPr sz="1000" b="1" i="0">
+                <a:solidFill>
+                  <a:srgbClr val="0B2545"/>
+                </a:solidFill>
+                <a:latin typeface="Arial"/>
+              </a:rPr>
+              <a:t>640×480 · 30 fps</a:t>
+            </a:r>
+          </a:p>
+          <a:p>
+            <a:pPr>
+              <a:spcBef>
+                <a:spcPts val="100"/>
+              </a:spcBef>
+            </a:pPr>
+            <a:r>
+              <a:rPr sz="900" b="0" i="0">
+                <a:solidFill>
+                  <a:srgbClr val="5A6472"/>
+                </a:solidFill>
+                <a:latin typeface="Arial"/>
+              </a:rPr>
+              <a:t>rides the gimbal, boresighted</a:t>
+            </a:r>
+          </a:p>
+        </p:txBody>
+      </p:sp>
+      <p:sp>
+        <p:nvSpPr>
+          <p:cNvPr id="17412" name="Right Arrow 17411"/>
+          <p:cNvSpPr/>
+          <p:nvPr/>
+        </p:nvSpPr>
+        <p:spPr>
+          <a:xfrm>
+            <a:off x="2112264" y="1984248"/>
+            <a:ext cx="182880" cy="182880"/>
+          </a:xfrm>
+          <a:prstGeom prst="rightArrow">
+            <a:avLst/>
+          </a:prstGeom>
+          <a:solidFill>
+            <a:srgbClr val="0E7C99"/>
+          </a:solidFill>
+          <a:ln>
+            <a:noFill/>
+          </a:ln>
+          <a:effectLst/>
+        </p:spPr>
+        <p:style>
+          <a:lnRef idx="1">
+            <a:schemeClr val="accent1"/>
+          </a:lnRef>
+          <a:fillRef idx="3">
+            <a:schemeClr val="accent1"/>
+          </a:fillRef>
+          <a:effectRef idx="2">
+            <a:schemeClr val="accent1"/>
+          </a:effectRef>
+          <a:fontRef idx="minor">
+            <a:schemeClr val="lt1"/>
+          </a:fontRef>
+        </p:style>
+        <p:txBody>
+          <a:bodyPr rtlCol="0" anchor="ctr"/>
+          <a:lstStyle/>
+          <a:p>
+            <a:pPr algn="ctr"/>
+          </a:p>
+        </p:txBody>
+      </p:sp>
+      <p:sp>
+        <p:nvSpPr>
+          <p:cNvPr id="17413" name="Rounded Rectangle 17412"/>
+          <p:cNvSpPr/>
+          <p:nvPr/>
+        </p:nvSpPr>
+        <p:spPr>
+          <a:xfrm>
+            <a:off x="2322576" y="1609344"/>
+            <a:ext cx="1700784" cy="932688"/>
+          </a:xfrm>
+          <a:prstGeom prst="roundRect">
+            <a:avLst>
+              <a:gd name="adj" fmla="val 6000"/>
+            </a:avLst>
+          </a:prstGeom>
+          <a:solidFill>
+            <a:srgbClr val="EFF3F7"/>
+          </a:solidFill>
+          <a:ln w="12700">
+            <a:solidFill>
+              <a:srgbClr val="B9D3DE"/>
+            </a:solidFill>
+          </a:ln>
+          <a:effectLst/>
+        </p:spPr>
+        <p:style>
+          <a:lnRef idx="1">
+            <a:schemeClr val="accent1"/>
+          </a:lnRef>
+          <a:fillRef idx="3">
+            <a:schemeClr val="accent1"/>
+          </a:fillRef>
+          <a:effectRef idx="2">
+            <a:schemeClr val="accent1"/>
+          </a:effectRef>
+          <a:fontRef idx="minor">
+            <a:schemeClr val="lt1"/>
+          </a:fontRef>
+        </p:style>
+        <p:txBody>
+          <a:bodyPr rtlCol="0" anchor="ctr" wrap="square" rIns="109728" tIns="36576" bIns="73152"/>
+          <a:lstStyle/>
+          <a:p>
+            <a:pPr algn="ctr"/>
+            <a:r>
+              <a:rPr sz="1200" b="1" i="0">
+                <a:solidFill>
+                  <a:srgbClr val="0E7C99"/>
+                </a:solidFill>
+                <a:latin typeface="Arial"/>
+              </a:rPr>
+              <a:t>2  </a:t>
+            </a:r>
+            <a:r>
+              <a:rPr sz="1400" b="1" i="0">
+                <a:solidFill>
+                  <a:srgbClr val="0B2545"/>
+                </a:solidFill>
+                <a:latin typeface="Arial"/>
+              </a:rPr>
+              <a:t>Detect</a:t>
+            </a:r>
+          </a:p>
+          <a:p>
+            <a:pPr>
+              <a:spcBef>
+                <a:spcPts val="400"/>
+              </a:spcBef>
+            </a:pPr>
+            <a:r>
+              <a:rPr sz="1000" b="1" i="0">
+                <a:solidFill>
+                  <a:srgbClr val="0B2545"/>
+                </a:solidFill>
+                <a:latin typeface="Arial"/>
+              </a:rPr>
+              <a:t>salt &amp; pepper filter</a:t>
+            </a:r>
+          </a:p>
+          <a:p>
+            <a:pPr>
+              <a:spcBef>
+                <a:spcPts val="100"/>
+              </a:spcBef>
+            </a:pPr>
+            <a:r>
+              <a:rPr sz="900" b="0" i="0">
+                <a:solidFill>
+                  <a:srgbClr val="5A6472"/>
+                </a:solidFill>
+                <a:latin typeface="Arial"/>
+              </a:rPr>
+              <a:t>sub-pixel spots · CFAR</a:t>
+            </a:r>
+          </a:p>
+        </p:txBody>
+      </p:sp>
+      <p:sp>
+        <p:nvSpPr>
+          <p:cNvPr id="17414" name="Right Arrow 17413"/>
+          <p:cNvSpPr/>
+          <p:nvPr/>
+        </p:nvSpPr>
+        <p:spPr>
+          <a:xfrm>
+            <a:off x="4050792" y="1984248"/>
+            <a:ext cx="182880" cy="182880"/>
+          </a:xfrm>
+          <a:prstGeom prst="rightArrow">
+            <a:avLst/>
+          </a:prstGeom>
+          <a:solidFill>
+            <a:srgbClr val="0E7C99"/>
+          </a:solidFill>
+          <a:ln>
+            <a:noFill/>
+          </a:ln>
+          <a:effectLst/>
+        </p:spPr>
+        <p:style>
+          <a:lnRef idx="1">
+            <a:schemeClr val="accent1"/>
+          </a:lnRef>
+          <a:fillRef idx="3">
+            <a:schemeClr val="accent1"/>
+          </a:fillRef>
+          <a:effectRef idx="2">
+            <a:schemeClr val="accent1"/>
+          </a:effectRef>
+          <a:fontRef idx="minor">
+            <a:schemeClr val="lt1"/>
+          </a:fontRef>
+        </p:style>
+        <p:txBody>
+          <a:bodyPr rtlCol="0" anchor="ctr"/>
+          <a:lstStyle/>
+          <a:p>
+            <a:pPr algn="ctr"/>
+          </a:p>
+        </p:txBody>
+      </p:sp>
+      <p:sp>
+        <p:nvSpPr>
+          <p:cNvPr id="17415" name="Rounded Rectangle 17414"/>
+          <p:cNvSpPr/>
+          <p:nvPr/>
+        </p:nvSpPr>
+        <p:spPr>
+          <a:xfrm>
+            <a:off x="4261104" y="1609344"/>
+            <a:ext cx="1700784" cy="932688"/>
+          </a:xfrm>
+          <a:prstGeom prst="roundRect">
+            <a:avLst>
+              <a:gd name="adj" fmla="val 6000"/>
+            </a:avLst>
+          </a:prstGeom>
+          <a:solidFill>
+            <a:srgbClr val="EFF3F7"/>
+          </a:solidFill>
+          <a:ln w="12700">
+            <a:solidFill>
+              <a:srgbClr val="B9D3DE"/>
+            </a:solidFill>
+          </a:ln>
+          <a:effectLst/>
+        </p:spPr>
+        <p:style>
+          <a:lnRef idx="1">
+            <a:schemeClr val="accent1"/>
+          </a:lnRef>
+          <a:fillRef idx="3">
+            <a:schemeClr val="accent1"/>
+          </a:fillRef>
+          <a:effectRef idx="2">
+            <a:schemeClr val="accent1"/>
+          </a:effectRef>
+          <a:fontRef idx="minor">
+            <a:schemeClr val="lt1"/>
+          </a:fontRef>
+        </p:style>
+        <p:txBody>
+          <a:bodyPr rtlCol="0" anchor="ctr" wrap="square" rIns="109728" tIns="36576" bIns="73152"/>
+          <a:lstStyle/>
+          <a:p>
+            <a:pPr algn="ctr"/>
+            <a:r>
+              <a:rPr sz="1200" b="1" i="0">
+                <a:solidFill>
+                  <a:srgbClr val="0E7C99"/>
+                </a:solidFill>
+                <a:latin typeface="Arial"/>
+              </a:rPr>
+              <a:t>3  </a:t>
+            </a:r>
+            <a:r>
+              <a:rPr sz="1400" b="1" i="0">
+                <a:solidFill>
+                  <a:srgbClr val="0B2545"/>
+                </a:solidFill>
+                <a:latin typeface="Arial"/>
+              </a:rPr>
+              <a:t>Identify</a:t>
+            </a:r>
+          </a:p>
+          <a:p>
+            <a:pPr>
+              <a:spcBef>
+                <a:spcPts val="400"/>
+              </a:spcBef>
+            </a:pPr>
+            <a:r>
+              <a:rPr sz="1000" b="1" i="0">
+                <a:solidFill>
+                  <a:srgbClr val="0B2545"/>
+                </a:solidFill>
+                <a:latin typeface="Arial"/>
+              </a:rPr>
+              <a:t>4 Hz blink test</a:t>
+            </a:r>
+          </a:p>
+          <a:p>
+            <a:pPr>
+              <a:spcBef>
+                <a:spcPts val="100"/>
+              </a:spcBef>
+            </a:pPr>
+            <a:r>
+              <a:rPr sz="900" b="0" i="0">
+                <a:solidFill>
+                  <a:srgbClr val="5A6472"/>
+                </a:solidFill>
+                <a:latin typeface="Arial"/>
+              </a:rPr>
+              <a:t>decoys + wrong rates vetoed</a:t>
+            </a:r>
+          </a:p>
+        </p:txBody>
+      </p:sp>
+      <p:sp>
+        <p:nvSpPr>
+          <p:cNvPr id="17416" name="Right Arrow 17415"/>
+          <p:cNvSpPr/>
+          <p:nvPr/>
+        </p:nvSpPr>
+        <p:spPr>
+          <a:xfrm>
+            <a:off x="5989320" y="1984248"/>
+            <a:ext cx="182880" cy="182880"/>
+          </a:xfrm>
+          <a:prstGeom prst="rightArrow">
+            <a:avLst/>
+          </a:prstGeom>
+          <a:solidFill>
+            <a:srgbClr val="0E7C99"/>
+          </a:solidFill>
+          <a:ln>
+            <a:noFill/>
+          </a:ln>
+          <a:effectLst/>
+        </p:spPr>
+        <p:style>
+          <a:lnRef idx="1">
+            <a:schemeClr val="accent1"/>
+          </a:lnRef>
+          <a:fillRef idx="3">
+            <a:schemeClr val="accent1"/>
+          </a:fillRef>
+          <a:effectRef idx="2">
+            <a:schemeClr val="accent1"/>
+          </a:effectRef>
+          <a:fontRef idx="minor">
+            <a:schemeClr val="lt1"/>
+          </a:fontRef>
+        </p:style>
+        <p:txBody>
+          <a:bodyPr rtlCol="0" anchor="ctr"/>
+          <a:lstStyle/>
+          <a:p>
+            <a:pPr algn="ctr"/>
+          </a:p>
+        </p:txBody>
+      </p:sp>
+      <p:sp>
+        <p:nvSpPr>
+          <p:cNvPr id="17417" name="Rounded Rectangle 17416"/>
+          <p:cNvSpPr/>
+          <p:nvPr/>
+        </p:nvSpPr>
+        <p:spPr>
+          <a:xfrm>
+            <a:off x="6199632" y="1609344"/>
+            <a:ext cx="1700784" cy="932688"/>
+          </a:xfrm>
+          <a:prstGeom prst="roundRect">
+            <a:avLst>
+              <a:gd name="adj" fmla="val 6000"/>
+            </a:avLst>
+          </a:prstGeom>
+          <a:solidFill>
+            <a:srgbClr val="EFF3F7"/>
+          </a:solidFill>
+          <a:ln w="12700">
+            <a:solidFill>
+              <a:srgbClr val="B9D3DE"/>
+            </a:solidFill>
+          </a:ln>
+          <a:effectLst/>
+        </p:spPr>
+        <p:style>
+          <a:lnRef idx="1">
+            <a:schemeClr val="accent1"/>
+          </a:lnRef>
+          <a:fillRef idx="3">
+            <a:schemeClr val="accent1"/>
+          </a:fillRef>
+          <a:effectRef idx="2">
+            <a:schemeClr val="accent1"/>
+          </a:effectRef>
+          <a:fontRef idx="minor">
+            <a:schemeClr val="lt1"/>
+          </a:fontRef>
+        </p:style>
+        <p:txBody>
+          <a:bodyPr rtlCol="0" anchor="ctr" wrap="square" rIns="109728" tIns="36576" bIns="73152"/>
+          <a:lstStyle/>
+          <a:p>
+            <a:pPr algn="ctr"/>
+            <a:r>
+              <a:rPr sz="1200" b="1" i="0">
+                <a:solidFill>
+                  <a:srgbClr val="0E7C99"/>
+                </a:solidFill>
+                <a:latin typeface="Arial"/>
+              </a:rPr>
+              <a:t>4  </a:t>
+            </a:r>
+            <a:r>
+              <a:rPr sz="1400" b="1" i="0">
+                <a:solidFill>
+                  <a:srgbClr val="0B2545"/>
+                </a:solidFill>
+                <a:latin typeface="Arial"/>
+              </a:rPr>
+              <a:t>Track</a:t>
+            </a:r>
+          </a:p>
+          <a:p>
+            <a:pPr>
+              <a:spcBef>
+                <a:spcPts val="400"/>
+              </a:spcBef>
+            </a:pPr>
+            <a:r>
+              <a:rPr sz="1000" b="1" i="0">
+                <a:solidFill>
+                  <a:srgbClr val="0B2545"/>
+                </a:solidFill>
+                <a:latin typeface="Arial"/>
+              </a:rPr>
+              <a:t>IMM Kalman filter</a:t>
+            </a:r>
+          </a:p>
+          <a:p>
+            <a:pPr>
+              <a:spcBef>
+                <a:spcPts val="100"/>
+              </a:spcBef>
+            </a:pPr>
+            <a:r>
+              <a:rPr sz="900" b="0" i="0">
+                <a:solidFill>
+                  <a:srgbClr val="5A6472"/>
+                </a:solidFill>
+                <a:latin typeface="Arial"/>
+              </a:rPr>
+              <a:t>coasts the dark half-cycle</a:t>
+            </a:r>
+          </a:p>
+        </p:txBody>
+      </p:sp>
+      <p:sp>
+        <p:nvSpPr>
+          <p:cNvPr id="17418" name="Right Arrow 17417"/>
+          <p:cNvSpPr/>
+          <p:nvPr/>
+        </p:nvSpPr>
+        <p:spPr>
+          <a:xfrm>
+            <a:off x="7927848" y="1984248"/>
+            <a:ext cx="182880" cy="182880"/>
+          </a:xfrm>
+          <a:prstGeom prst="rightArrow">
+            <a:avLst/>
+          </a:prstGeom>
+          <a:solidFill>
+            <a:srgbClr val="0E7C99"/>
+          </a:solidFill>
+          <a:ln>
+            <a:noFill/>
+          </a:ln>
+          <a:effectLst/>
+        </p:spPr>
+        <p:style>
+          <a:lnRef idx="1">
+            <a:schemeClr val="accent1"/>
+          </a:lnRef>
+          <a:fillRef idx="3">
+            <a:schemeClr val="accent1"/>
+          </a:fillRef>
+          <a:effectRef idx="2">
+            <a:schemeClr val="accent1"/>
+          </a:effectRef>
+          <a:fontRef idx="minor">
+            <a:schemeClr val="lt1"/>
+          </a:fontRef>
+        </p:style>
+        <p:txBody>
+          <a:bodyPr rtlCol="0" anchor="ctr"/>
+          <a:lstStyle/>
+          <a:p>
+            <a:pPr algn="ctr"/>
+          </a:p>
+        </p:txBody>
+      </p:sp>
+      <p:sp>
+        <p:nvSpPr>
+          <p:cNvPr id="17419" name="Rounded Rectangle 17418"/>
+          <p:cNvSpPr/>
+          <p:nvPr/>
+        </p:nvSpPr>
+        <p:spPr>
+          <a:xfrm>
+            <a:off x="8138160" y="1609344"/>
+            <a:ext cx="1700784" cy="932688"/>
+          </a:xfrm>
+          <a:prstGeom prst="roundRect">
+            <a:avLst>
+              <a:gd name="adj" fmla="val 6000"/>
+            </a:avLst>
+          </a:prstGeom>
+          <a:solidFill>
+            <a:srgbClr val="EFF3F7"/>
+          </a:solidFill>
+          <a:ln w="12700">
+            <a:solidFill>
+              <a:srgbClr val="B9D3DE"/>
+            </a:solidFill>
+          </a:ln>
+          <a:effectLst/>
+        </p:spPr>
+        <p:style>
+          <a:lnRef idx="1">
+            <a:schemeClr val="accent1"/>
+          </a:lnRef>
+          <a:fillRef idx="3">
+            <a:schemeClr val="accent1"/>
+          </a:fillRef>
+          <a:effectRef idx="2">
+            <a:schemeClr val="accent1"/>
+          </a:effectRef>
+          <a:fontRef idx="minor">
+            <a:schemeClr val="lt1"/>
+          </a:fontRef>
+        </p:style>
+        <p:txBody>
+          <a:bodyPr rtlCol="0" anchor="ctr" wrap="square" rIns="109728" tIns="36576" bIns="73152"/>
+          <a:lstStyle/>
+          <a:p>
+            <a:pPr algn="ctr"/>
+            <a:r>
+              <a:rPr sz="1200" b="1" i="0">
+                <a:solidFill>
+                  <a:srgbClr val="0E7C99"/>
+                </a:solidFill>
+                <a:latin typeface="Arial"/>
+              </a:rPr>
+              <a:t>5  </a:t>
+            </a:r>
+            <a:r>
+              <a:rPr sz="1400" b="1" i="0">
+                <a:solidFill>
+                  <a:srgbClr val="0B2545"/>
+                </a:solidFill>
+                <a:latin typeface="Arial"/>
+              </a:rPr>
+              <a:t>Control</a:t>
+            </a:r>
+          </a:p>
+          <a:p>
+            <a:pPr>
+              <a:spcBef>
+                <a:spcPts val="400"/>
+              </a:spcBef>
+            </a:pPr>
+            <a:r>
+              <a:rPr sz="1000" b="1" i="0">
+                <a:solidFill>
+                  <a:srgbClr val="0B2545"/>
+                </a:solidFill>
+                <a:latin typeface="Arial"/>
+              </a:rPr>
+              <a:t>Smith predictor</a:t>
+            </a:r>
+          </a:p>
+          <a:p>
+            <a:pPr>
+              <a:spcBef>
+                <a:spcPts val="100"/>
+              </a:spcBef>
+            </a:pPr>
+            <a:r>
+              <a:rPr sz="900" b="0" i="0">
+                <a:solidFill>
+                  <a:srgbClr val="5A6472"/>
+                </a:solidFill>
+                <a:latin typeface="Arial"/>
+              </a:rPr>
+              <a:t>type-2 loop cancels drift</a:t>
+            </a:r>
+          </a:p>
+        </p:txBody>
+      </p:sp>
+      <p:sp>
+        <p:nvSpPr>
+          <p:cNvPr id="17420" name="Right Arrow 17419"/>
+          <p:cNvSpPr/>
+          <p:nvPr/>
+        </p:nvSpPr>
+        <p:spPr>
+          <a:xfrm>
+            <a:off x="9866376" y="1984248"/>
+            <a:ext cx="182880" cy="182880"/>
+          </a:xfrm>
+          <a:prstGeom prst="rightArrow">
+            <a:avLst/>
+          </a:prstGeom>
+          <a:solidFill>
+            <a:srgbClr val="0E7C99"/>
+          </a:solidFill>
+          <a:ln>
+            <a:noFill/>
+          </a:ln>
+          <a:effectLst/>
+        </p:spPr>
+        <p:style>
+          <a:lnRef idx="1">
+            <a:schemeClr val="accent1"/>
+          </a:lnRef>
+          <a:fillRef idx="3">
+            <a:schemeClr val="accent1"/>
+          </a:fillRef>
+          <a:effectRef idx="2">
+            <a:schemeClr val="accent1"/>
+          </a:effectRef>
+          <a:fontRef idx="minor">
+            <a:schemeClr val="lt1"/>
+          </a:fontRef>
+        </p:style>
+        <p:txBody>
+          <a:bodyPr rtlCol="0" anchor="ctr"/>
+          <a:lstStyle/>
+          <a:p>
+            <a:pPr algn="ctr"/>
+          </a:p>
+        </p:txBody>
+      </p:sp>
+      <p:sp>
+        <p:nvSpPr>
+          <p:cNvPr id="17421" name="Rounded Rectangle 17420"/>
+          <p:cNvSpPr/>
+          <p:nvPr/>
+        </p:nvSpPr>
+        <p:spPr>
+          <a:xfrm>
+            <a:off x="10076688" y="1609344"/>
+            <a:ext cx="1700784" cy="932688"/>
+          </a:xfrm>
+          <a:prstGeom prst="roundRect">
+            <a:avLst>
+              <a:gd name="adj" fmla="val 6000"/>
+            </a:avLst>
+          </a:prstGeom>
+          <a:solidFill>
+            <a:srgbClr val="EFF3F7"/>
+          </a:solidFill>
+          <a:ln w="12700">
+            <a:solidFill>
+              <a:srgbClr val="B9D3DE"/>
+            </a:solidFill>
+          </a:ln>
+          <a:effectLst/>
+        </p:spPr>
+        <p:style>
+          <a:lnRef idx="1">
+            <a:schemeClr val="accent1"/>
+          </a:lnRef>
+          <a:fillRef idx="3">
+            <a:schemeClr val="accent1"/>
+          </a:fillRef>
+          <a:effectRef idx="2">
+            <a:schemeClr val="accent1"/>
+          </a:effectRef>
+          <a:fontRef idx="minor">
+            <a:schemeClr val="lt1"/>
+          </a:fontRef>
+        </p:style>
+        <p:txBody>
+          <a:bodyPr rtlCol="0" anchor="ctr" wrap="square" rIns="109728" tIns="36576" bIns="73152"/>
+          <a:lstStyle/>
+          <a:p>
+            <a:pPr algn="ctr"/>
+            <a:r>
+              <a:rPr sz="1200" b="1" i="0">
+                <a:solidFill>
+                  <a:srgbClr val="0E7C99"/>
+                </a:solidFill>
+                <a:latin typeface="Arial"/>
+              </a:rPr>
+              <a:t>6  </a:t>
+            </a:r>
+            <a:r>
+              <a:rPr sz="1400" b="1" i="0">
+                <a:solidFill>
+                  <a:srgbClr val="0B2545"/>
+                </a:solidFill>
+                <a:latin typeface="Arial"/>
+              </a:rPr>
+              <a:t>Gimbal</a:t>
+            </a:r>
+          </a:p>
+          <a:p>
+            <a:pPr>
+              <a:spcBef>
+                <a:spcPts val="400"/>
+              </a:spcBef>
+            </a:pPr>
+            <a:r>
+              <a:rPr sz="1000" b="1" i="0">
+                <a:solidFill>
+                  <a:srgbClr val="0B2545"/>
+                </a:solidFill>
+                <a:latin typeface="Arial"/>
+              </a:rPr>
+              <a:t>2× NEMA17 steppers</a:t>
+            </a:r>
+          </a:p>
+          <a:p>
+            <a:pPr>
+              <a:spcBef>
+                <a:spcPts val="100"/>
+              </a:spcBef>
+            </a:pPr>
+            <a:r>
+              <a:rPr sz="900" b="0" i="0">
+                <a:solidFill>
+                  <a:srgbClr val="5A6472"/>
+                </a:solidFill>
+                <a:latin typeface="Arial"/>
+              </a:rPr>
+              <a:t>AS5600 angle feedback</a:t>
+            </a:r>
+          </a:p>
+        </p:txBody>
+      </p:sp>
+      <p:cxnSp>
+        <p:nvCxnSpPr>
+          <p:cNvPr id="17422" name="Connector 17421"/>
+          <p:cNvCxnSpPr/>
+          <p:nvPr/>
+        </p:nvCxnSpPr>
+        <p:spPr>
+          <a:xfrm>
+            <a:off x="10927080" y="2542032"/>
+            <a:ext cx="0" cy="182880"/>
+          </a:xfrm>
+          <a:prstGeom prst="line">
+            <a:avLst/>
+          </a:prstGeom>
+          <a:ln w="22225">
+            <a:solidFill>
+              <a:srgbClr val="0E7C99"/>
+            </a:solidFill>
+          </a:ln>
+        </p:spPr>
+        <p:style>
+          <a:lnRef idx="2">
+            <a:schemeClr val="accent1"/>
+          </a:lnRef>
+          <a:fillRef idx="0">
+            <a:schemeClr val="accent1"/>
+          </a:fillRef>
+          <a:effectRef idx="1">
+            <a:schemeClr val="accent1"/>
+          </a:effectRef>
+          <a:fontRef idx="minor">
+            <a:schemeClr val="tx1"/>
+          </a:fontRef>
+        </p:style>
+      </p:cxnSp>
+      <p:cxnSp>
+        <p:nvCxnSpPr>
+          <p:cNvPr id="17423" name="Connector 17422"/>
+          <p:cNvCxnSpPr/>
+          <p:nvPr/>
+        </p:nvCxnSpPr>
+        <p:spPr>
+          <a:xfrm flipH="1">
+            <a:off x="1234440" y="2724912"/>
+            <a:ext cx="9692640" cy="0"/>
+          </a:xfrm>
+          <a:prstGeom prst="line">
+            <a:avLst/>
+          </a:prstGeom>
+          <a:ln w="22225">
+            <a:solidFill>
+              <a:srgbClr val="0E7C99"/>
+            </a:solidFill>
+          </a:ln>
+        </p:spPr>
+        <p:style>
+          <a:lnRef idx="2">
+            <a:schemeClr val="accent1"/>
+          </a:lnRef>
+          <a:fillRef idx="0">
+            <a:schemeClr val="accent1"/>
+          </a:fillRef>
+          <a:effectRef idx="1">
+            <a:schemeClr val="accent1"/>
+          </a:effectRef>
+          <a:fontRef idx="minor">
+            <a:schemeClr val="tx1"/>
+          </a:fontRef>
+        </p:style>
+      </p:cxnSp>
+      <p:cxnSp>
+        <p:nvCxnSpPr>
+          <p:cNvPr id="17424" name="Connector 17423"/>
+          <p:cNvCxnSpPr/>
+          <p:nvPr/>
+        </p:nvCxnSpPr>
+        <p:spPr>
+          <a:xfrm flipV="1">
+            <a:off x="1234440" y="2542032"/>
+            <a:ext cx="0" cy="182880"/>
+          </a:xfrm>
+          <a:prstGeom prst="line">
+            <a:avLst/>
+          </a:prstGeom>
+          <a:ln w="22225">
+            <a:solidFill>
+              <a:srgbClr val="0E7C99"/>
+            </a:solidFill>
+            <a:tailEnd type="triangle" w="med" len="med"/>
+          </a:ln>
+        </p:spPr>
+        <p:style>
+          <a:lnRef idx="2">
+            <a:schemeClr val="accent1"/>
+          </a:lnRef>
+          <a:fillRef idx="0">
+            <a:schemeClr val="accent1"/>
+          </a:fillRef>
+          <a:effectRef idx="1">
+            <a:schemeClr val="accent1"/>
+          </a:effectRef>
+          <a:fontRef idx="minor">
+            <a:schemeClr val="tx1"/>
+          </a:fontRef>
+        </p:style>
+      </p:cxnSp>
+      <p:sp>
+        <p:nvSpPr>
+          <p:cNvPr id="17425" name="TextBox 17424"/>
+          <p:cNvSpPr txBox="1"/>
+          <p:nvPr/>
+        </p:nvSpPr>
+        <p:spPr>
+          <a:xfrm>
+            <a:off x="2926080" y="2752344"/>
+            <a:ext cx="6400800" cy="201168"/>
           </a:xfrm>
           <a:prstGeom prst="rect">
             <a:avLst/>
           </a:prstGeom>
-        </p:spPr>
-      </p:pic>
+          <a:noFill/>
+        </p:spPr>
+        <p:txBody>
+          <a:bodyPr wrap="square" anchor="t" lIns="0" rIns="0" tIns="0" bIns="0">
+            <a:spAutoFit/>
+          </a:bodyPr>
+          <a:lstStyle/>
+          <a:p>
+            <a:pPr algn="ctr"/>
+            <a:r>
+              <a:rPr sz="900" b="0" i="1">
+                <a:solidFill>
+                  <a:srgbClr val="0E7C99"/>
+                </a:solidFill>
+                <a:latin typeface="Arial"/>
+              </a:rPr>
+              <a:t>closed optical loop — the camera moves with the laser, so the error is measured on the image itself</a:t>
+            </a:r>
+          </a:p>
+        </p:txBody>
+      </p:sp>
+      <p:sp>
+        <p:nvSpPr>
+          <p:cNvPr id="17426" name="TextBox 17425"/>
+          <p:cNvSpPr txBox="1"/>
+          <p:nvPr/>
+        </p:nvSpPr>
+        <p:spPr>
+          <a:xfrm>
+            <a:off x="384048" y="3255264"/>
+            <a:ext cx="1920240" cy="237744"/>
+          </a:xfrm>
+          <a:prstGeom prst="rect">
+            <a:avLst/>
+          </a:prstGeom>
+          <a:noFill/>
+        </p:spPr>
+        <p:txBody>
+          <a:bodyPr wrap="square" anchor="t" lIns="0" rIns="0" tIns="0" bIns="0">
+            <a:spAutoFit/>
+          </a:bodyPr>
+          <a:lstStyle/>
+          <a:p>
+            <a:r>
+              <a:rPr sz="1000" b="1" i="0">
+                <a:solidFill>
+                  <a:srgbClr val="5A6472"/>
+                </a:solidFill>
+                <a:latin typeface="Arial"/>
+              </a:rPr>
+              <a:t>STATE MACHINE</a:t>
+            </a:r>
+          </a:p>
+        </p:txBody>
+      </p:sp>
+      <p:sp>
+        <p:nvSpPr>
+          <p:cNvPr id="17427" name="Rounded Rectangle 17426"/>
+          <p:cNvSpPr/>
+          <p:nvPr/>
+        </p:nvSpPr>
+        <p:spPr>
+          <a:xfrm>
+            <a:off x="2103120" y="3200400"/>
+            <a:ext cx="1417320" cy="347472"/>
+          </a:xfrm>
+          <a:prstGeom prst="roundRect">
+            <a:avLst>
+              <a:gd name="adj" fmla="val 50000"/>
+            </a:avLst>
+          </a:prstGeom>
+          <a:solidFill>
+            <a:srgbClr val="E3EBFB"/>
+          </a:solidFill>
+          <a:ln>
+            <a:noFill/>
+          </a:ln>
+          <a:effectLst/>
+        </p:spPr>
+        <p:style>
+          <a:lnRef idx="1">
+            <a:schemeClr val="accent1"/>
+          </a:lnRef>
+          <a:fillRef idx="3">
+            <a:schemeClr val="accent1"/>
+          </a:fillRef>
+          <a:effectRef idx="2">
+            <a:schemeClr val="accent1"/>
+          </a:effectRef>
+          <a:fontRef idx="minor">
+            <a:schemeClr val="lt1"/>
+          </a:fontRef>
+        </p:style>
+        <p:txBody>
+          <a:bodyPr rtlCol="0" anchor="ctr"/>
+          <a:lstStyle/>
+          <a:p>
+            <a:pPr algn="ctr"/>
+            <a:r>
+              <a:rPr sz="1000" b="1" i="0">
+                <a:solidFill>
+                  <a:srgbClr val="0B2545"/>
+                </a:solidFill>
+                <a:latin typeface="Arial"/>
+              </a:rPr>
+              <a:t>SEARCH</a:t>
+            </a:r>
+          </a:p>
+        </p:txBody>
+      </p:sp>
+      <p:sp>
+        <p:nvSpPr>
+          <p:cNvPr id="17428" name="TextBox 17427"/>
+          <p:cNvSpPr txBox="1"/>
+          <p:nvPr/>
+        </p:nvSpPr>
+        <p:spPr>
+          <a:xfrm>
+            <a:off x="3520439" y="3218688"/>
+            <a:ext cx="402336" cy="310896"/>
+          </a:xfrm>
+          <a:prstGeom prst="rect">
+            <a:avLst/>
+          </a:prstGeom>
+          <a:noFill/>
+        </p:spPr>
+        <p:txBody>
+          <a:bodyPr wrap="square" anchor="ctr" lIns="0" rIns="0" tIns="0" bIns="0">
+            <a:spAutoFit/>
+          </a:bodyPr>
+          <a:lstStyle/>
+          <a:p>
+            <a:pPr algn="ctr"/>
+            <a:r>
+              <a:rPr sz="1400" b="1" i="0">
+                <a:solidFill>
+                  <a:srgbClr val="0E7C99"/>
+                </a:solidFill>
+                <a:latin typeface="Arial"/>
+              </a:rPr>
+              <a:t>→</a:t>
+            </a:r>
+          </a:p>
+        </p:txBody>
+      </p:sp>
+      <p:sp>
+        <p:nvSpPr>
+          <p:cNvPr id="17429" name="Rounded Rectangle 17428"/>
+          <p:cNvSpPr/>
+          <p:nvPr/>
+        </p:nvSpPr>
+        <p:spPr>
+          <a:xfrm>
+            <a:off x="3922776" y="3200400"/>
+            <a:ext cx="1417320" cy="347472"/>
+          </a:xfrm>
+          <a:prstGeom prst="roundRect">
+            <a:avLst>
+              <a:gd name="adj" fmla="val 50000"/>
+            </a:avLst>
+          </a:prstGeom>
+          <a:solidFill>
+            <a:srgbClr val="FDF1D8"/>
+          </a:solidFill>
+          <a:ln>
+            <a:noFill/>
+          </a:ln>
+          <a:effectLst/>
+        </p:spPr>
+        <p:style>
+          <a:lnRef idx="1">
+            <a:schemeClr val="accent1"/>
+          </a:lnRef>
+          <a:fillRef idx="3">
+            <a:schemeClr val="accent1"/>
+          </a:fillRef>
+          <a:effectRef idx="2">
+            <a:schemeClr val="accent1"/>
+          </a:effectRef>
+          <a:fontRef idx="minor">
+            <a:schemeClr val="lt1"/>
+          </a:fontRef>
+        </p:style>
+        <p:txBody>
+          <a:bodyPr rtlCol="0" anchor="ctr"/>
+          <a:lstStyle/>
+          <a:p>
+            <a:pPr algn="ctr"/>
+            <a:r>
+              <a:rPr sz="1000" b="1" i="0">
+                <a:solidFill>
+                  <a:srgbClr val="0B2545"/>
+                </a:solidFill>
+                <a:latin typeface="Arial"/>
+              </a:rPr>
+              <a:t>ACQUIRE</a:t>
+            </a:r>
+          </a:p>
+        </p:txBody>
+      </p:sp>
+      <p:sp>
+        <p:nvSpPr>
+          <p:cNvPr id="17430" name="TextBox 17429"/>
+          <p:cNvSpPr txBox="1"/>
+          <p:nvPr/>
+        </p:nvSpPr>
+        <p:spPr>
+          <a:xfrm>
+            <a:off x="5340096" y="3218688"/>
+            <a:ext cx="402336" cy="310896"/>
+          </a:xfrm>
+          <a:prstGeom prst="rect">
+            <a:avLst/>
+          </a:prstGeom>
+          <a:noFill/>
+        </p:spPr>
+        <p:txBody>
+          <a:bodyPr wrap="square" anchor="ctr" lIns="0" rIns="0" tIns="0" bIns="0">
+            <a:spAutoFit/>
+          </a:bodyPr>
+          <a:lstStyle/>
+          <a:p>
+            <a:pPr algn="ctr"/>
+            <a:r>
+              <a:rPr sz="1400" b="1" i="0">
+                <a:solidFill>
+                  <a:srgbClr val="0E7C99"/>
+                </a:solidFill>
+                <a:latin typeface="Arial"/>
+              </a:rPr>
+              <a:t>→</a:t>
+            </a:r>
+          </a:p>
+        </p:txBody>
+      </p:sp>
+      <p:sp>
+        <p:nvSpPr>
+          <p:cNvPr id="17431" name="Rounded Rectangle 17430"/>
+          <p:cNvSpPr/>
+          <p:nvPr/>
+        </p:nvSpPr>
+        <p:spPr>
+          <a:xfrm>
+            <a:off x="5742431" y="3200400"/>
+            <a:ext cx="1417320" cy="347472"/>
+          </a:xfrm>
+          <a:prstGeom prst="roundRect">
+            <a:avLst>
+              <a:gd name="adj" fmla="val 50000"/>
+            </a:avLst>
+          </a:prstGeom>
+          <a:solidFill>
+            <a:srgbClr val="DFF3E8"/>
+          </a:solidFill>
+          <a:ln>
+            <a:noFill/>
+          </a:ln>
+          <a:effectLst/>
+        </p:spPr>
+        <p:style>
+          <a:lnRef idx="1">
+            <a:schemeClr val="accent1"/>
+          </a:lnRef>
+          <a:fillRef idx="3">
+            <a:schemeClr val="accent1"/>
+          </a:fillRef>
+          <a:effectRef idx="2">
+            <a:schemeClr val="accent1"/>
+          </a:effectRef>
+          <a:fontRef idx="minor">
+            <a:schemeClr val="lt1"/>
+          </a:fontRef>
+        </p:style>
+        <p:txBody>
+          <a:bodyPr rtlCol="0" anchor="ctr"/>
+          <a:lstStyle/>
+          <a:p>
+            <a:pPr algn="ctr"/>
+            <a:r>
+              <a:rPr sz="1000" b="1" i="0">
+                <a:solidFill>
+                  <a:srgbClr val="0B2545"/>
+                </a:solidFill>
+                <a:latin typeface="Arial"/>
+              </a:rPr>
+              <a:t>TRACK</a:t>
+            </a:r>
+          </a:p>
+        </p:txBody>
+      </p:sp>
+      <p:sp>
+        <p:nvSpPr>
+          <p:cNvPr id="17432" name="TextBox 17431"/>
+          <p:cNvSpPr txBox="1"/>
+          <p:nvPr/>
+        </p:nvSpPr>
+        <p:spPr>
+          <a:xfrm>
+            <a:off x="7159751" y="3218688"/>
+            <a:ext cx="402336" cy="310896"/>
+          </a:xfrm>
+          <a:prstGeom prst="rect">
+            <a:avLst/>
+          </a:prstGeom>
+          <a:noFill/>
+        </p:spPr>
+        <p:txBody>
+          <a:bodyPr wrap="square" anchor="ctr" lIns="0" rIns="0" tIns="0" bIns="0">
+            <a:spAutoFit/>
+          </a:bodyPr>
+          <a:lstStyle/>
+          <a:p>
+            <a:pPr algn="ctr"/>
+            <a:r>
+              <a:rPr sz="1400" b="1" i="0">
+                <a:solidFill>
+                  <a:srgbClr val="0E7C99"/>
+                </a:solidFill>
+                <a:latin typeface="Arial"/>
+              </a:rPr>
+              <a:t>⇄</a:t>
+            </a:r>
+          </a:p>
+        </p:txBody>
+      </p:sp>
+      <p:sp>
+        <p:nvSpPr>
+          <p:cNvPr id="17433" name="Rounded Rectangle 17432"/>
+          <p:cNvSpPr/>
+          <p:nvPr/>
+        </p:nvSpPr>
+        <p:spPr>
+          <a:xfrm>
+            <a:off x="7562088" y="3200400"/>
+            <a:ext cx="1417320" cy="347472"/>
+          </a:xfrm>
+          <a:prstGeom prst="roundRect">
+            <a:avLst>
+              <a:gd name="adj" fmla="val 50000"/>
+            </a:avLst>
+          </a:prstGeom>
+          <a:solidFill>
+            <a:srgbClr val="FDE8D8"/>
+          </a:solidFill>
+          <a:ln>
+            <a:noFill/>
+          </a:ln>
+          <a:effectLst/>
+        </p:spPr>
+        <p:style>
+          <a:lnRef idx="1">
+            <a:schemeClr val="accent1"/>
+          </a:lnRef>
+          <a:fillRef idx="3">
+            <a:schemeClr val="accent1"/>
+          </a:fillRef>
+          <a:effectRef idx="2">
+            <a:schemeClr val="accent1"/>
+          </a:effectRef>
+          <a:fontRef idx="minor">
+            <a:schemeClr val="lt1"/>
+          </a:fontRef>
+        </p:style>
+        <p:txBody>
+          <a:bodyPr rtlCol="0" anchor="ctr"/>
+          <a:lstStyle/>
+          <a:p>
+            <a:pPr algn="ctr"/>
+            <a:r>
+              <a:rPr sz="1000" b="1" i="0">
+                <a:solidFill>
+                  <a:srgbClr val="0B2545"/>
+                </a:solidFill>
+                <a:latin typeface="Arial"/>
+              </a:rPr>
+              <a:t>COAST</a:t>
+            </a:r>
+          </a:p>
+        </p:txBody>
+      </p:sp>
+      <p:sp>
+        <p:nvSpPr>
+          <p:cNvPr id="17434" name="TextBox 17433"/>
+          <p:cNvSpPr txBox="1"/>
+          <p:nvPr/>
+        </p:nvSpPr>
+        <p:spPr>
+          <a:xfrm>
+            <a:off x="8979408" y="3218688"/>
+            <a:ext cx="402336" cy="310896"/>
+          </a:xfrm>
+          <a:prstGeom prst="rect">
+            <a:avLst/>
+          </a:prstGeom>
+          <a:noFill/>
+        </p:spPr>
+        <p:txBody>
+          <a:bodyPr wrap="square" anchor="ctr" lIns="0" rIns="0" tIns="0" bIns="0">
+            <a:spAutoFit/>
+          </a:bodyPr>
+          <a:lstStyle/>
+          <a:p>
+            <a:pPr algn="ctr"/>
+            <a:r>
+              <a:rPr sz="1400" b="1" i="0">
+                <a:solidFill>
+                  <a:srgbClr val="0E7C99"/>
+                </a:solidFill>
+                <a:latin typeface="Arial"/>
+              </a:rPr>
+              <a:t>→</a:t>
+            </a:r>
+          </a:p>
+        </p:txBody>
+      </p:sp>
+      <p:sp>
+        <p:nvSpPr>
+          <p:cNvPr id="17435" name="Rounded Rectangle 17434"/>
+          <p:cNvSpPr/>
+          <p:nvPr/>
+        </p:nvSpPr>
+        <p:spPr>
+          <a:xfrm>
+            <a:off x="9381744" y="3200400"/>
+            <a:ext cx="1417320" cy="347472"/>
+          </a:xfrm>
+          <a:prstGeom prst="roundRect">
+            <a:avLst>
+              <a:gd name="adj" fmla="val 50000"/>
+            </a:avLst>
+          </a:prstGeom>
+          <a:solidFill>
+            <a:srgbClr val="FBE3E1"/>
+          </a:solidFill>
+          <a:ln>
+            <a:noFill/>
+          </a:ln>
+          <a:effectLst/>
+        </p:spPr>
+        <p:style>
+          <a:lnRef idx="1">
+            <a:schemeClr val="accent1"/>
+          </a:lnRef>
+          <a:fillRef idx="3">
+            <a:schemeClr val="accent1"/>
+          </a:fillRef>
+          <a:effectRef idx="2">
+            <a:schemeClr val="accent1"/>
+          </a:effectRef>
+          <a:fontRef idx="minor">
+            <a:schemeClr val="lt1"/>
+          </a:fontRef>
+        </p:style>
+        <p:txBody>
+          <a:bodyPr rtlCol="0" anchor="ctr"/>
+          <a:lstStyle/>
+          <a:p>
+            <a:pPr algn="ctr"/>
+            <a:r>
+              <a:rPr sz="1000" b="1" i="0">
+                <a:solidFill>
+                  <a:srgbClr val="0B2545"/>
+                </a:solidFill>
+                <a:latin typeface="Arial"/>
+              </a:rPr>
+              <a:t>REACQUIRE</a:t>
+            </a:r>
+          </a:p>
+        </p:txBody>
+      </p:sp>
+      <p:graphicFrame>
+        <p:nvGraphicFramePr>
+          <p:cNvPr id="17436" name="Chart 17435"/>
+          <p:cNvGraphicFramePr>
+            <a:graphicFrameLocks noGrp="1"/>
+          </p:cNvGraphicFramePr>
+          <p:nvPr/>
+        </p:nvGraphicFramePr>
+        <p:xfrm>
+          <a:off x="292608" y="3749039"/>
+          <a:ext cx="4526280" cy="2487168"/>
+        </p:xfrm>
+        <a:graphic>
+          <a:graphicData uri="http://schemas.openxmlformats.org/drawingml/2006/chart">
+            <c:chart xmlns:c="http://schemas.openxmlformats.org/drawingml/2006/chart" r:id="rId4"/>
+          </a:graphicData>
+        </a:graphic>
+      </p:graphicFrame>
+      <p:graphicFrame>
+        <p:nvGraphicFramePr>
+          <p:cNvPr id="17437" name="Chart 17436"/>
+          <p:cNvGraphicFramePr>
+            <a:graphicFrameLocks noGrp="1"/>
+          </p:cNvGraphicFramePr>
+          <p:nvPr/>
+        </p:nvGraphicFramePr>
+        <p:xfrm>
+          <a:off x="4983480" y="3749039"/>
+          <a:ext cx="3977639" cy="2487168"/>
+        </p:xfrm>
+        <a:graphic>
+          <a:graphicData uri="http://schemas.openxmlformats.org/drawingml/2006/chart">
+            <c:chart xmlns:c="http://schemas.openxmlformats.org/drawingml/2006/chart" r:id="rId5"/>
+          </a:graphicData>
+        </a:graphic>
+      </p:graphicFrame>
+      <p:sp>
+        <p:nvSpPr>
+          <p:cNvPr id="17438" name="Rounded Rectangle 17437"/>
+          <p:cNvSpPr/>
+          <p:nvPr/>
+        </p:nvSpPr>
+        <p:spPr>
+          <a:xfrm>
+            <a:off x="9125712" y="3749039"/>
+            <a:ext cx="2770632" cy="2487168"/>
+          </a:xfrm>
+          <a:prstGeom prst="roundRect">
+            <a:avLst>
+              <a:gd name="adj" fmla="val 6000"/>
+            </a:avLst>
+          </a:prstGeom>
+          <a:solidFill>
+            <a:srgbClr val="EFF3F7"/>
+          </a:solidFill>
+          <a:ln w="12700">
+            <a:solidFill>
+              <a:srgbClr val="D5DDE5"/>
+            </a:solidFill>
+          </a:ln>
+          <a:effectLst/>
+        </p:spPr>
+        <p:style>
+          <a:lnRef idx="1">
+            <a:schemeClr val="accent1"/>
+          </a:lnRef>
+          <a:fillRef idx="3">
+            <a:schemeClr val="accent1"/>
+          </a:fillRef>
+          <a:effectRef idx="2">
+            <a:schemeClr val="accent1"/>
+          </a:effectRef>
+          <a:fontRef idx="minor">
+            <a:schemeClr val="lt1"/>
+          </a:fontRef>
+        </p:style>
+        <p:txBody>
+          <a:bodyPr rtlCol="0" anchor="t" wrap="square" lIns="128016" rIns="109728" tIns="91440" bIns="73152"/>
+          <a:lstStyle/>
+          <a:p>
+            <a:pPr algn="l"/>
+            <a:r>
+              <a:rPr sz="1000" b="1" i="0">
+                <a:solidFill>
+                  <a:srgbClr val="5A6472"/>
+                </a:solidFill>
+                <a:latin typeface="Arial"/>
+              </a:rPr>
+              <a:t>BUILT WITH</a:t>
+            </a:r>
+          </a:p>
+          <a:p>
+            <a:pPr algn="l">
+              <a:spcBef>
+                <a:spcPts val="500"/>
+              </a:spcBef>
+            </a:pPr>
+            <a:r>
+              <a:rPr sz="1000" b="1" i="0">
+                <a:solidFill>
+                  <a:srgbClr val="0B2545"/>
+                </a:solidFill>
+                <a:latin typeface="Arial"/>
+              </a:rPr>
+              <a:t>Engine</a:t>
+            </a:r>
+          </a:p>
+          <a:p>
+            <a:pPr algn="l"/>
+            <a:r>
+              <a:rPr sz="950" b="0" i="0">
+                <a:solidFill>
+                  <a:srgbClr val="5A6472"/>
+                </a:solidFill>
+                <a:latin typeface="Arial"/>
+              </a:rPr>
+              <a:t>Python · NumPy · OpenCV</a:t>
+            </a:r>
+          </a:p>
+          <a:p>
+            <a:pPr algn="l">
+              <a:spcBef>
+                <a:spcPts val="500"/>
+              </a:spcBef>
+            </a:pPr>
+            <a:r>
+              <a:rPr sz="1000" b="1" i="0">
+                <a:solidFill>
+                  <a:srgbClr val="0B2545"/>
+                </a:solidFill>
+                <a:latin typeface="Arial"/>
+              </a:rPr>
+              <a:t>Web demo</a:t>
+            </a:r>
+          </a:p>
+          <a:p>
+            <a:pPr algn="l"/>
+            <a:r>
+              <a:rPr sz="950" b="0" i="0">
+                <a:solidFill>
+                  <a:srgbClr val="5A6472"/>
+                </a:solidFill>
+                <a:latin typeface="Arial"/>
+              </a:rPr>
+              <a:t>JavaScript · three.js · Web Serial</a:t>
+            </a:r>
+          </a:p>
+          <a:p>
+            <a:pPr algn="l">
+              <a:spcBef>
+                <a:spcPts val="500"/>
+              </a:spcBef>
+            </a:pPr>
+            <a:r>
+              <a:rPr sz="1000" b="1" i="0">
+                <a:solidFill>
+                  <a:srgbClr val="0B2545"/>
+                </a:solidFill>
+                <a:latin typeface="Arial"/>
+              </a:rPr>
+              <a:t>Hardware</a:t>
+            </a:r>
+          </a:p>
+          <a:p>
+            <a:pPr algn="l"/>
+            <a:r>
+              <a:rPr sz="950" b="0" i="0">
+                <a:solidFill>
+                  <a:srgbClr val="5A6472"/>
+                </a:solidFill>
+                <a:latin typeface="Arial"/>
+              </a:rPr>
+              <a:t>Arduino Nano · A4988 · AS5600</a:t>
+            </a:r>
+          </a:p>
+          <a:p>
+            <a:pPr algn="l">
+              <a:spcBef>
+                <a:spcPts val="500"/>
+              </a:spcBef>
+            </a:pPr>
+            <a:r>
+              <a:rPr sz="1000" b="1" i="0">
+                <a:solidFill>
+                  <a:srgbClr val="0B2545"/>
+                </a:solidFill>
+                <a:latin typeface="Arial"/>
+              </a:rPr>
+              <a:t>Proof</a:t>
+            </a:r>
+          </a:p>
+          <a:p>
+            <a:pPr algn="l"/>
+            <a:r>
+              <a:rPr sz="950" b="0" i="0">
+                <a:solidFill>
+                  <a:srgbClr val="5A6472"/>
+                </a:solidFill>
+                <a:latin typeface="Arial"/>
+              </a:rPr>
+              <a:t>pytest · 250 tests · GitHub Actions</a:t>
+            </a:r>
+          </a:p>
+          <a:p>
+            <a:pPr algn="l">
+              <a:spcBef>
+                <a:spcPts val="500"/>
+              </a:spcBef>
+            </a:pPr>
+            <a:r>
+              <a:rPr sz="1000" b="1" i="0">
+                <a:solidFill>
+                  <a:srgbClr val="0B2545"/>
+                </a:solidFill>
+                <a:latin typeface="Arial"/>
+              </a:rPr>
+              <a:t>Acquisition</a:t>
+            </a:r>
+          </a:p>
+          <a:p>
+            <a:pPr algn="l"/>
+            <a:r>
+              <a:rPr sz="950" b="0" i="0">
+                <a:solidFill>
+                  <a:srgbClr val="5A6472"/>
+                </a:solidFill>
+                <a:latin typeface="Arial"/>
+              </a:rPr>
+              <a:t>0.55–1.1 s in the live demo</a:t>
+            </a:r>
+          </a:p>
+        </p:txBody>
+      </p:sp>
     </p:spTree>
   </p:cSld>
   <p:clrMapOvr>
@@ -9500,7 +13691,7 @@
                 </a:solidFill>
                 <a:latin typeface="Arial"/>
               </a:rPr>
-              <a:t>5,500+ documented lines · 83 automated tests · 6 validated scenarios · Monte-Carlo logs · technical report · user manual · demo video.</a:t>
+              <a:t>5,500+ documented lines · 250 passing tests · 6 validated scenarios · Monte-Carlo logs · technical report · user manual · demo video.</a:t>
             </a:r>
           </a:p>
           <a:p>
@@ -10668,19 +14859,24 @@
             <p:ph type="title"/>
           </p:nvPr>
         </p:nvSpPr>
-        <p:spPr/>
-        <p:txBody>
-          <a:bodyPr/>
-          <a:lstStyle/>
-          <a:p>
-            <a:r>
-              <a:rPr sz="2600" b="1" i="0">
+        <p:spPr>
+          <a:xfrm>
+            <a:off x="1783080" y="274320"/>
+            <a:ext cx="7863840" cy="731520"/>
+          </a:xfrm>
+        </p:spPr>
+        <p:txBody>
+          <a:bodyPr anchor="ctr" wrap="square"/>
+          <a:lstStyle/>
+          <a:p>
+            <a:r>
+              <a:rPr sz="2400" b="1" i="0">
                 <a:solidFill>
                   <a:srgbClr val="0B2545"/>
                 </a:solidFill>
                 <a:latin typeface="Arial"/>
               </a:rPr>
-              <a:t>Compliance with PS26169 — their table, our values</a:t>
+              <a:t>PS26169 compliance: their table, our values</a:t>
             </a:r>
           </a:p>
         </p:txBody>
@@ -10829,7 +15025,7 @@
           <p:nvPr/>
         </p:nvPicPr>
         <p:blipFill>
-          <a:blip r:embed="rId3">
+          <a:blip r:embed="rId2">
             <a:extLst>
               <a:ext uri="{28A0092B-C50C-407E-A947-70E740481C1C}">
                 <a14:useLocalDpi xmlns:a14="http://schemas.microsoft.com/office/drawing/2010/main" val="0"/>
@@ -10850,33 +15046,9 @@
           </a:prstGeom>
         </p:spPr>
       </p:pic>
-      <p:pic>
-        <p:nvPicPr>
-          <p:cNvPr id="17411" name="Picture 17410" descr="c3_all.jpg"/>
-          <p:cNvPicPr>
-            <a:picLocks noChangeAspect="1"/>
-          </p:cNvPicPr>
-          <p:nvPr/>
-        </p:nvPicPr>
-        <p:blipFill>
-          <a:blip r:embed="rId4"/>
-          <a:stretch>
-            <a:fillRect/>
-          </a:stretch>
-        </p:blipFill>
-        <p:spPr>
-          <a:xfrm>
-            <a:off x="1097280" y="1572768"/>
-            <a:ext cx="10003536" cy="4725835"/>
-          </a:xfrm>
-          <a:prstGeom prst="rect">
-            <a:avLst/>
-          </a:prstGeom>
-        </p:spPr>
-      </p:pic>
-      <p:sp>
-        <p:nvSpPr>
-          <p:cNvPr id="17412" name="Rounded Rectangle 17411"/>
+      <p:sp>
+        <p:nvSpPr>
+          <p:cNvPr id="17410" name="Rounded Rectangle 17409"/>
           <p:cNvSpPr/>
           <p:nvPr/>
         </p:nvSpPr>
@@ -10922,14 +15094,82 @@
       </p:sp>
       <p:sp>
         <p:nvSpPr>
+          <p:cNvPr id="17411" name="TextBox 17410"/>
+          <p:cNvSpPr txBox="1"/>
+          <p:nvPr/>
+        </p:nvSpPr>
+        <p:spPr>
+          <a:xfrm>
+            <a:off x="676656" y="1517904"/>
+            <a:ext cx="3977639" cy="297180"/>
+          </a:xfrm>
+          <a:prstGeom prst="rect">
+            <a:avLst/>
+          </a:prstGeom>
+          <a:noFill/>
+        </p:spPr>
+        <p:txBody>
+          <a:bodyPr wrap="square" anchor="ctr" lIns="0" rIns="0" tIns="0" bIns="0">
+            <a:spAutoFit/>
+          </a:bodyPr>
+          <a:lstStyle/>
+          <a:p>
+            <a:r>
+              <a:rPr sz="1000" b="1" i="0">
+                <a:solidFill>
+                  <a:srgbClr val="FFFFFF"/>
+                </a:solidFill>
+                <a:latin typeface="Arial"/>
+              </a:rPr>
+              <a:t>PS26169 PARAMETER</a:t>
+            </a:r>
+          </a:p>
+        </p:txBody>
+      </p:sp>
+      <p:sp>
+        <p:nvSpPr>
+          <p:cNvPr id="17412" name="TextBox 17411"/>
+          <p:cNvSpPr txBox="1"/>
+          <p:nvPr/>
+        </p:nvSpPr>
+        <p:spPr>
+          <a:xfrm>
+            <a:off x="4654296" y="1517904"/>
+            <a:ext cx="3520440" cy="297180"/>
+          </a:xfrm>
+          <a:prstGeom prst="rect">
+            <a:avLst/>
+          </a:prstGeom>
+          <a:noFill/>
+        </p:spPr>
+        <p:txBody>
+          <a:bodyPr wrap="square" anchor="ctr" lIns="0" rIns="0" tIns="0" bIns="0">
+            <a:spAutoFit/>
+          </a:bodyPr>
+          <a:lstStyle/>
+          <a:p>
+            <a:r>
+              <a:rPr sz="1000" b="1" i="0">
+                <a:solidFill>
+                  <a:srgbClr val="FFFFFF"/>
+                </a:solidFill>
+                <a:latin typeface="Arial"/>
+              </a:rPr>
+              <a:t>SPECIFIED</a:t>
+            </a:r>
+          </a:p>
+        </p:txBody>
+      </p:sp>
+      <p:sp>
+        <p:nvSpPr>
           <p:cNvPr id="17413" name="TextBox 17412"/>
           <p:cNvSpPr txBox="1"/>
           <p:nvPr/>
         </p:nvSpPr>
         <p:spPr>
           <a:xfrm>
-            <a:off x="676656" y="1517904"/>
-            <a:ext cx="3977639" cy="297180"/>
+            <a:off x="8174736" y="1517904"/>
+            <a:ext cx="3246120" cy="297180"/>
           </a:xfrm>
           <a:prstGeom prst="rect">
             <a:avLst/>
@@ -10949,7 +15189,7 @@
                 </a:solidFill>
                 <a:latin typeface="Arial"/>
               </a:rPr>
-              <a:t>PS26169 PARAMETER</a:t>
+              <a:t>ZERODRIFT</a:t>
             </a:r>
           </a:p>
         </p:txBody>
@@ -10962,8 +15202,8 @@
         </p:nvSpPr>
         <p:spPr>
           <a:xfrm>
-            <a:off x="4654296" y="1517904"/>
-            <a:ext cx="3520440" cy="297180"/>
+            <a:off x="11420855" y="1517904"/>
+            <a:ext cx="320040" cy="297180"/>
           </a:xfrm>
           <a:prstGeom prst="rect">
             <a:avLst/>
@@ -10983,74 +15223,6 @@
                 </a:solidFill>
                 <a:latin typeface="Arial"/>
               </a:rPr>
-              <a:t>SPECIFIED</a:t>
-            </a:r>
-          </a:p>
-        </p:txBody>
-      </p:sp>
-      <p:sp>
-        <p:nvSpPr>
-          <p:cNvPr id="17415" name="TextBox 17414"/>
-          <p:cNvSpPr txBox="1"/>
-          <p:nvPr/>
-        </p:nvSpPr>
-        <p:spPr>
-          <a:xfrm>
-            <a:off x="8174736" y="1517904"/>
-            <a:ext cx="3246120" cy="297180"/>
-          </a:xfrm>
-          <a:prstGeom prst="rect">
-            <a:avLst/>
-          </a:prstGeom>
-          <a:noFill/>
-        </p:spPr>
-        <p:txBody>
-          <a:bodyPr wrap="square" anchor="ctr" lIns="0" rIns="0" tIns="0" bIns="0">
-            <a:spAutoFit/>
-          </a:bodyPr>
-          <a:lstStyle/>
-          <a:p>
-            <a:r>
-              <a:rPr sz="1000" b="1" i="0">
-                <a:solidFill>
-                  <a:srgbClr val="FFFFFF"/>
-                </a:solidFill>
-                <a:latin typeface="Arial"/>
-              </a:rPr>
-              <a:t>ZERODRIFT</a:t>
-            </a:r>
-          </a:p>
-        </p:txBody>
-      </p:sp>
-      <p:sp>
-        <p:nvSpPr>
-          <p:cNvPr id="17416" name="TextBox 17415"/>
-          <p:cNvSpPr txBox="1"/>
-          <p:nvPr/>
-        </p:nvSpPr>
-        <p:spPr>
-          <a:xfrm>
-            <a:off x="11420855" y="1517904"/>
-            <a:ext cx="320040" cy="297180"/>
-          </a:xfrm>
-          <a:prstGeom prst="rect">
-            <a:avLst/>
-          </a:prstGeom>
-          <a:noFill/>
-        </p:spPr>
-        <p:txBody>
-          <a:bodyPr wrap="square" anchor="ctr" lIns="0" rIns="0" tIns="0" bIns="0">
-            <a:spAutoFit/>
-          </a:bodyPr>
-          <a:lstStyle/>
-          <a:p>
-            <a:r>
-              <a:rPr sz="1000" b="1" i="0">
-                <a:solidFill>
-                  <a:srgbClr val="FFFFFF"/>
-                </a:solidFill>
-                <a:latin typeface="Arial"/>
-              </a:rPr>
               <a:t/>
             </a:r>
           </a:p>
@@ -11058,7 +15230,7 @@
       </p:sp>
       <p:sp>
         <p:nvSpPr>
-          <p:cNvPr id="17417" name="Rounded Rectangle 17416"/>
+          <p:cNvPr id="17415" name="Rounded Rectangle 17414"/>
           <p:cNvSpPr/>
           <p:nvPr/>
         </p:nvSpPr>
@@ -11104,14 +15276,82 @@
       </p:sp>
       <p:sp>
         <p:nvSpPr>
+          <p:cNvPr id="17416" name="TextBox 17415"/>
+          <p:cNvSpPr txBox="1"/>
+          <p:nvPr/>
+        </p:nvSpPr>
+        <p:spPr>
+          <a:xfrm>
+            <a:off x="676656" y="1815084"/>
+            <a:ext cx="3977639" cy="297180"/>
+          </a:xfrm>
+          <a:prstGeom prst="rect">
+            <a:avLst/>
+          </a:prstGeom>
+          <a:noFill/>
+        </p:spPr>
+        <p:txBody>
+          <a:bodyPr wrap="square" anchor="ctr" lIns="0" rIns="0" tIns="0" bIns="0">
+            <a:spAutoFit/>
+          </a:bodyPr>
+          <a:lstStyle/>
+          <a:p>
+            <a:r>
+              <a:rPr sz="950" b="0" i="0">
+                <a:solidFill>
+                  <a:srgbClr val="0B2545"/>
+                </a:solidFill>
+                <a:latin typeface="Arial"/>
+              </a:rPr>
+              <a:t>Camera resolution</a:t>
+            </a:r>
+          </a:p>
+        </p:txBody>
+      </p:sp>
+      <p:sp>
+        <p:nvSpPr>
+          <p:cNvPr id="17417" name="TextBox 17416"/>
+          <p:cNvSpPr txBox="1"/>
+          <p:nvPr/>
+        </p:nvSpPr>
+        <p:spPr>
+          <a:xfrm>
+            <a:off x="4654296" y="1815084"/>
+            <a:ext cx="3520440" cy="297180"/>
+          </a:xfrm>
+          <a:prstGeom prst="rect">
+            <a:avLst/>
+          </a:prstGeom>
+          <a:noFill/>
+        </p:spPr>
+        <p:txBody>
+          <a:bodyPr wrap="square" anchor="ctr" lIns="0" rIns="0" tIns="0" bIns="0">
+            <a:spAutoFit/>
+          </a:bodyPr>
+          <a:lstStyle/>
+          <a:p>
+            <a:r>
+              <a:rPr sz="950" b="0" i="0">
+                <a:solidFill>
+                  <a:srgbClr val="0B2545"/>
+                </a:solidFill>
+                <a:latin typeface="Arial"/>
+              </a:rPr>
+              <a:t>640 x 480</a:t>
+            </a:r>
+          </a:p>
+        </p:txBody>
+      </p:sp>
+      <p:sp>
+        <p:nvSpPr>
           <p:cNvPr id="17418" name="TextBox 17417"/>
           <p:cNvSpPr txBox="1"/>
           <p:nvPr/>
         </p:nvSpPr>
         <p:spPr>
           <a:xfrm>
-            <a:off x="676656" y="1815084"/>
-            <a:ext cx="3977639" cy="297180"/>
+            <a:off x="8174736" y="1815084"/>
+            <a:ext cx="3246120" cy="297180"/>
           </a:xfrm>
           <a:prstGeom prst="rect">
             <a:avLst/>
@@ -11125,13 +15365,13 @@
           <a:lstStyle/>
           <a:p>
             <a:r>
-              <a:rPr sz="950" b="0" i="0">
+              <a:rPr sz="950" b="1" i="0">
                 <a:solidFill>
                   <a:srgbClr val="0B2545"/>
                 </a:solidFill>
                 <a:latin typeface="Arial"/>
               </a:rPr>
-              <a:t>Camera resolution</a:t>
+              <a:t>640 x 480</a:t>
             </a:r>
           </a:p>
         </p:txBody>
@@ -11144,8 +15384,8 @@
         </p:nvSpPr>
         <p:spPr>
           <a:xfrm>
-            <a:off x="4654296" y="1815084"/>
-            <a:ext cx="3520440" cy="297180"/>
+            <a:off x="11420855" y="1815084"/>
+            <a:ext cx="320040" cy="297180"/>
           </a:xfrm>
           <a:prstGeom prst="rect">
             <a:avLst/>
@@ -11158,14 +15398,15 @@
           </a:bodyPr>
           <a:lstStyle/>
           <a:p>
-            <a:r>
-              <a:rPr sz="950" b="0" i="0">
-                <a:solidFill>
-                  <a:srgbClr val="0B2545"/>
-                </a:solidFill>
-                <a:latin typeface="Arial"/>
-              </a:rPr>
-              <a:t>640 x 480</a:t>
+            <a:pPr algn="ctr"/>
+            <a:r>
+              <a:rPr sz="1100" b="1" i="0">
+                <a:solidFill>
+                  <a:srgbClr val="1F8A5B"/>
+                </a:solidFill>
+                <a:latin typeface="Arial"/>
+              </a:rPr>
+              <a:t>✓</a:t>
             </a:r>
           </a:p>
         </p:txBody>
@@ -11178,8 +15419,8 @@
         </p:nvSpPr>
         <p:spPr>
           <a:xfrm>
-            <a:off x="8174736" y="1815084"/>
-            <a:ext cx="3246120" cy="297180"/>
+            <a:off x="676656" y="2112264"/>
+            <a:ext cx="3977639" cy="297180"/>
           </a:xfrm>
           <a:prstGeom prst="rect">
             <a:avLst/>
@@ -11193,13 +15434,13 @@
           <a:lstStyle/>
           <a:p>
             <a:r>
-              <a:rPr sz="950" b="1" i="0">
+              <a:rPr sz="950" b="0" i="0">
                 <a:solidFill>
                   <a:srgbClr val="0B2545"/>
                 </a:solidFill>
                 <a:latin typeface="Arial"/>
               </a:rPr>
-              <a:t>640 x 480</a:t>
+              <a:t>Camera FOV</a:t>
             </a:r>
           </a:p>
         </p:txBody>
@@ -11212,8 +15453,8 @@
         </p:nvSpPr>
         <p:spPr>
           <a:xfrm>
-            <a:off x="11420855" y="1815084"/>
-            <a:ext cx="320040" cy="297180"/>
+            <a:off x="4654296" y="2112264"/>
+            <a:ext cx="3520440" cy="297180"/>
           </a:xfrm>
           <a:prstGeom prst="rect">
             <a:avLst/>
@@ -11226,15 +15467,14 @@
           </a:bodyPr>
           <a:lstStyle/>
           <a:p>
-            <a:pPr algn="ctr"/>
-            <a:r>
-              <a:rPr sz="1100" b="1" i="0">
-                <a:solidFill>
-                  <a:srgbClr val="1F8A5B"/>
-                </a:solidFill>
-                <a:latin typeface="Arial"/>
-              </a:rPr>
-              <a:t>✓</a:t>
+            <a:r>
+              <a:rPr sz="950" b="0" i="0">
+                <a:solidFill>
+                  <a:srgbClr val="0B2545"/>
+                </a:solidFill>
+                <a:latin typeface="Arial"/>
+              </a:rPr>
+              <a:t>4° x 3° default</a:t>
             </a:r>
           </a:p>
         </p:txBody>
@@ -11247,8 +15487,8 @@
         </p:nvSpPr>
         <p:spPr>
           <a:xfrm>
-            <a:off x="676656" y="2112264"/>
-            <a:ext cx="3977639" cy="297180"/>
+            <a:off x="8174736" y="2112264"/>
+            <a:ext cx="3246120" cy="297180"/>
           </a:xfrm>
           <a:prstGeom prst="rect">
             <a:avLst/>
@@ -11262,13 +15502,13 @@
           <a:lstStyle/>
           <a:p>
             <a:r>
-              <a:rPr sz="950" b="0" i="0">
+              <a:rPr sz="950" b="1" i="0">
                 <a:solidFill>
                   <a:srgbClr val="0B2545"/>
                 </a:solidFill>
                 <a:latin typeface="Arial"/>
               </a:rPr>
-              <a:t>Camera FOV</a:t>
+              <a:t>4° x 3°</a:t>
             </a:r>
           </a:p>
         </p:txBody>
@@ -11281,8 +15521,8 @@
         </p:nvSpPr>
         <p:spPr>
           <a:xfrm>
-            <a:off x="4654296" y="2112264"/>
-            <a:ext cx="3520440" cy="297180"/>
+            <a:off x="11420855" y="2112264"/>
+            <a:ext cx="320040" cy="297180"/>
           </a:xfrm>
           <a:prstGeom prst="rect">
             <a:avLst/>
@@ -11295,74 +15535,6 @@
           </a:bodyPr>
           <a:lstStyle/>
           <a:p>
-            <a:r>
-              <a:rPr sz="950" b="0" i="0">
-                <a:solidFill>
-                  <a:srgbClr val="0B2545"/>
-                </a:solidFill>
-                <a:latin typeface="Arial"/>
-              </a:rPr>
-              <a:t>4° x 3° default</a:t>
-            </a:r>
-          </a:p>
-        </p:txBody>
-      </p:sp>
-      <p:sp>
-        <p:nvSpPr>
-          <p:cNvPr id="17424" name="TextBox 17423"/>
-          <p:cNvSpPr txBox="1"/>
-          <p:nvPr/>
-        </p:nvSpPr>
-        <p:spPr>
-          <a:xfrm>
-            <a:off x="8174736" y="2112264"/>
-            <a:ext cx="3246120" cy="297180"/>
-          </a:xfrm>
-          <a:prstGeom prst="rect">
-            <a:avLst/>
-          </a:prstGeom>
-          <a:noFill/>
-        </p:spPr>
-        <p:txBody>
-          <a:bodyPr wrap="square" anchor="ctr" lIns="0" rIns="0" tIns="0" bIns="0">
-            <a:spAutoFit/>
-          </a:bodyPr>
-          <a:lstStyle/>
-          <a:p>
-            <a:r>
-              <a:rPr sz="950" b="1" i="0">
-                <a:solidFill>
-                  <a:srgbClr val="0B2545"/>
-                </a:solidFill>
-                <a:latin typeface="Arial"/>
-              </a:rPr>
-              <a:t>4° x 3°</a:t>
-            </a:r>
-          </a:p>
-        </p:txBody>
-      </p:sp>
-      <p:sp>
-        <p:nvSpPr>
-          <p:cNvPr id="17425" name="TextBox 17424"/>
-          <p:cNvSpPr txBox="1"/>
-          <p:nvPr/>
-        </p:nvSpPr>
-        <p:spPr>
-          <a:xfrm>
-            <a:off x="11420855" y="2112264"/>
-            <a:ext cx="320040" cy="297180"/>
-          </a:xfrm>
-          <a:prstGeom prst="rect">
-            <a:avLst/>
-          </a:prstGeom>
-          <a:noFill/>
-        </p:spPr>
-        <p:txBody>
-          <a:bodyPr wrap="square" anchor="ctr" lIns="0" rIns="0" tIns="0" bIns="0">
-            <a:spAutoFit/>
-          </a:bodyPr>
-          <a:lstStyle/>
-          <a:p>
             <a:pPr algn="ctr"/>
             <a:r>
               <a:rPr sz="1100" b="1" i="0">
@@ -11378,7 +15550,7 @@
       </p:sp>
       <p:sp>
         <p:nvSpPr>
-          <p:cNvPr id="17426" name="Rounded Rectangle 17425"/>
+          <p:cNvPr id="17424" name="Rounded Rectangle 17423"/>
           <p:cNvSpPr/>
           <p:nvPr/>
         </p:nvSpPr>
@@ -11424,14 +15596,82 @@
       </p:sp>
       <p:sp>
         <p:nvSpPr>
+          <p:cNvPr id="17425" name="TextBox 17424"/>
+          <p:cNvSpPr txBox="1"/>
+          <p:nvPr/>
+        </p:nvSpPr>
+        <p:spPr>
+          <a:xfrm>
+            <a:off x="676656" y="2409444"/>
+            <a:ext cx="3977639" cy="297180"/>
+          </a:xfrm>
+          <a:prstGeom prst="rect">
+            <a:avLst/>
+          </a:prstGeom>
+          <a:noFill/>
+        </p:spPr>
+        <p:txBody>
+          <a:bodyPr wrap="square" anchor="ctr" lIns="0" rIns="0" tIns="0" bIns="0">
+            <a:spAutoFit/>
+          </a:bodyPr>
+          <a:lstStyle/>
+          <a:p>
+            <a:r>
+              <a:rPr sz="950" b="0" i="0">
+                <a:solidFill>
+                  <a:srgbClr val="0B2545"/>
+                </a:solidFill>
+                <a:latin typeface="Arial"/>
+              </a:rPr>
+              <a:t>Camera update rate</a:t>
+            </a:r>
+          </a:p>
+        </p:txBody>
+      </p:sp>
+      <p:sp>
+        <p:nvSpPr>
+          <p:cNvPr id="17426" name="TextBox 17425"/>
+          <p:cNvSpPr txBox="1"/>
+          <p:nvPr/>
+        </p:nvSpPr>
+        <p:spPr>
+          <a:xfrm>
+            <a:off x="4654296" y="2409444"/>
+            <a:ext cx="3520440" cy="297180"/>
+          </a:xfrm>
+          <a:prstGeom prst="rect">
+            <a:avLst/>
+          </a:prstGeom>
+          <a:noFill/>
+        </p:spPr>
+        <p:txBody>
+          <a:bodyPr wrap="square" anchor="ctr" lIns="0" rIns="0" tIns="0" bIns="0">
+            <a:spAutoFit/>
+          </a:bodyPr>
+          <a:lstStyle/>
+          <a:p>
+            <a:r>
+              <a:rPr sz="950" b="0" i="0">
+                <a:solidFill>
+                  <a:srgbClr val="0B2545"/>
+                </a:solidFill>
+                <a:latin typeface="Arial"/>
+              </a:rPr>
+              <a:t>≥ 30 Hz</a:t>
+            </a:r>
+          </a:p>
+        </p:txBody>
+      </p:sp>
+      <p:sp>
+        <p:nvSpPr>
           <p:cNvPr id="17427" name="TextBox 17426"/>
           <p:cNvSpPr txBox="1"/>
           <p:nvPr/>
         </p:nvSpPr>
         <p:spPr>
           <a:xfrm>
-            <a:off x="676656" y="2409444"/>
-            <a:ext cx="3977639" cy="297180"/>
+            <a:off x="8174736" y="2409444"/>
+            <a:ext cx="3246120" cy="297180"/>
           </a:xfrm>
           <a:prstGeom prst="rect">
             <a:avLst/>
@@ -11445,13 +15685,13 @@
           <a:lstStyle/>
           <a:p>
             <a:r>
-              <a:rPr sz="950" b="0" i="0">
+              <a:rPr sz="950" b="1" i="0">
                 <a:solidFill>
                   <a:srgbClr val="0B2545"/>
                 </a:solidFill>
                 <a:latin typeface="Arial"/>
               </a:rPr>
-              <a:t>Camera update rate</a:t>
+              <a:t>30 Hz</a:t>
             </a:r>
           </a:p>
         </p:txBody>
@@ -11464,8 +15704,8 @@
         </p:nvSpPr>
         <p:spPr>
           <a:xfrm>
-            <a:off x="4654296" y="2409444"/>
-            <a:ext cx="3520440" cy="297180"/>
+            <a:off x="11420855" y="2409444"/>
+            <a:ext cx="320040" cy="297180"/>
           </a:xfrm>
           <a:prstGeom prst="rect">
             <a:avLst/>
@@ -11478,14 +15718,15 @@
           </a:bodyPr>
           <a:lstStyle/>
           <a:p>
-            <a:r>
-              <a:rPr sz="950" b="0" i="0">
-                <a:solidFill>
-                  <a:srgbClr val="0B2545"/>
-                </a:solidFill>
-                <a:latin typeface="Arial"/>
-              </a:rPr>
-              <a:t>≥ 30 Hz</a:t>
+            <a:pPr algn="ctr"/>
+            <a:r>
+              <a:rPr sz="1100" b="1" i="0">
+                <a:solidFill>
+                  <a:srgbClr val="1F8A5B"/>
+                </a:solidFill>
+                <a:latin typeface="Arial"/>
+              </a:rPr>
+              <a:t>✓</a:t>
             </a:r>
           </a:p>
         </p:txBody>
@@ -11498,8 +15739,8 @@
         </p:nvSpPr>
         <p:spPr>
           <a:xfrm>
-            <a:off x="8174736" y="2409444"/>
-            <a:ext cx="3246120" cy="297180"/>
+            <a:off x="676656" y="2706624"/>
+            <a:ext cx="3977639" cy="297180"/>
           </a:xfrm>
           <a:prstGeom prst="rect">
             <a:avLst/>
@@ -11513,13 +15754,13 @@
           <a:lstStyle/>
           <a:p>
             <a:r>
-              <a:rPr sz="950" b="1" i="0">
+              <a:rPr sz="950" b="0" i="0">
                 <a:solidFill>
                   <a:srgbClr val="0B2545"/>
                 </a:solidFill>
                 <a:latin typeface="Arial"/>
               </a:rPr>
-              <a:t>30 Hz</a:t>
+              <a:t>Max pan / tilt speed</a:t>
             </a:r>
           </a:p>
         </p:txBody>
@@ -11532,8 +15773,8 @@
         </p:nvSpPr>
         <p:spPr>
           <a:xfrm>
-            <a:off x="11420855" y="2409444"/>
-            <a:ext cx="320040" cy="297180"/>
+            <a:off x="4654296" y="2706624"/>
+            <a:ext cx="3520440" cy="297180"/>
           </a:xfrm>
           <a:prstGeom prst="rect">
             <a:avLst/>
@@ -11546,15 +15787,14 @@
           </a:bodyPr>
           <a:lstStyle/>
           <a:p>
-            <a:pPr algn="ctr"/>
-            <a:r>
-              <a:rPr sz="1100" b="1" i="0">
-                <a:solidFill>
-                  <a:srgbClr val="1F8A5B"/>
-                </a:solidFill>
-                <a:latin typeface="Arial"/>
-              </a:rPr>
-              <a:t>✓</a:t>
+            <a:r>
+              <a:rPr sz="950" b="0" i="0">
+                <a:solidFill>
+                  <a:srgbClr val="0B2545"/>
+                </a:solidFill>
+                <a:latin typeface="Arial"/>
+              </a:rPr>
+              <a:t>5-10°/s, default 5</a:t>
             </a:r>
           </a:p>
         </p:txBody>
@@ -11567,8 +15807,8 @@
         </p:nvSpPr>
         <p:spPr>
           <a:xfrm>
-            <a:off x="676656" y="2706624"/>
-            <a:ext cx="3977639" cy="297180"/>
+            <a:off x="8174736" y="2706624"/>
+            <a:ext cx="3246120" cy="297180"/>
           </a:xfrm>
           <a:prstGeom prst="rect">
             <a:avLst/>
@@ -11582,13 +15822,13 @@
           <a:lstStyle/>
           <a:p>
             <a:r>
-              <a:rPr sz="950" b="0" i="0">
+              <a:rPr sz="950" b="1" i="0">
                 <a:solidFill>
                   <a:srgbClr val="0B2545"/>
                 </a:solidFill>
                 <a:latin typeface="Arial"/>
               </a:rPr>
-              <a:t>Max pan / tilt speed</a:t>
+              <a:t>5°/s</a:t>
             </a:r>
           </a:p>
         </p:txBody>
@@ -11601,8 +15841,8 @@
         </p:nvSpPr>
         <p:spPr>
           <a:xfrm>
-            <a:off x="4654296" y="2706624"/>
-            <a:ext cx="3520440" cy="297180"/>
+            <a:off x="11420855" y="2706624"/>
+            <a:ext cx="320040" cy="297180"/>
           </a:xfrm>
           <a:prstGeom prst="rect">
             <a:avLst/>
@@ -11615,74 +15855,6 @@
           </a:bodyPr>
           <a:lstStyle/>
           <a:p>
-            <a:r>
-              <a:rPr sz="950" b="0" i="0">
-                <a:solidFill>
-                  <a:srgbClr val="0B2545"/>
-                </a:solidFill>
-                <a:latin typeface="Arial"/>
-              </a:rPr>
-              <a:t>5-10°/s, default 5</a:t>
-            </a:r>
-          </a:p>
-        </p:txBody>
-      </p:sp>
-      <p:sp>
-        <p:nvSpPr>
-          <p:cNvPr id="17433" name="TextBox 17432"/>
-          <p:cNvSpPr txBox="1"/>
-          <p:nvPr/>
-        </p:nvSpPr>
-        <p:spPr>
-          <a:xfrm>
-            <a:off x="8174736" y="2706624"/>
-            <a:ext cx="3246120" cy="297180"/>
-          </a:xfrm>
-          <a:prstGeom prst="rect">
-            <a:avLst/>
-          </a:prstGeom>
-          <a:noFill/>
-        </p:spPr>
-        <p:txBody>
-          <a:bodyPr wrap="square" anchor="ctr" lIns="0" rIns="0" tIns="0" bIns="0">
-            <a:spAutoFit/>
-          </a:bodyPr>
-          <a:lstStyle/>
-          <a:p>
-            <a:r>
-              <a:rPr sz="950" b="1" i="0">
-                <a:solidFill>
-                  <a:srgbClr val="0B2545"/>
-                </a:solidFill>
-                <a:latin typeface="Arial"/>
-              </a:rPr>
-              <a:t>5°/s</a:t>
-            </a:r>
-          </a:p>
-        </p:txBody>
-      </p:sp>
-      <p:sp>
-        <p:nvSpPr>
-          <p:cNvPr id="17434" name="TextBox 17433"/>
-          <p:cNvSpPr txBox="1"/>
-          <p:nvPr/>
-        </p:nvSpPr>
-        <p:spPr>
-          <a:xfrm>
-            <a:off x="11420855" y="2706624"/>
-            <a:ext cx="320040" cy="297180"/>
-          </a:xfrm>
-          <a:prstGeom prst="rect">
-            <a:avLst/>
-          </a:prstGeom>
-          <a:noFill/>
-        </p:spPr>
-        <p:txBody>
-          <a:bodyPr wrap="square" anchor="ctr" lIns="0" rIns="0" tIns="0" bIns="0">
-            <a:spAutoFit/>
-          </a:bodyPr>
-          <a:lstStyle/>
-          <a:p>
             <a:pPr algn="ctr"/>
             <a:r>
               <a:rPr sz="1100" b="1" i="0">
@@ -11698,7 +15870,7 @@
       </p:sp>
       <p:sp>
         <p:nvSpPr>
-          <p:cNvPr id="17435" name="Rounded Rectangle 17434"/>
+          <p:cNvPr id="17433" name="Rounded Rectangle 17432"/>
           <p:cNvSpPr/>
           <p:nvPr/>
         </p:nvSpPr>
@@ -11744,14 +15916,82 @@
       </p:sp>
       <p:sp>
         <p:nvSpPr>
+          <p:cNvPr id="17434" name="TextBox 17433"/>
+          <p:cNvSpPr txBox="1"/>
+          <p:nvPr/>
+        </p:nvSpPr>
+        <p:spPr>
+          <a:xfrm>
+            <a:off x="676656" y="3003804"/>
+            <a:ext cx="3977639" cy="297180"/>
+          </a:xfrm>
+          <a:prstGeom prst="rect">
+            <a:avLst/>
+          </a:prstGeom>
+          <a:noFill/>
+        </p:spPr>
+        <p:txBody>
+          <a:bodyPr wrap="square" anchor="ctr" lIns="0" rIns="0" tIns="0" bIns="0">
+            <a:spAutoFit/>
+          </a:bodyPr>
+          <a:lstStyle/>
+          <a:p>
+            <a:r>
+              <a:rPr sz="950" b="0" i="0">
+                <a:solidFill>
+                  <a:srgbClr val="0B2545"/>
+                </a:solidFill>
+                <a:latin typeface="Arial"/>
+              </a:rPr>
+              <a:t>Target shape / size</a:t>
+            </a:r>
+          </a:p>
+        </p:txBody>
+      </p:sp>
+      <p:sp>
+        <p:nvSpPr>
+          <p:cNvPr id="17435" name="TextBox 17434"/>
+          <p:cNvSpPr txBox="1"/>
+          <p:nvPr/>
+        </p:nvSpPr>
+        <p:spPr>
+          <a:xfrm>
+            <a:off x="4654296" y="3003804"/>
+            <a:ext cx="3520440" cy="297180"/>
+          </a:xfrm>
+          <a:prstGeom prst="rect">
+            <a:avLst/>
+          </a:prstGeom>
+          <a:noFill/>
+        </p:spPr>
+        <p:txBody>
+          <a:bodyPr wrap="square" anchor="ctr" lIns="0" rIns="0" tIns="0" bIns="0">
+            <a:spAutoFit/>
+          </a:bodyPr>
+          <a:lstStyle/>
+          <a:p>
+            <a:r>
+              <a:rPr sz="950" b="0" i="0">
+                <a:solidFill>
+                  <a:srgbClr val="0B2545"/>
+                </a:solidFill>
+                <a:latin typeface="Arial"/>
+              </a:rPr>
+              <a:t>square, 10 x 10 px</a:t>
+            </a:r>
+          </a:p>
+        </p:txBody>
+      </p:sp>
+      <p:sp>
+        <p:nvSpPr>
           <p:cNvPr id="17436" name="TextBox 17435"/>
           <p:cNvSpPr txBox="1"/>
           <p:nvPr/>
         </p:nvSpPr>
         <p:spPr>
           <a:xfrm>
-            <a:off x="676656" y="3003804"/>
-            <a:ext cx="3977639" cy="297180"/>
+            <a:off x="8174736" y="3003804"/>
+            <a:ext cx="3246120" cy="297180"/>
           </a:xfrm>
           <a:prstGeom prst="rect">
             <a:avLst/>
@@ -11765,13 +16005,13 @@
           <a:lstStyle/>
           <a:p>
             <a:r>
-              <a:rPr sz="950" b="0" i="0">
+              <a:rPr sz="950" b="1" i="0">
                 <a:solidFill>
                   <a:srgbClr val="0B2545"/>
                 </a:solidFill>
                 <a:latin typeface="Arial"/>
               </a:rPr>
-              <a:t>Target shape / size</a:t>
+              <a:t>square, 10 x 10 px</a:t>
             </a:r>
           </a:p>
         </p:txBody>
@@ -11784,8 +16024,8 @@
         </p:nvSpPr>
         <p:spPr>
           <a:xfrm>
-            <a:off x="4654296" y="3003804"/>
-            <a:ext cx="3520440" cy="297180"/>
+            <a:off x="11420855" y="3003804"/>
+            <a:ext cx="320040" cy="297180"/>
           </a:xfrm>
           <a:prstGeom prst="rect">
             <a:avLst/>
@@ -11798,14 +16038,15 @@
           </a:bodyPr>
           <a:lstStyle/>
           <a:p>
-            <a:r>
-              <a:rPr sz="950" b="0" i="0">
-                <a:solidFill>
-                  <a:srgbClr val="0B2545"/>
-                </a:solidFill>
-                <a:latin typeface="Arial"/>
-              </a:rPr>
-              <a:t>square, 10 x 10 px</a:t>
+            <a:pPr algn="ctr"/>
+            <a:r>
+              <a:rPr sz="1100" b="1" i="0">
+                <a:solidFill>
+                  <a:srgbClr val="1F8A5B"/>
+                </a:solidFill>
+                <a:latin typeface="Arial"/>
+              </a:rPr>
+              <a:t>✓</a:t>
             </a:r>
           </a:p>
         </p:txBody>
@@ -11818,8 +16059,8 @@
         </p:nvSpPr>
         <p:spPr>
           <a:xfrm>
-            <a:off x="8174736" y="3003804"/>
-            <a:ext cx="3246120" cy="297180"/>
+            <a:off x="676656" y="3300984"/>
+            <a:ext cx="3977639" cy="297180"/>
           </a:xfrm>
           <a:prstGeom prst="rect">
             <a:avLst/>
@@ -11833,13 +16074,13 @@
           <a:lstStyle/>
           <a:p>
             <a:r>
-              <a:rPr sz="950" b="1" i="0">
+              <a:rPr sz="950" b="0" i="0">
                 <a:solidFill>
                   <a:srgbClr val="0B2545"/>
                 </a:solidFill>
                 <a:latin typeface="Arial"/>
               </a:rPr>
-              <a:t>square, 10 x 10 px</a:t>
+              <a:t>Motion patterns</a:t>
             </a:r>
           </a:p>
         </p:txBody>
@@ -11852,8 +16093,8 @@
         </p:nvSpPr>
         <p:spPr>
           <a:xfrm>
-            <a:off x="11420855" y="3003804"/>
-            <a:ext cx="320040" cy="297180"/>
+            <a:off x="4654296" y="3300984"/>
+            <a:ext cx="3520440" cy="297180"/>
           </a:xfrm>
           <a:prstGeom prst="rect">
             <a:avLst/>
@@ -11866,15 +16107,14 @@
           </a:bodyPr>
           <a:lstStyle/>
           <a:p>
-            <a:pPr algn="ctr"/>
-            <a:r>
-              <a:rPr sz="1100" b="1" i="0">
-                <a:solidFill>
-                  <a:srgbClr val="1F8A5B"/>
-                </a:solidFill>
-                <a:latin typeface="Arial"/>
-              </a:rPr>
-              <a:t>✓</a:t>
+            <a:r>
+              <a:rPr sz="950" b="0" i="0">
+                <a:solidFill>
+                  <a:srgbClr val="0B2545"/>
+                </a:solidFill>
+                <a:latin typeface="Arial"/>
+              </a:rPr>
+              <a:t>≥ 4, incl. Figure-of-8</a:t>
             </a:r>
           </a:p>
         </p:txBody>
@@ -11887,8 +16127,8 @@
         </p:nvSpPr>
         <p:spPr>
           <a:xfrm>
-            <a:off x="676656" y="3300984"/>
-            <a:ext cx="3977639" cy="297180"/>
+            <a:off x="8174736" y="3300984"/>
+            <a:ext cx="3246120" cy="297180"/>
           </a:xfrm>
           <a:prstGeom prst="rect">
             <a:avLst/>
@@ -11902,13 +16142,13 @@
           <a:lstStyle/>
           <a:p>
             <a:r>
-              <a:rPr sz="950" b="0" i="0">
+              <a:rPr sz="950" b="1" i="0">
                 <a:solidFill>
                   <a:srgbClr val="0B2545"/>
                 </a:solidFill>
                 <a:latin typeface="Arial"/>
               </a:rPr>
-              <a:t>Motion patterns</a:t>
+              <a:t>7, incl. Figure-of-8</a:t>
             </a:r>
           </a:p>
         </p:txBody>
@@ -11921,8 +16161,8 @@
         </p:nvSpPr>
         <p:spPr>
           <a:xfrm>
-            <a:off x="4654296" y="3300984"/>
-            <a:ext cx="3520440" cy="297180"/>
+            <a:off x="11420855" y="3300984"/>
+            <a:ext cx="320040" cy="297180"/>
           </a:xfrm>
           <a:prstGeom prst="rect">
             <a:avLst/>
@@ -11935,74 +16175,6 @@
           </a:bodyPr>
           <a:lstStyle/>
           <a:p>
-            <a:r>
-              <a:rPr sz="950" b="0" i="0">
-                <a:solidFill>
-                  <a:srgbClr val="0B2545"/>
-                </a:solidFill>
-                <a:latin typeface="Arial"/>
-              </a:rPr>
-              <a:t>≥ 4, incl. Figure-of-8</a:t>
-            </a:r>
-          </a:p>
-        </p:txBody>
-      </p:sp>
-      <p:sp>
-        <p:nvSpPr>
-          <p:cNvPr id="17442" name="TextBox 17441"/>
-          <p:cNvSpPr txBox="1"/>
-          <p:nvPr/>
-        </p:nvSpPr>
-        <p:spPr>
-          <a:xfrm>
-            <a:off x="8174736" y="3300984"/>
-            <a:ext cx="3246120" cy="297180"/>
-          </a:xfrm>
-          <a:prstGeom prst="rect">
-            <a:avLst/>
-          </a:prstGeom>
-          <a:noFill/>
-        </p:spPr>
-        <p:txBody>
-          <a:bodyPr wrap="square" anchor="ctr" lIns="0" rIns="0" tIns="0" bIns="0">
-            <a:spAutoFit/>
-          </a:bodyPr>
-          <a:lstStyle/>
-          <a:p>
-            <a:r>
-              <a:rPr sz="950" b="1" i="0">
-                <a:solidFill>
-                  <a:srgbClr val="0B2545"/>
-                </a:solidFill>
-                <a:latin typeface="Arial"/>
-              </a:rPr>
-              <a:t>7, incl. Figure-of-8</a:t>
-            </a:r>
-          </a:p>
-        </p:txBody>
-      </p:sp>
-      <p:sp>
-        <p:nvSpPr>
-          <p:cNvPr id="17443" name="TextBox 17442"/>
-          <p:cNvSpPr txBox="1"/>
-          <p:nvPr/>
-        </p:nvSpPr>
-        <p:spPr>
-          <a:xfrm>
-            <a:off x="11420855" y="3300984"/>
-            <a:ext cx="320040" cy="297180"/>
-          </a:xfrm>
-          <a:prstGeom prst="rect">
-            <a:avLst/>
-          </a:prstGeom>
-          <a:noFill/>
-        </p:spPr>
-        <p:txBody>
-          <a:bodyPr wrap="square" anchor="ctr" lIns="0" rIns="0" tIns="0" bIns="0">
-            <a:spAutoFit/>
-          </a:bodyPr>
-          <a:lstStyle/>
-          <a:p>
             <a:pPr algn="ctr"/>
             <a:r>
               <a:rPr sz="1100" b="1" i="0">
@@ -12018,7 +16190,7 @@
       </p:sp>
       <p:sp>
         <p:nvSpPr>
-          <p:cNvPr id="17444" name="Rounded Rectangle 17443"/>
+          <p:cNvPr id="17442" name="Rounded Rectangle 17441"/>
           <p:cNvSpPr/>
           <p:nvPr/>
         </p:nvSpPr>
@@ -12064,14 +16236,82 @@
       </p:sp>
       <p:sp>
         <p:nvSpPr>
+          <p:cNvPr id="17443" name="TextBox 17442"/>
+          <p:cNvSpPr txBox="1"/>
+          <p:nvPr/>
+        </p:nvSpPr>
+        <p:spPr>
+          <a:xfrm>
+            <a:off x="676656" y="3598163"/>
+            <a:ext cx="3977639" cy="297180"/>
+          </a:xfrm>
+          <a:prstGeom prst="rect">
+            <a:avLst/>
+          </a:prstGeom>
+          <a:noFill/>
+        </p:spPr>
+        <p:txBody>
+          <a:bodyPr wrap="square" anchor="ctr" lIns="0" rIns="0" tIns="0" bIns="0">
+            <a:spAutoFit/>
+          </a:bodyPr>
+          <a:lstStyle/>
+          <a:p>
+            <a:r>
+              <a:rPr sz="950" b="0" i="0">
+                <a:solidFill>
+                  <a:srgbClr val="0B2545"/>
+                </a:solidFill>
+                <a:latin typeface="Arial"/>
+              </a:rPr>
+              <a:t>Image noise</a:t>
+            </a:r>
+          </a:p>
+        </p:txBody>
+      </p:sp>
+      <p:sp>
+        <p:nvSpPr>
+          <p:cNvPr id="17444" name="TextBox 17443"/>
+          <p:cNvSpPr txBox="1"/>
+          <p:nvPr/>
+        </p:nvSpPr>
+        <p:spPr>
+          <a:xfrm>
+            <a:off x="4654296" y="3598163"/>
+            <a:ext cx="3520440" cy="297180"/>
+          </a:xfrm>
+          <a:prstGeom prst="rect">
+            <a:avLst/>
+          </a:prstGeom>
+          <a:noFill/>
+        </p:spPr>
+        <p:txBody>
+          <a:bodyPr wrap="square" anchor="ctr" lIns="0" rIns="0" tIns="0" bIns="0">
+            <a:spAutoFit/>
+          </a:bodyPr>
+          <a:lstStyle/>
+          <a:p>
+            <a:r>
+              <a:rPr sz="950" b="0" i="0">
+                <a:solidFill>
+                  <a:srgbClr val="0B2545"/>
+                </a:solidFill>
+                <a:latin typeface="Arial"/>
+              </a:rPr>
+              <a:t>S&amp;P ~10%, Gaussian, Poisson</a:t>
+            </a:r>
+          </a:p>
+        </p:txBody>
+      </p:sp>
+      <p:sp>
+        <p:nvSpPr>
           <p:cNvPr id="17445" name="TextBox 17444"/>
           <p:cNvSpPr txBox="1"/>
           <p:nvPr/>
         </p:nvSpPr>
         <p:spPr>
           <a:xfrm>
-            <a:off x="676656" y="3598163"/>
-            <a:ext cx="3977639" cy="297180"/>
+            <a:off x="8174736" y="3598163"/>
+            <a:ext cx="3246120" cy="297180"/>
           </a:xfrm>
           <a:prstGeom prst="rect">
             <a:avLst/>
@@ -12085,13 +16325,13 @@
           <a:lstStyle/>
           <a:p>
             <a:r>
-              <a:rPr sz="950" b="0" i="0">
+              <a:rPr sz="950" b="1" i="0">
                 <a:solidFill>
                   <a:srgbClr val="0B2545"/>
                 </a:solidFill>
                 <a:latin typeface="Arial"/>
               </a:rPr>
-              <a:t>Image noise</a:t>
+              <a:t>all three, S&amp;P at 10%</a:t>
             </a:r>
           </a:p>
         </p:txBody>
@@ -12104,8 +16344,8 @@
         </p:nvSpPr>
         <p:spPr>
           <a:xfrm>
-            <a:off x="4654296" y="3598163"/>
-            <a:ext cx="3520440" cy="297180"/>
+            <a:off x="11420855" y="3598163"/>
+            <a:ext cx="320040" cy="297180"/>
           </a:xfrm>
           <a:prstGeom prst="rect">
             <a:avLst/>
@@ -12118,14 +16358,15 @@
           </a:bodyPr>
           <a:lstStyle/>
           <a:p>
-            <a:r>
-              <a:rPr sz="950" b="0" i="0">
-                <a:solidFill>
-                  <a:srgbClr val="0B2545"/>
-                </a:solidFill>
-                <a:latin typeface="Arial"/>
-              </a:rPr>
-              <a:t>S&amp;P ~10%, Gaussian, Poisson</a:t>
+            <a:pPr algn="ctr"/>
+            <a:r>
+              <a:rPr sz="1100" b="1" i="0">
+                <a:solidFill>
+                  <a:srgbClr val="1F8A5B"/>
+                </a:solidFill>
+                <a:latin typeface="Arial"/>
+              </a:rPr>
+              <a:t>✓</a:t>
             </a:r>
           </a:p>
         </p:txBody>
@@ -12138,8 +16379,8 @@
         </p:nvSpPr>
         <p:spPr>
           <a:xfrm>
-            <a:off x="8174736" y="3598163"/>
-            <a:ext cx="3246120" cy="297180"/>
+            <a:off x="676656" y="3895344"/>
+            <a:ext cx="3977639" cy="297180"/>
           </a:xfrm>
           <a:prstGeom prst="rect">
             <a:avLst/>
@@ -12153,13 +16394,13 @@
           <a:lstStyle/>
           <a:p>
             <a:r>
-              <a:rPr sz="950" b="1" i="0">
+              <a:rPr sz="950" b="0" i="0">
                 <a:solidFill>
                   <a:srgbClr val="0B2545"/>
                 </a:solidFill>
                 <a:latin typeface="Arial"/>
               </a:rPr>
-              <a:t>all three, S&amp;P at 10%</a:t>
+              <a:t>Camera jitter</a:t>
             </a:r>
           </a:p>
         </p:txBody>
@@ -12172,8 +16413,8 @@
         </p:nvSpPr>
         <p:spPr>
           <a:xfrm>
-            <a:off x="11420855" y="3598163"/>
-            <a:ext cx="320040" cy="297180"/>
+            <a:off x="4654296" y="3895344"/>
+            <a:ext cx="3520440" cy="297180"/>
           </a:xfrm>
           <a:prstGeom prst="rect">
             <a:avLst/>
@@ -12186,15 +16427,14 @@
           </a:bodyPr>
           <a:lstStyle/>
           <a:p>
-            <a:pPr algn="ctr"/>
-            <a:r>
-              <a:rPr sz="1100" b="1" i="0">
-                <a:solidFill>
-                  <a:srgbClr val="1F8A5B"/>
-                </a:solidFill>
-                <a:latin typeface="Arial"/>
-              </a:rPr>
-              <a:t>✓</a:t>
+            <a:r>
+              <a:rPr sz="950" b="0" i="0">
+                <a:solidFill>
+                  <a:srgbClr val="0B2545"/>
+                </a:solidFill>
+                <a:latin typeface="Arial"/>
+              </a:rPr>
+              <a:t>± 20 px / frame</a:t>
             </a:r>
           </a:p>
         </p:txBody>
@@ -12207,8 +16447,8 @@
         </p:nvSpPr>
         <p:spPr>
           <a:xfrm>
-            <a:off x="676656" y="3895344"/>
-            <a:ext cx="3977639" cy="297180"/>
+            <a:off x="8174736" y="3895344"/>
+            <a:ext cx="3246120" cy="297180"/>
           </a:xfrm>
           <a:prstGeom prst="rect">
             <a:avLst/>
@@ -12222,13 +16462,13 @@
           <a:lstStyle/>
           <a:p>
             <a:r>
-              <a:rPr sz="950" b="0" i="0">
+              <a:rPr sz="950" b="1" i="0">
                 <a:solidFill>
                   <a:srgbClr val="0B2545"/>
                 </a:solidFill>
                 <a:latin typeface="Arial"/>
               </a:rPr>
-              <a:t>Camera jitter</a:t>
+              <a:t>19.8 px p99, measured</a:t>
             </a:r>
           </a:p>
         </p:txBody>
@@ -12241,8 +16481,8 @@
         </p:nvSpPr>
         <p:spPr>
           <a:xfrm>
-            <a:off x="4654296" y="3895344"/>
-            <a:ext cx="3520440" cy="297180"/>
+            <a:off x="11420855" y="3895344"/>
+            <a:ext cx="320040" cy="297180"/>
           </a:xfrm>
           <a:prstGeom prst="rect">
             <a:avLst/>
@@ -12255,74 +16495,6 @@
           </a:bodyPr>
           <a:lstStyle/>
           <a:p>
-            <a:r>
-              <a:rPr sz="950" b="0" i="0">
-                <a:solidFill>
-                  <a:srgbClr val="0B2545"/>
-                </a:solidFill>
-                <a:latin typeface="Arial"/>
-              </a:rPr>
-              <a:t>± 20 px / frame</a:t>
-            </a:r>
-          </a:p>
-        </p:txBody>
-      </p:sp>
-      <p:sp>
-        <p:nvSpPr>
-          <p:cNvPr id="17451" name="TextBox 17450"/>
-          <p:cNvSpPr txBox="1"/>
-          <p:nvPr/>
-        </p:nvSpPr>
-        <p:spPr>
-          <a:xfrm>
-            <a:off x="8174736" y="3895344"/>
-            <a:ext cx="3246120" cy="297180"/>
-          </a:xfrm>
-          <a:prstGeom prst="rect">
-            <a:avLst/>
-          </a:prstGeom>
-          <a:noFill/>
-        </p:spPr>
-        <p:txBody>
-          <a:bodyPr wrap="square" anchor="ctr" lIns="0" rIns="0" tIns="0" bIns="0">
-            <a:spAutoFit/>
-          </a:bodyPr>
-          <a:lstStyle/>
-          <a:p>
-            <a:r>
-              <a:rPr sz="950" b="1" i="0">
-                <a:solidFill>
-                  <a:srgbClr val="0B2545"/>
-                </a:solidFill>
-                <a:latin typeface="Arial"/>
-              </a:rPr>
-              <a:t>19.8 px p99, measured</a:t>
-            </a:r>
-          </a:p>
-        </p:txBody>
-      </p:sp>
-      <p:sp>
-        <p:nvSpPr>
-          <p:cNvPr id="17452" name="TextBox 17451"/>
-          <p:cNvSpPr txBox="1"/>
-          <p:nvPr/>
-        </p:nvSpPr>
-        <p:spPr>
-          <a:xfrm>
-            <a:off x="11420855" y="3895344"/>
-            <a:ext cx="320040" cy="297180"/>
-          </a:xfrm>
-          <a:prstGeom prst="rect">
-            <a:avLst/>
-          </a:prstGeom>
-          <a:noFill/>
-        </p:spPr>
-        <p:txBody>
-          <a:bodyPr wrap="square" anchor="ctr" lIns="0" rIns="0" tIns="0" bIns="0">
-            <a:spAutoFit/>
-          </a:bodyPr>
-          <a:lstStyle/>
-          <a:p>
             <a:pPr algn="ctr"/>
             <a:r>
               <a:rPr sz="1100" b="1" i="0">
@@ -12338,7 +16510,7 @@
       </p:sp>
       <p:sp>
         <p:nvSpPr>
-          <p:cNvPr id="17453" name="Rounded Rectangle 17452"/>
+          <p:cNvPr id="17451" name="Rounded Rectangle 17450"/>
           <p:cNvSpPr/>
           <p:nvPr/>
         </p:nvSpPr>
@@ -12384,14 +16556,82 @@
       </p:sp>
       <p:sp>
         <p:nvSpPr>
+          <p:cNvPr id="17452" name="TextBox 17451"/>
+          <p:cNvSpPr txBox="1"/>
+          <p:nvPr/>
+        </p:nvSpPr>
+        <p:spPr>
+          <a:xfrm>
+            <a:off x="676656" y="4192524"/>
+            <a:ext cx="3977639" cy="297180"/>
+          </a:xfrm>
+          <a:prstGeom prst="rect">
+            <a:avLst/>
+          </a:prstGeom>
+          <a:noFill/>
+        </p:spPr>
+        <p:txBody>
+          <a:bodyPr wrap="square" anchor="ctr" lIns="0" rIns="0" tIns="0" bIns="0">
+            <a:spAutoFit/>
+          </a:bodyPr>
+          <a:lstStyle/>
+          <a:p>
+            <a:r>
+              <a:rPr sz="950" b="0" i="0">
+                <a:solidFill>
+                  <a:srgbClr val="0B2545"/>
+                </a:solidFill>
+                <a:latin typeface="Arial"/>
+              </a:rPr>
+              <a:t>Platform motion</a:t>
+            </a:r>
+          </a:p>
+        </p:txBody>
+      </p:sp>
+      <p:sp>
+        <p:nvSpPr>
+          <p:cNvPr id="17453" name="TextBox 17452"/>
+          <p:cNvSpPr txBox="1"/>
+          <p:nvPr/>
+        </p:nvSpPr>
+        <p:spPr>
+          <a:xfrm>
+            <a:off x="4654296" y="4192524"/>
+            <a:ext cx="3520440" cy="297180"/>
+          </a:xfrm>
+          <a:prstGeom prst="rect">
+            <a:avLst/>
+          </a:prstGeom>
+          <a:noFill/>
+        </p:spPr>
+        <p:txBody>
+          <a:bodyPr wrap="square" anchor="ctr" lIns="0" rIns="0" tIns="0" bIns="0">
+            <a:spAutoFit/>
+          </a:bodyPr>
+          <a:lstStyle/>
+          <a:p>
+            <a:r>
+              <a:rPr sz="950" b="0" i="0">
+                <a:solidFill>
+                  <a:srgbClr val="0B2545"/>
+                </a:solidFill>
+                <a:latin typeface="Arial"/>
+              </a:rPr>
+              <a:t>± 20 px / frame, linear</a:t>
+            </a:r>
+          </a:p>
+        </p:txBody>
+      </p:sp>
+      <p:sp>
+        <p:nvSpPr>
           <p:cNvPr id="17454" name="TextBox 17453"/>
           <p:cNvSpPr txBox="1"/>
           <p:nvPr/>
         </p:nvSpPr>
         <p:spPr>
           <a:xfrm>
-            <a:off x="676656" y="4192524"/>
-            <a:ext cx="3977639" cy="297180"/>
+            <a:off x="8174736" y="4192524"/>
+            <a:ext cx="3246120" cy="297180"/>
           </a:xfrm>
           <a:prstGeom prst="rect">
             <a:avLst/>
@@ -12405,13 +16645,13 @@
           <a:lstStyle/>
           <a:p>
             <a:r>
-              <a:rPr sz="950" b="0" i="0">
+              <a:rPr sz="950" b="1" i="0">
                 <a:solidFill>
                   <a:srgbClr val="0B2545"/>
                 </a:solidFill>
                 <a:latin typeface="Arial"/>
               </a:rPr>
-              <a:t>Platform motion</a:t>
+              <a:t>linear drift, 6 px / frame</a:t>
             </a:r>
           </a:p>
         </p:txBody>
@@ -12424,8 +16664,8 @@
         </p:nvSpPr>
         <p:spPr>
           <a:xfrm>
-            <a:off x="4654296" y="4192524"/>
-            <a:ext cx="3520440" cy="297180"/>
+            <a:off x="11420855" y="4192524"/>
+            <a:ext cx="320040" cy="297180"/>
           </a:xfrm>
           <a:prstGeom prst="rect">
             <a:avLst/>
@@ -12438,14 +16678,15 @@
           </a:bodyPr>
           <a:lstStyle/>
           <a:p>
-            <a:r>
-              <a:rPr sz="950" b="0" i="0">
-                <a:solidFill>
-                  <a:srgbClr val="0B2545"/>
-                </a:solidFill>
-                <a:latin typeface="Arial"/>
-              </a:rPr>
-              <a:t>± 20 px / frame, linear</a:t>
+            <a:pPr algn="ctr"/>
+            <a:r>
+              <a:rPr sz="1100" b="1" i="0">
+                <a:solidFill>
+                  <a:srgbClr val="1F8A5B"/>
+                </a:solidFill>
+                <a:latin typeface="Arial"/>
+              </a:rPr>
+              <a:t>✓</a:t>
             </a:r>
           </a:p>
         </p:txBody>
@@ -12458,8 +16699,8 @@
         </p:nvSpPr>
         <p:spPr>
           <a:xfrm>
-            <a:off x="8174736" y="4192524"/>
-            <a:ext cx="3246120" cy="297180"/>
+            <a:off x="676656" y="4489704"/>
+            <a:ext cx="3977639" cy="297180"/>
           </a:xfrm>
           <a:prstGeom prst="rect">
             <a:avLst/>
@@ -12473,13 +16714,13 @@
           <a:lstStyle/>
           <a:p>
             <a:r>
-              <a:rPr sz="950" b="1" i="0">
+              <a:rPr sz="950" b="0" i="0">
                 <a:solidFill>
                   <a:srgbClr val="0B2545"/>
                 </a:solidFill>
                 <a:latin typeface="Arial"/>
               </a:rPr>
-              <a:t>linear drift, 6 px / frame</a:t>
+              <a:t>Atmospheric conditions</a:t>
             </a:r>
           </a:p>
         </p:txBody>
@@ -12492,8 +16733,8 @@
         </p:nvSpPr>
         <p:spPr>
           <a:xfrm>
-            <a:off x="11420855" y="4192524"/>
-            <a:ext cx="320040" cy="297180"/>
+            <a:off x="4654296" y="4489704"/>
+            <a:ext cx="3520440" cy="297180"/>
           </a:xfrm>
           <a:prstGeom prst="rect">
             <a:avLst/>
@@ -12506,15 +16747,14 @@
           </a:bodyPr>
           <a:lstStyle/>
           <a:p>
-            <a:pPr algn="ctr"/>
-            <a:r>
-              <a:rPr sz="1100" b="1" i="0">
-                <a:solidFill>
-                  <a:srgbClr val="1F8A5B"/>
-                </a:solidFill>
-                <a:latin typeface="Arial"/>
-              </a:rPr>
-              <a:t>✓</a:t>
+            <a:r>
+              <a:rPr sz="950" b="0" i="0">
+                <a:solidFill>
+                  <a:srgbClr val="0B2545"/>
+                </a:solidFill>
+                <a:latin typeface="Arial"/>
+              </a:rPr>
+              <a:t>Clear / Haze / Fog / Rain / Low light</a:t>
             </a:r>
           </a:p>
         </p:txBody>
@@ -12527,8 +16767,8 @@
         </p:nvSpPr>
         <p:spPr>
           <a:xfrm>
-            <a:off x="676656" y="4489704"/>
-            <a:ext cx="3977639" cy="297180"/>
+            <a:off x="8174736" y="4489704"/>
+            <a:ext cx="3246120" cy="297180"/>
           </a:xfrm>
           <a:prstGeom prst="rect">
             <a:avLst/>
@@ -12542,13 +16782,13 @@
           <a:lstStyle/>
           <a:p>
             <a:r>
-              <a:rPr sz="950" b="0" i="0">
+              <a:rPr sz="950" b="1" i="0">
                 <a:solidFill>
                   <a:srgbClr val="0B2545"/>
                 </a:solidFill>
                 <a:latin typeface="Arial"/>
               </a:rPr>
-              <a:t>Atmospheric conditions</a:t>
+              <a:t>all five</a:t>
             </a:r>
           </a:p>
         </p:txBody>
@@ -12561,8 +16801,8 @@
         </p:nvSpPr>
         <p:spPr>
           <a:xfrm>
-            <a:off x="4654296" y="4489704"/>
-            <a:ext cx="3520440" cy="297180"/>
+            <a:off x="11420855" y="4489704"/>
+            <a:ext cx="320040" cy="297180"/>
           </a:xfrm>
           <a:prstGeom prst="rect">
             <a:avLst/>
@@ -12575,74 +16815,6 @@
           </a:bodyPr>
           <a:lstStyle/>
           <a:p>
-            <a:r>
-              <a:rPr sz="950" b="0" i="0">
-                <a:solidFill>
-                  <a:srgbClr val="0B2545"/>
-                </a:solidFill>
-                <a:latin typeface="Arial"/>
-              </a:rPr>
-              <a:t>Clear / Haze / Fog / Rain / Low light</a:t>
-            </a:r>
-          </a:p>
-        </p:txBody>
-      </p:sp>
-      <p:sp>
-        <p:nvSpPr>
-          <p:cNvPr id="17460" name="TextBox 17459"/>
-          <p:cNvSpPr txBox="1"/>
-          <p:nvPr/>
-        </p:nvSpPr>
-        <p:spPr>
-          <a:xfrm>
-            <a:off x="8174736" y="4489704"/>
-            <a:ext cx="3246120" cy="297180"/>
-          </a:xfrm>
-          <a:prstGeom prst="rect">
-            <a:avLst/>
-          </a:prstGeom>
-          <a:noFill/>
-        </p:spPr>
-        <p:txBody>
-          <a:bodyPr wrap="square" anchor="ctr" lIns="0" rIns="0" tIns="0" bIns="0">
-            <a:spAutoFit/>
-          </a:bodyPr>
-          <a:lstStyle/>
-          <a:p>
-            <a:r>
-              <a:rPr sz="950" b="1" i="0">
-                <a:solidFill>
-                  <a:srgbClr val="0B2545"/>
-                </a:solidFill>
-                <a:latin typeface="Arial"/>
-              </a:rPr>
-              <a:t>all five</a:t>
-            </a:r>
-          </a:p>
-        </p:txBody>
-      </p:sp>
-      <p:sp>
-        <p:nvSpPr>
-          <p:cNvPr id="17461" name="TextBox 17460"/>
-          <p:cNvSpPr txBox="1"/>
-          <p:nvPr/>
-        </p:nvSpPr>
-        <p:spPr>
-          <a:xfrm>
-            <a:off x="11420855" y="4489704"/>
-            <a:ext cx="320040" cy="297180"/>
-          </a:xfrm>
-          <a:prstGeom prst="rect">
-            <a:avLst/>
-          </a:prstGeom>
-          <a:noFill/>
-        </p:spPr>
-        <p:txBody>
-          <a:bodyPr wrap="square" anchor="ctr" lIns="0" rIns="0" tIns="0" bIns="0">
-            <a:spAutoFit/>
-          </a:bodyPr>
-          <a:lstStyle/>
-          <a:p>
             <a:pPr algn="ctr"/>
             <a:r>
               <a:rPr sz="1100" b="1" i="0">
@@ -12658,7 +16830,7 @@
       </p:sp>
       <p:sp>
         <p:nvSpPr>
-          <p:cNvPr id="17462" name="Rounded Rectangle 17461"/>
+          <p:cNvPr id="17460" name="Rounded Rectangle 17459"/>
           <p:cNvSpPr/>
           <p:nvPr/>
         </p:nvSpPr>
@@ -12704,14 +16876,82 @@
       </p:sp>
       <p:sp>
         <p:nvSpPr>
+          <p:cNvPr id="17461" name="TextBox 17460"/>
+          <p:cNvSpPr txBox="1"/>
+          <p:nvPr/>
+        </p:nvSpPr>
+        <p:spPr>
+          <a:xfrm>
+            <a:off x="676656" y="4786884"/>
+            <a:ext cx="3977639" cy="297180"/>
+          </a:xfrm>
+          <a:prstGeom prst="rect">
+            <a:avLst/>
+          </a:prstGeom>
+          <a:noFill/>
+        </p:spPr>
+        <p:txBody>
+          <a:bodyPr wrap="square" anchor="ctr" lIns="0" rIns="0" tIns="0" bIns="0">
+            <a:spAutoFit/>
+          </a:bodyPr>
+          <a:lstStyle/>
+          <a:p>
+            <a:r>
+              <a:rPr sz="950" b="0" i="0">
+                <a:solidFill>
+                  <a:srgbClr val="0B2545"/>
+                </a:solidFill>
+                <a:latin typeface="Arial"/>
+              </a:rPr>
+              <a:t>MP4 input, bypassing PTZ</a:t>
+            </a:r>
+          </a:p>
+        </p:txBody>
+      </p:sp>
+      <p:sp>
+        <p:nvSpPr>
+          <p:cNvPr id="17462" name="TextBox 17461"/>
+          <p:cNvSpPr txBox="1"/>
+          <p:nvPr/>
+        </p:nvSpPr>
+        <p:spPr>
+          <a:xfrm>
+            <a:off x="4654296" y="4786884"/>
+            <a:ext cx="3520440" cy="297180"/>
+          </a:xfrm>
+          <a:prstGeom prst="rect">
+            <a:avLst/>
+          </a:prstGeom>
+          <a:noFill/>
+        </p:spPr>
+        <p:txBody>
+          <a:bodyPr wrap="square" anchor="ctr" lIns="0" rIns="0" tIns="0" bIns="0">
+            <a:spAutoFit/>
+          </a:bodyPr>
+          <a:lstStyle/>
+          <a:p>
+            <a:r>
+              <a:rPr sz="950" b="0" i="0">
+                <a:solidFill>
+                  <a:srgbClr val="0B2545"/>
+                </a:solidFill>
+                <a:latin typeface="Arial"/>
+              </a:rPr>
+              <a:t>required (Benchmark-2)</a:t>
+            </a:r>
+          </a:p>
+        </p:txBody>
+      </p:sp>
+      <p:sp>
+        <p:nvSpPr>
           <p:cNvPr id="17463" name="TextBox 17462"/>
           <p:cNvSpPr txBox="1"/>
           <p:nvPr/>
         </p:nvSpPr>
         <p:spPr>
           <a:xfrm>
-            <a:off x="676656" y="4786884"/>
-            <a:ext cx="3977639" cy="297180"/>
+            <a:off x="8174736" y="4786884"/>
+            <a:ext cx="3246120" cy="297180"/>
           </a:xfrm>
           <a:prstGeom prst="rect">
             <a:avLst/>
@@ -12725,13 +16965,13 @@
           <a:lstStyle/>
           <a:p>
             <a:r>
-              <a:rPr sz="950" b="0" i="0">
+              <a:rPr sz="950" b="1" i="0">
                 <a:solidFill>
                   <a:srgbClr val="0B2545"/>
                 </a:solidFill>
                 <a:latin typeface="Arial"/>
               </a:rPr>
-              <a:t>MP4 input, bypassing PTZ</a:t>
+              <a:t>--video, working</a:t>
             </a:r>
           </a:p>
         </p:txBody>
@@ -12744,8 +16984,8 @@
         </p:nvSpPr>
         <p:spPr>
           <a:xfrm>
-            <a:off x="4654296" y="4786884"/>
-            <a:ext cx="3520440" cy="297180"/>
+            <a:off x="11420855" y="4786884"/>
+            <a:ext cx="320040" cy="297180"/>
           </a:xfrm>
           <a:prstGeom prst="rect">
             <a:avLst/>
@@ -12758,74 +16998,6 @@
           </a:bodyPr>
           <a:lstStyle/>
           <a:p>
-            <a:r>
-              <a:rPr sz="950" b="0" i="0">
-                <a:solidFill>
-                  <a:srgbClr val="0B2545"/>
-                </a:solidFill>
-                <a:latin typeface="Arial"/>
-              </a:rPr>
-              <a:t>required (Benchmark-2)</a:t>
-            </a:r>
-          </a:p>
-        </p:txBody>
-      </p:sp>
-      <p:sp>
-        <p:nvSpPr>
-          <p:cNvPr id="17465" name="TextBox 17464"/>
-          <p:cNvSpPr txBox="1"/>
-          <p:nvPr/>
-        </p:nvSpPr>
-        <p:spPr>
-          <a:xfrm>
-            <a:off x="8174736" y="4786884"/>
-            <a:ext cx="3246120" cy="297180"/>
-          </a:xfrm>
-          <a:prstGeom prst="rect">
-            <a:avLst/>
-          </a:prstGeom>
-          <a:noFill/>
-        </p:spPr>
-        <p:txBody>
-          <a:bodyPr wrap="square" anchor="ctr" lIns="0" rIns="0" tIns="0" bIns="0">
-            <a:spAutoFit/>
-          </a:bodyPr>
-          <a:lstStyle/>
-          <a:p>
-            <a:r>
-              <a:rPr sz="950" b="1" i="0">
-                <a:solidFill>
-                  <a:srgbClr val="0B2545"/>
-                </a:solidFill>
-                <a:latin typeface="Arial"/>
-              </a:rPr>
-              <a:t>--video, working</a:t>
-            </a:r>
-          </a:p>
-        </p:txBody>
-      </p:sp>
-      <p:sp>
-        <p:nvSpPr>
-          <p:cNvPr id="17466" name="TextBox 17465"/>
-          <p:cNvSpPr txBox="1"/>
-          <p:nvPr/>
-        </p:nvSpPr>
-        <p:spPr>
-          <a:xfrm>
-            <a:off x="11420855" y="4786884"/>
-            <a:ext cx="320040" cy="297180"/>
-          </a:xfrm>
-          <a:prstGeom prst="rect">
-            <a:avLst/>
-          </a:prstGeom>
-          <a:noFill/>
-        </p:spPr>
-        <p:txBody>
-          <a:bodyPr wrap="square" anchor="ctr" lIns="0" rIns="0" tIns="0" bIns="0">
-            <a:spAutoFit/>
-          </a:bodyPr>
-          <a:lstStyle/>
-          <a:p>
             <a:pPr algn="ctr"/>
             <a:r>
               <a:rPr sz="1100" b="1" i="0">
@@ -12841,7 +17013,7 @@
       </p:sp>
       <p:sp>
         <p:nvSpPr>
-          <p:cNvPr id="17467" name="Rounded Rectangle 17466"/>
+          <p:cNvPr id="17465" name="Rounded Rectangle 17464"/>
           <p:cNvSpPr/>
           <p:nvPr/>
         </p:nvSpPr>
@@ -12887,14 +17059,82 @@
       </p:sp>
       <p:sp>
         <p:nvSpPr>
+          <p:cNvPr id="17466" name="TextBox 17465"/>
+          <p:cNvSpPr txBox="1"/>
+          <p:nvPr/>
+        </p:nvSpPr>
+        <p:spPr>
+          <a:xfrm>
+            <a:off x="676656" y="5084064"/>
+            <a:ext cx="3977639" cy="297180"/>
+          </a:xfrm>
+          <a:prstGeom prst="rect">
+            <a:avLst/>
+          </a:prstGeom>
+          <a:noFill/>
+        </p:spPr>
+        <p:txBody>
+          <a:bodyPr wrap="square" anchor="ctr" lIns="0" rIns="0" tIns="0" bIns="0">
+            <a:spAutoFit/>
+          </a:bodyPr>
+          <a:lstStyle/>
+          <a:p>
+            <a:r>
+              <a:rPr sz="950" b="0" i="0">
+                <a:solidFill>
+                  <a:srgbClr val="9C2E23"/>
+                </a:solidFill>
+                <a:latin typeface="Arial"/>
+              </a:rPr>
+              <a:t>Acquisition time</a:t>
+            </a:r>
+          </a:p>
+        </p:txBody>
+      </p:sp>
+      <p:sp>
+        <p:nvSpPr>
+          <p:cNvPr id="17467" name="TextBox 17466"/>
+          <p:cNvSpPr txBox="1"/>
+          <p:nvPr/>
+        </p:nvSpPr>
+        <p:spPr>
+          <a:xfrm>
+            <a:off x="4654296" y="5084064"/>
+            <a:ext cx="3520440" cy="297180"/>
+          </a:xfrm>
+          <a:prstGeom prst="rect">
+            <a:avLst/>
+          </a:prstGeom>
+          <a:noFill/>
+        </p:spPr>
+        <p:txBody>
+          <a:bodyPr wrap="square" anchor="ctr" lIns="0" rIns="0" tIns="0" bIns="0">
+            <a:spAutoFit/>
+          </a:bodyPr>
+          <a:lstStyle/>
+          <a:p>
+            <a:r>
+              <a:rPr sz="950" b="0" i="0">
+                <a:solidFill>
+                  <a:srgbClr val="9C2E23"/>
+                </a:solidFill>
+                <a:latin typeface="Arial"/>
+              </a:rPr>
+              <a:t>≤ 2 s</a:t>
+            </a:r>
+          </a:p>
+        </p:txBody>
+      </p:sp>
+      <p:sp>
+        <p:nvSpPr>
           <p:cNvPr id="17468" name="TextBox 17467"/>
           <p:cNvSpPr txBox="1"/>
           <p:nvPr/>
         </p:nvSpPr>
         <p:spPr>
           <a:xfrm>
-            <a:off x="676656" y="5084064"/>
-            <a:ext cx="3977639" cy="297180"/>
+            <a:off x="8174736" y="5084064"/>
+            <a:ext cx="3246120" cy="297180"/>
           </a:xfrm>
           <a:prstGeom prst="rect">
             <a:avLst/>
@@ -12908,13 +17148,13 @@
           <a:lstStyle/>
           <a:p>
             <a:r>
-              <a:rPr sz="950" b="0" i="0">
+              <a:rPr sz="950" b="1" i="0">
                 <a:solidFill>
                   <a:srgbClr val="9C2E23"/>
                 </a:solidFill>
                 <a:latin typeface="Arial"/>
               </a:rPr>
-              <a:t>Acquisition time</a:t>
+              <a:t>25.3 s → 3.53 s  — open</a:t>
             </a:r>
           </a:p>
         </p:txBody>
@@ -12927,8 +17167,8 @@
         </p:nvSpPr>
         <p:spPr>
           <a:xfrm>
-            <a:off x="4654296" y="5084064"/>
-            <a:ext cx="3520440" cy="297180"/>
+            <a:off x="11420855" y="5084064"/>
+            <a:ext cx="320040" cy="297180"/>
           </a:xfrm>
           <a:prstGeom prst="rect">
             <a:avLst/>
@@ -12941,82 +17181,14 @@
           </a:bodyPr>
           <a:lstStyle/>
           <a:p>
-            <a:r>
-              <a:rPr sz="950" b="0" i="0">
+            <a:pPr algn="ctr"/>
+            <a:r>
+              <a:rPr sz="1100" b="1" i="0">
                 <a:solidFill>
                   <a:srgbClr val="9C2E23"/>
                 </a:solidFill>
                 <a:latin typeface="Arial"/>
               </a:rPr>
-              <a:t>≤ 2 s</a:t>
-            </a:r>
-          </a:p>
-        </p:txBody>
-      </p:sp>
-      <p:sp>
-        <p:nvSpPr>
-          <p:cNvPr id="17470" name="TextBox 17469"/>
-          <p:cNvSpPr txBox="1"/>
-          <p:nvPr/>
-        </p:nvSpPr>
-        <p:spPr>
-          <a:xfrm>
-            <a:off x="8174736" y="5084064"/>
-            <a:ext cx="3246120" cy="297180"/>
-          </a:xfrm>
-          <a:prstGeom prst="rect">
-            <a:avLst/>
-          </a:prstGeom>
-          <a:noFill/>
-        </p:spPr>
-        <p:txBody>
-          <a:bodyPr wrap="square" anchor="ctr" lIns="0" rIns="0" tIns="0" bIns="0">
-            <a:spAutoFit/>
-          </a:bodyPr>
-          <a:lstStyle/>
-          <a:p>
-            <a:r>
-              <a:rPr sz="950" b="1" i="0">
-                <a:solidFill>
-                  <a:srgbClr val="9C2E23"/>
-                </a:solidFill>
-                <a:latin typeface="Arial"/>
-              </a:rPr>
-              <a:t>25.3 s → 3.53 s  — open</a:t>
-            </a:r>
-          </a:p>
-        </p:txBody>
-      </p:sp>
-      <p:sp>
-        <p:nvSpPr>
-          <p:cNvPr id="17471" name="TextBox 17470"/>
-          <p:cNvSpPr txBox="1"/>
-          <p:nvPr/>
-        </p:nvSpPr>
-        <p:spPr>
-          <a:xfrm>
-            <a:off x="11420855" y="5084064"/>
-            <a:ext cx="320040" cy="297180"/>
-          </a:xfrm>
-          <a:prstGeom prst="rect">
-            <a:avLst/>
-          </a:prstGeom>
-          <a:noFill/>
-        </p:spPr>
-        <p:txBody>
-          <a:bodyPr wrap="square" anchor="ctr" lIns="0" rIns="0" tIns="0" bIns="0">
-            <a:spAutoFit/>
-          </a:bodyPr>
-          <a:lstStyle/>
-          <a:p>
-            <a:pPr algn="ctr"/>
-            <a:r>
-              <a:rPr sz="1100" b="1" i="0">
-                <a:solidFill>
-                  <a:srgbClr val="9C2E23"/>
-                </a:solidFill>
-                <a:latin typeface="Arial"/>
-              </a:rPr>
               <a:t>✗</a:t>
             </a:r>
           </a:p>
@@ -13024,7 +17196,7 @@
       </p:sp>
       <p:sp>
         <p:nvSpPr>
-          <p:cNvPr id="17472" name="Rounded Rectangle 17471"/>
+          <p:cNvPr id="17470" name="Rounded Rectangle 17469"/>
           <p:cNvSpPr/>
           <p:nvPr/>
         </p:nvSpPr>
@@ -13070,14 +17242,82 @@
       </p:sp>
       <p:sp>
         <p:nvSpPr>
+          <p:cNvPr id="17471" name="TextBox 17470"/>
+          <p:cNvSpPr txBox="1"/>
+          <p:nvPr/>
+        </p:nvSpPr>
+        <p:spPr>
+          <a:xfrm>
+            <a:off x="676656" y="5381244"/>
+            <a:ext cx="3977639" cy="297180"/>
+          </a:xfrm>
+          <a:prstGeom prst="rect">
+            <a:avLst/>
+          </a:prstGeom>
+          <a:noFill/>
+        </p:spPr>
+        <p:txBody>
+          <a:bodyPr wrap="square" anchor="ctr" lIns="0" rIns="0" tIns="0" bIns="0">
+            <a:spAutoFit/>
+          </a:bodyPr>
+          <a:lstStyle/>
+          <a:p>
+            <a:r>
+              <a:rPr sz="950" b="0" i="0">
+                <a:solidFill>
+                  <a:srgbClr val="9C2E23"/>
+                </a:solidFill>
+                <a:latin typeface="Arial"/>
+              </a:rPr>
+              <a:t>Tracking error (median)</a:t>
+            </a:r>
+          </a:p>
+        </p:txBody>
+      </p:sp>
+      <p:sp>
+        <p:nvSpPr>
+          <p:cNvPr id="17472" name="TextBox 17471"/>
+          <p:cNvSpPr txBox="1"/>
+          <p:nvPr/>
+        </p:nvSpPr>
+        <p:spPr>
+          <a:xfrm>
+            <a:off x="4654296" y="5381244"/>
+            <a:ext cx="3520440" cy="297180"/>
+          </a:xfrm>
+          <a:prstGeom prst="rect">
+            <a:avLst/>
+          </a:prstGeom>
+          <a:noFill/>
+        </p:spPr>
+        <p:txBody>
+          <a:bodyPr wrap="square" anchor="ctr" lIns="0" rIns="0" tIns="0" bIns="0">
+            <a:spAutoFit/>
+          </a:bodyPr>
+          <a:lstStyle/>
+          <a:p>
+            <a:r>
+              <a:rPr sz="950" b="0" i="0">
+                <a:solidFill>
+                  <a:srgbClr val="9C2E23"/>
+                </a:solidFill>
+                <a:latin typeface="Arial"/>
+              </a:rPr>
+              <a:t>≤ 10 px</a:t>
+            </a:r>
+          </a:p>
+        </p:txBody>
+      </p:sp>
+      <p:sp>
+        <p:nvSpPr>
           <p:cNvPr id="17473" name="TextBox 17472"/>
           <p:cNvSpPr txBox="1"/>
           <p:nvPr/>
         </p:nvSpPr>
         <p:spPr>
           <a:xfrm>
-            <a:off x="676656" y="5381244"/>
-            <a:ext cx="3977639" cy="297180"/>
+            <a:off x="8174736" y="5381244"/>
+            <a:ext cx="3246120" cy="297180"/>
           </a:xfrm>
           <a:prstGeom prst="rect">
             <a:avLst/>
@@ -13091,13 +17331,13 @@
           <a:lstStyle/>
           <a:p>
             <a:r>
-              <a:rPr sz="950" b="0" i="0">
+              <a:rPr sz="950" b="1" i="0">
                 <a:solidFill>
                   <a:srgbClr val="9C2E23"/>
                 </a:solidFill>
                 <a:latin typeface="Arial"/>
               </a:rPr>
-              <a:t>Tracking error (median)</a:t>
+              <a:t>2,367 → 170 px  — open</a:t>
             </a:r>
           </a:p>
         </p:txBody>
@@ -13110,8 +17350,8 @@
         </p:nvSpPr>
         <p:spPr>
           <a:xfrm>
-            <a:off x="4654296" y="5381244"/>
-            <a:ext cx="3520440" cy="297180"/>
+            <a:off x="11420855" y="5381244"/>
+            <a:ext cx="320040" cy="297180"/>
           </a:xfrm>
           <a:prstGeom prst="rect">
             <a:avLst/>
@@ -13124,82 +17364,14 @@
           </a:bodyPr>
           <a:lstStyle/>
           <a:p>
-            <a:r>
-              <a:rPr sz="950" b="0" i="0">
+            <a:pPr algn="ctr"/>
+            <a:r>
+              <a:rPr sz="1100" b="1" i="0">
                 <a:solidFill>
                   <a:srgbClr val="9C2E23"/>
                 </a:solidFill>
                 <a:latin typeface="Arial"/>
               </a:rPr>
-              <a:t>≤ 10 px</a:t>
-            </a:r>
-          </a:p>
-        </p:txBody>
-      </p:sp>
-      <p:sp>
-        <p:nvSpPr>
-          <p:cNvPr id="17475" name="TextBox 17474"/>
-          <p:cNvSpPr txBox="1"/>
-          <p:nvPr/>
-        </p:nvSpPr>
-        <p:spPr>
-          <a:xfrm>
-            <a:off x="8174736" y="5381244"/>
-            <a:ext cx="3246120" cy="297180"/>
-          </a:xfrm>
-          <a:prstGeom prst="rect">
-            <a:avLst/>
-          </a:prstGeom>
-          <a:noFill/>
-        </p:spPr>
-        <p:txBody>
-          <a:bodyPr wrap="square" anchor="ctr" lIns="0" rIns="0" tIns="0" bIns="0">
-            <a:spAutoFit/>
-          </a:bodyPr>
-          <a:lstStyle/>
-          <a:p>
-            <a:r>
-              <a:rPr sz="950" b="1" i="0">
-                <a:solidFill>
-                  <a:srgbClr val="9C2E23"/>
-                </a:solidFill>
-                <a:latin typeface="Arial"/>
-              </a:rPr>
-              <a:t>2,367 → 170 px  — open</a:t>
-            </a:r>
-          </a:p>
-        </p:txBody>
-      </p:sp>
-      <p:sp>
-        <p:nvSpPr>
-          <p:cNvPr id="17476" name="TextBox 17475"/>
-          <p:cNvSpPr txBox="1"/>
-          <p:nvPr/>
-        </p:nvSpPr>
-        <p:spPr>
-          <a:xfrm>
-            <a:off x="11420855" y="5381244"/>
-            <a:ext cx="320040" cy="297180"/>
-          </a:xfrm>
-          <a:prstGeom prst="rect">
-            <a:avLst/>
-          </a:prstGeom>
-          <a:noFill/>
-        </p:spPr>
-        <p:txBody>
-          <a:bodyPr wrap="square" anchor="ctr" lIns="0" rIns="0" tIns="0" bIns="0">
-            <a:spAutoFit/>
-          </a:bodyPr>
-          <a:lstStyle/>
-          <a:p>
-            <a:pPr algn="ctr"/>
-            <a:r>
-              <a:rPr sz="1100" b="1" i="0">
-                <a:solidFill>
-                  <a:srgbClr val="9C2E23"/>
-                </a:solidFill>
-                <a:latin typeface="Arial"/>
-              </a:rPr>
               <a:t>✗</a:t>
             </a:r>
           </a:p>
@@ -13207,7 +17379,7 @@
       </p:sp>
       <p:sp>
         <p:nvSpPr>
-          <p:cNvPr id="17477" name="Rounded Rectangle 17476"/>
+          <p:cNvPr id="17475" name="Rounded Rectangle 17474"/>
           <p:cNvSpPr/>
           <p:nvPr/>
         </p:nvSpPr>
@@ -13253,14 +17425,82 @@
       </p:sp>
       <p:sp>
         <p:nvSpPr>
+          <p:cNvPr id="17476" name="TextBox 17475"/>
+          <p:cNvSpPr txBox="1"/>
+          <p:nvPr/>
+        </p:nvSpPr>
+        <p:spPr>
+          <a:xfrm>
+            <a:off x="676656" y="5678424"/>
+            <a:ext cx="3977639" cy="297180"/>
+          </a:xfrm>
+          <a:prstGeom prst="rect">
+            <a:avLst/>
+          </a:prstGeom>
+          <a:noFill/>
+        </p:spPr>
+        <p:txBody>
+          <a:bodyPr wrap="square" anchor="ctr" lIns="0" rIns="0" tIns="0" bIns="0">
+            <a:spAutoFit/>
+          </a:bodyPr>
+          <a:lstStyle/>
+          <a:p>
+            <a:r>
+              <a:rPr sz="950" b="0" i="0">
+                <a:solidFill>
+                  <a:srgbClr val="9C2E23"/>
+                </a:solidFill>
+                <a:latin typeface="Arial"/>
+              </a:rPr>
+              <a:t>Processing speed</a:t>
+            </a:r>
+          </a:p>
+        </p:txBody>
+      </p:sp>
+      <p:sp>
+        <p:nvSpPr>
+          <p:cNvPr id="17477" name="TextBox 17476"/>
+          <p:cNvSpPr txBox="1"/>
+          <p:nvPr/>
+        </p:nvSpPr>
+        <p:spPr>
+          <a:xfrm>
+            <a:off x="4654296" y="5678424"/>
+            <a:ext cx="3520440" cy="297180"/>
+          </a:xfrm>
+          <a:prstGeom prst="rect">
+            <a:avLst/>
+          </a:prstGeom>
+          <a:noFill/>
+        </p:spPr>
+        <p:txBody>
+          <a:bodyPr wrap="square" anchor="ctr" lIns="0" rIns="0" tIns="0" bIns="0">
+            <a:spAutoFit/>
+          </a:bodyPr>
+          <a:lstStyle/>
+          <a:p>
+            <a:r>
+              <a:rPr sz="950" b="0" i="0">
+                <a:solidFill>
+                  <a:srgbClr val="9C2E23"/>
+                </a:solidFill>
+                <a:latin typeface="Arial"/>
+              </a:rPr>
+              <a:t>≥ 20 FPS</a:t>
+            </a:r>
+          </a:p>
+        </p:txBody>
+      </p:sp>
+      <p:sp>
+        <p:nvSpPr>
           <p:cNvPr id="17478" name="TextBox 17477"/>
           <p:cNvSpPr txBox="1"/>
           <p:nvPr/>
         </p:nvSpPr>
         <p:spPr>
           <a:xfrm>
-            <a:off x="676656" y="5678424"/>
-            <a:ext cx="3977639" cy="297180"/>
+            <a:off x="8174736" y="5678424"/>
+            <a:ext cx="3246120" cy="297180"/>
           </a:xfrm>
           <a:prstGeom prst="rect">
             <a:avLst/>
@@ -13274,13 +17514,13 @@
           <a:lstStyle/>
           <a:p>
             <a:r>
-              <a:rPr sz="950" b="0" i="0">
+              <a:rPr sz="950" b="1" i="0">
                 <a:solidFill>
                   <a:srgbClr val="9C2E23"/>
                 </a:solidFill>
                 <a:latin typeface="Arial"/>
               </a:rPr>
-              <a:t>Processing speed</a:t>
+              <a:t>9.2 → 14.7 FPS  — open</a:t>
             </a:r>
           </a:p>
         </p:txBody>
@@ -13293,8 +17533,8 @@
         </p:nvSpPr>
         <p:spPr>
           <a:xfrm>
-            <a:off x="4654296" y="5678424"/>
-            <a:ext cx="3520440" cy="297180"/>
+            <a:off x="11420855" y="5678424"/>
+            <a:ext cx="320040" cy="297180"/>
           </a:xfrm>
           <a:prstGeom prst="rect">
             <a:avLst/>
@@ -13307,82 +17547,14 @@
           </a:bodyPr>
           <a:lstStyle/>
           <a:p>
-            <a:r>
-              <a:rPr sz="950" b="0" i="0">
+            <a:pPr algn="ctr"/>
+            <a:r>
+              <a:rPr sz="1100" b="1" i="0">
                 <a:solidFill>
                   <a:srgbClr val="9C2E23"/>
                 </a:solidFill>
                 <a:latin typeface="Arial"/>
               </a:rPr>
-              <a:t>≥ 20 FPS</a:t>
-            </a:r>
-          </a:p>
-        </p:txBody>
-      </p:sp>
-      <p:sp>
-        <p:nvSpPr>
-          <p:cNvPr id="17480" name="TextBox 17479"/>
-          <p:cNvSpPr txBox="1"/>
-          <p:nvPr/>
-        </p:nvSpPr>
-        <p:spPr>
-          <a:xfrm>
-            <a:off x="8174736" y="5678424"/>
-            <a:ext cx="3246120" cy="297180"/>
-          </a:xfrm>
-          <a:prstGeom prst="rect">
-            <a:avLst/>
-          </a:prstGeom>
-          <a:noFill/>
-        </p:spPr>
-        <p:txBody>
-          <a:bodyPr wrap="square" anchor="ctr" lIns="0" rIns="0" tIns="0" bIns="0">
-            <a:spAutoFit/>
-          </a:bodyPr>
-          <a:lstStyle/>
-          <a:p>
-            <a:r>
-              <a:rPr sz="950" b="1" i="0">
-                <a:solidFill>
-                  <a:srgbClr val="9C2E23"/>
-                </a:solidFill>
-                <a:latin typeface="Arial"/>
-              </a:rPr>
-              <a:t>9.2 FPS  — open</a:t>
-            </a:r>
-          </a:p>
-        </p:txBody>
-      </p:sp>
-      <p:sp>
-        <p:nvSpPr>
-          <p:cNvPr id="17481" name="TextBox 17480"/>
-          <p:cNvSpPr txBox="1"/>
-          <p:nvPr/>
-        </p:nvSpPr>
-        <p:spPr>
-          <a:xfrm>
-            <a:off x="11420855" y="5678424"/>
-            <a:ext cx="320040" cy="297180"/>
-          </a:xfrm>
-          <a:prstGeom prst="rect">
-            <a:avLst/>
-          </a:prstGeom>
-          <a:noFill/>
-        </p:spPr>
-        <p:txBody>
-          <a:bodyPr wrap="square" anchor="ctr" lIns="0" rIns="0" tIns="0" bIns="0">
-            <a:spAutoFit/>
-          </a:bodyPr>
-          <a:lstStyle/>
-          <a:p>
-            <a:pPr algn="ctr"/>
-            <a:r>
-              <a:rPr sz="1100" b="1" i="0">
-                <a:solidFill>
-                  <a:srgbClr val="9C2E23"/>
-                </a:solidFill>
-                <a:latin typeface="Arial"/>
-              </a:rPr>
               <a:t>✗</a:t>
             </a:r>
           </a:p>
@@ -13390,7 +17562,7 @@
       </p:sp>
       <p:sp>
         <p:nvSpPr>
-          <p:cNvPr id="17482" name="Rounded Rectangle 17481"/>
+          <p:cNvPr id="17480" name="Rounded Rectangle 17479"/>
           <p:cNvSpPr/>
           <p:nvPr/>
         </p:nvSpPr>
@@ -13436,7 +17608,7 @@
       </p:sp>
       <p:sp>
         <p:nvSpPr>
-          <p:cNvPr id="17483" name="TextBox 17482"/>
+          <p:cNvPr id="17481" name="TextBox 17480"/>
           <p:cNvSpPr txBox="1"/>
           <p:nvPr/>
         </p:nvSpPr>
